--- a/slides/docker-session4-custom-image-dockerhub.pptx
+++ b/slides/docker-session4-custom-image-dockerhub.pptx
@@ -5,7 +5,7 @@
     <p:sldMasterId id="2147483648" r:id="rId1"/>
   </p:sldMasterIdLst>
   <p:notesMasterIdLst>
-    <p:notesMasterId r:id="rId29"/>
+    <p:notesMasterId r:id="rId30"/>
   </p:notesMasterIdLst>
   <p:sldIdLst>
     <p:sldId id="256" r:id="rId2"/>
@@ -26,15 +26,16 @@
     <p:sldId id="283" r:id="rId17"/>
     <p:sldId id="285" r:id="rId18"/>
     <p:sldId id="313" r:id="rId19"/>
-    <p:sldId id="314" r:id="rId20"/>
-    <p:sldId id="312" r:id="rId21"/>
-    <p:sldId id="272" r:id="rId22"/>
-    <p:sldId id="273" r:id="rId23"/>
-    <p:sldId id="274" r:id="rId24"/>
-    <p:sldId id="290" r:id="rId25"/>
-    <p:sldId id="291" r:id="rId26"/>
-    <p:sldId id="292" r:id="rId27"/>
-    <p:sldId id="293" r:id="rId28"/>
+    <p:sldId id="315" r:id="rId20"/>
+    <p:sldId id="314" r:id="rId21"/>
+    <p:sldId id="312" r:id="rId22"/>
+    <p:sldId id="272" r:id="rId23"/>
+    <p:sldId id="273" r:id="rId24"/>
+    <p:sldId id="274" r:id="rId25"/>
+    <p:sldId id="290" r:id="rId26"/>
+    <p:sldId id="291" r:id="rId27"/>
+    <p:sldId id="292" r:id="rId28"/>
+    <p:sldId id="293" r:id="rId29"/>
   </p:sldIdLst>
   <p:sldSz cx="12192000" cy="6858000"/>
   <p:notesSz cx="6858000" cy="9144000"/>
@@ -133,6 +134,11 @@
       </a:defRPr>
     </a:lvl9pPr>
   </p:defaultTextStyle>
+  <p:extLst>
+    <p:ext uri="{EFAFB233-063F-42B5-8137-9DF3F51BA10A}">
+      <p15:sldGuideLst xmlns:p15="http://schemas.microsoft.com/office/powerpoint/2012/main"/>
+    </p:ext>
+  </p:extLst>
 </p:presentation>
 </file>
 
@@ -1123,7 +1129,7 @@
         <p:cNvPr id="1" name="">
           <a:extLst>
             <a:ext uri="{FF2B5EF4-FFF2-40B4-BE49-F238E27FC236}">
-              <a16:creationId xmlns:a16="http://schemas.microsoft.com/office/drawing/2014/main" id="{21F68A71-FABC-4056-D307-D64E9BE88B70}"/>
+              <a16:creationId xmlns:a16="http://schemas.microsoft.com/office/drawing/2014/main" id="{F7C8DFAF-0756-87C1-3992-79C8616B988A}"/>
             </a:ext>
           </a:extLst>
         </p:cNvPr>
@@ -1143,7 +1149,7 @@
           <p:cNvPr id="2" name="Slide Image Placeholder 1">
             <a:extLst>
               <a:ext uri="{FF2B5EF4-FFF2-40B4-BE49-F238E27FC236}">
-                <a16:creationId xmlns:a16="http://schemas.microsoft.com/office/drawing/2014/main" id="{346B8704-CA2E-69D7-A721-8B00E6211942}"/>
+                <a16:creationId xmlns:a16="http://schemas.microsoft.com/office/drawing/2014/main" id="{C3BD71AF-D401-CFBA-A75E-C0EFEEF21FE8}"/>
               </a:ext>
             </a:extLst>
           </p:cNvPr>
@@ -1161,7 +1167,7 @@
           <p:cNvPr id="3" name="Notes Placeholder 2">
             <a:extLst>
               <a:ext uri="{FF2B5EF4-FFF2-40B4-BE49-F238E27FC236}">
-                <a16:creationId xmlns:a16="http://schemas.microsoft.com/office/drawing/2014/main" id="{A32EB00C-D140-DBD4-9013-C95D10E3DDDA}"/>
+                <a16:creationId xmlns:a16="http://schemas.microsoft.com/office/drawing/2014/main" id="{F40191FA-F959-2781-5022-DE99B995A7E0}"/>
               </a:ext>
             </a:extLst>
           </p:cNvPr>
@@ -1186,7 +1192,7 @@
           <p:cNvPr id="4" name="Slide Number Placeholder 3">
             <a:extLst>
               <a:ext uri="{FF2B5EF4-FFF2-40B4-BE49-F238E27FC236}">
-                <a16:creationId xmlns:a16="http://schemas.microsoft.com/office/drawing/2014/main" id="{A3715A20-5649-FD4F-1B47-CF4A5FA0F5F6}"/>
+                <a16:creationId xmlns:a16="http://schemas.microsoft.com/office/drawing/2014/main" id="{A554C725-9307-0285-FDE3-66CC66AE0411}"/>
               </a:ext>
             </a:extLst>
           </p:cNvPr>
@@ -1209,7 +1215,7 @@
     </p:spTree>
     <p:extLst>
       <p:ext uri="{BB962C8B-B14F-4D97-AF65-F5344CB8AC3E}">
-        <p14:creationId xmlns:p14="http://schemas.microsoft.com/office/powerpoint/2010/main" val="2159328921"/>
+        <p14:creationId xmlns:p14="http://schemas.microsoft.com/office/powerpoint/2010/main" val="2407608137"/>
       </p:ext>
     </p:extLst>
   </p:cSld>
@@ -1299,7 +1305,13 @@
   <p:cSld>
     <p:spTree>
       <p:nvGrpSpPr>
-        <p:cNvPr id="1" name=""/>
+        <p:cNvPr id="1" name="">
+          <a:extLst>
+            <a:ext uri="{FF2B5EF4-FFF2-40B4-BE49-F238E27FC236}">
+              <a16:creationId xmlns:a16="http://schemas.microsoft.com/office/drawing/2014/main" id="{21F68A71-FABC-4056-D307-D64E9BE88B70}"/>
+            </a:ext>
+          </a:extLst>
+        </p:cNvPr>
         <p:cNvGrpSpPr/>
         <p:nvPr/>
       </p:nvGrpSpPr>
@@ -1313,7 +1325,13 @@
       </p:grpSpPr>
       <p:sp>
         <p:nvSpPr>
-          <p:cNvPr id="2" name="Slide Image Placeholder 1"/>
+          <p:cNvPr id="2" name="Slide Image Placeholder 1">
+            <a:extLst>
+              <a:ext uri="{FF2B5EF4-FFF2-40B4-BE49-F238E27FC236}">
+                <a16:creationId xmlns:a16="http://schemas.microsoft.com/office/drawing/2014/main" id="{346B8704-CA2E-69D7-A721-8B00E6211942}"/>
+              </a:ext>
+            </a:extLst>
+          </p:cNvPr>
           <p:cNvSpPr>
             <a:spLocks noGrp="1" noRot="1" noChangeAspect="1"/>
           </p:cNvSpPr>
@@ -1325,7 +1343,13 @@
       </p:sp>
       <p:sp>
         <p:nvSpPr>
-          <p:cNvPr id="3" name="Notes Placeholder 2"/>
+          <p:cNvPr id="3" name="Notes Placeholder 2">
+            <a:extLst>
+              <a:ext uri="{FF2B5EF4-FFF2-40B4-BE49-F238E27FC236}">
+                <a16:creationId xmlns:a16="http://schemas.microsoft.com/office/drawing/2014/main" id="{A32EB00C-D140-DBD4-9013-C95D10E3DDDA}"/>
+              </a:ext>
+            </a:extLst>
+          </p:cNvPr>
           <p:cNvSpPr>
             <a:spLocks noGrp="1"/>
           </p:cNvSpPr>
@@ -1344,7 +1368,13 @@
       </p:sp>
       <p:sp>
         <p:nvSpPr>
-          <p:cNvPr id="4" name="Slide Number Placeholder 3"/>
+          <p:cNvPr id="4" name="Slide Number Placeholder 3">
+            <a:extLst>
+              <a:ext uri="{FF2B5EF4-FFF2-40B4-BE49-F238E27FC236}">
+                <a16:creationId xmlns:a16="http://schemas.microsoft.com/office/drawing/2014/main" id="{A3715A20-5649-FD4F-1B47-CF4A5FA0F5F6}"/>
+              </a:ext>
+            </a:extLst>
+          </p:cNvPr>
           <p:cNvSpPr>
             <a:spLocks noGrp="1"/>
           </p:cNvSpPr>
@@ -1362,6 +1392,11 @@
         </p:txBody>
       </p:sp>
     </p:spTree>
+    <p:extLst>
+      <p:ext uri="{BB962C8B-B14F-4D97-AF65-F5344CB8AC3E}">
+        <p14:creationId xmlns:p14="http://schemas.microsoft.com/office/powerpoint/2010/main" val="2159328921"/>
+      </p:ext>
+    </p:extLst>
   </p:cSld>
   <p:clrMapOvr>
     <a:masterClrMapping/>
@@ -1745,6 +1780,81 @@
 </file>
 
 <file path=ppt/notesSlides/notesSlide26.xml><?xml version="1.0" encoding="utf-8"?>
+<p:notes xmlns:a="http://schemas.openxmlformats.org/drawingml/2006/main" xmlns:r="http://schemas.openxmlformats.org/officeDocument/2006/relationships" xmlns:p="http://schemas.openxmlformats.org/presentationml/2006/main">
+  <p:cSld>
+    <p:spTree>
+      <p:nvGrpSpPr>
+        <p:cNvPr id="1" name=""/>
+        <p:cNvGrpSpPr/>
+        <p:nvPr/>
+      </p:nvGrpSpPr>
+      <p:grpSpPr>
+        <a:xfrm>
+          <a:off x="0" y="0"/>
+          <a:ext cx="0" cy="0"/>
+          <a:chOff x="0" y="0"/>
+          <a:chExt cx="0" cy="0"/>
+        </a:xfrm>
+      </p:grpSpPr>
+      <p:sp>
+        <p:nvSpPr>
+          <p:cNvPr id="2" name="Slide Image Placeholder 1"/>
+          <p:cNvSpPr>
+            <a:spLocks noGrp="1" noRot="1" noChangeAspect="1"/>
+          </p:cNvSpPr>
+          <p:nvPr>
+            <p:ph type="sldImg"/>
+          </p:nvPr>
+        </p:nvSpPr>
+        <p:spPr/>
+      </p:sp>
+      <p:sp>
+        <p:nvSpPr>
+          <p:cNvPr id="3" name="Notes Placeholder 2"/>
+          <p:cNvSpPr>
+            <a:spLocks noGrp="1"/>
+          </p:cNvSpPr>
+          <p:nvPr>
+            <p:ph type="body" idx="1"/>
+          </p:nvPr>
+        </p:nvSpPr>
+        <p:spPr/>
+        <p:txBody>
+          <a:bodyPr/>
+          <a:lstStyle/>
+          <a:p>
+            <a:endParaRPr/>
+          </a:p>
+        </p:txBody>
+      </p:sp>
+      <p:sp>
+        <p:nvSpPr>
+          <p:cNvPr id="4" name="Slide Number Placeholder 3"/>
+          <p:cNvSpPr>
+            <a:spLocks noGrp="1"/>
+          </p:cNvSpPr>
+          <p:nvPr>
+            <p:ph type="sldNum" idx="5"/>
+          </p:nvPr>
+        </p:nvSpPr>
+        <p:spPr/>
+        <p:txBody>
+          <a:bodyPr/>
+          <a:lstStyle/>
+          <a:p>
+            <a:endParaRPr/>
+          </a:p>
+        </p:txBody>
+      </p:sp>
+    </p:spTree>
+  </p:cSld>
+  <p:clrMapOvr>
+    <a:masterClrMapping/>
+  </p:clrMapOvr>
+</p:notes>
+</file>
+
+<file path=ppt/notesSlides/notesSlide27.xml><?xml version="1.0" encoding="utf-8"?>
 <p:notes xmlns:a="http://schemas.openxmlformats.org/drawingml/2006/main" xmlns:r="http://schemas.openxmlformats.org/officeDocument/2006/relationships" xmlns:p="http://schemas.openxmlformats.org/presentationml/2006/main">
   <p:cSld>
     <p:spTree>
@@ -12628,6 +12738,14 @@
               <a:t>context: .</a:t>
             </a:r>
             <a:r>
+              <a:rPr lang="en-US" altLang="zh-TW" dirty="0">
+                <a:solidFill>
+                  <a:schemeClr val="bg1"/>
+                </a:solidFill>
+              </a:rPr>
+              <a:t>/app</a:t>
+            </a:r>
+            <a:r>
               <a:rPr lang="zh-TW" altLang="en-US" dirty="0">
                 <a:solidFill>
                   <a:schemeClr val="bg1"/>
@@ -12661,38 +12779,7 @@
           </a:p>
           <a:p>
             <a:r>
-              <a:rPr lang="zh-TW" altLang="en-US" dirty="0">
-                <a:solidFill>
-                  <a:schemeClr val="bg1"/>
-                </a:solidFill>
-              </a:rPr>
-              <a:t>  </a:t>
-            </a:r>
-            <a:r>
-              <a:rPr lang="zh-TW" altLang="zh-TW" dirty="0">
-                <a:solidFill>
-                  <a:schemeClr val="bg1"/>
-                </a:solidFill>
-              </a:rPr>
-              <a:t>image: my-flask-app:latest</a:t>
-            </a:r>
-            <a:r>
-              <a:rPr lang="zh-TW" altLang="en-US" dirty="0">
-                <a:solidFill>
-                  <a:schemeClr val="bg1"/>
-                </a:solidFill>
-              </a:rPr>
-              <a:t>  </a:t>
-            </a:r>
-            <a:endParaRPr lang="zh-TW" altLang="zh-TW" dirty="0">
-              <a:solidFill>
-                <a:schemeClr val="bg1"/>
-              </a:solidFill>
-            </a:endParaRPr>
-          </a:p>
-          <a:p>
-            <a:r>
-              <a:rPr lang="zh-TW" altLang="en-US" dirty="0">
+              <a:rPr lang="en-US" altLang="zh-TW" dirty="0">
                 <a:solidFill>
                   <a:schemeClr val="bg1"/>
                 </a:solidFill>
@@ -13316,7 +13403,7 @@
         <p:cNvPr id="1" name="">
           <a:extLst>
             <a:ext uri="{FF2B5EF4-FFF2-40B4-BE49-F238E27FC236}">
-              <a16:creationId xmlns:a16="http://schemas.microsoft.com/office/drawing/2014/main" id="{8F496644-4814-3B4B-0311-3D4541477991}"/>
+              <a16:creationId xmlns:a16="http://schemas.microsoft.com/office/drawing/2014/main" id="{5EEA15A8-8392-8B4F-E59E-95484DEA2733}"/>
             </a:ext>
           </a:extLst>
         </p:cNvPr>
@@ -13336,7 +13423,7 @@
           <p:cNvPr id="15" name="矩形 14">
             <a:extLst>
               <a:ext uri="{FF2B5EF4-FFF2-40B4-BE49-F238E27FC236}">
-                <a16:creationId xmlns:a16="http://schemas.microsoft.com/office/drawing/2014/main" id="{9DF4E20A-26B2-FC18-DFF5-9191440063ED}"/>
+                <a16:creationId xmlns:a16="http://schemas.microsoft.com/office/drawing/2014/main" id="{DB88F08E-32F4-6E95-E6C6-7964AB678803}"/>
               </a:ext>
             </a:extLst>
           </p:cNvPr>
@@ -13398,7 +13485,7 @@
           <p:cNvPr id="2" name="矩形 1">
             <a:extLst>
               <a:ext uri="{FF2B5EF4-FFF2-40B4-BE49-F238E27FC236}">
-                <a16:creationId xmlns:a16="http://schemas.microsoft.com/office/drawing/2014/main" id="{52CC891E-4F90-CF0C-CF54-0D9BA54DB74D}"/>
+                <a16:creationId xmlns:a16="http://schemas.microsoft.com/office/drawing/2014/main" id="{3D2A39FF-C547-F4DE-A3D4-456ACFC73FAF}"/>
               </a:ext>
             </a:extLst>
           </p:cNvPr>
@@ -13450,7 +13537,7 @@
                 <a:ea typeface="Aptos Display"/>
                 <a:cs typeface="Aptos Display"/>
               </a:rPr>
-              <a:t>使用自己的遠端flask</a:t>
+              <a:t>使用自己的flask</a:t>
             </a:r>
             <a:r>
               <a:rPr lang="en-US" sz="2850" b="1" dirty="0">
@@ -13479,7 +13566,7 @@
           <p:cNvPr id="3" name="矩形: 圓角 2">
             <a:extLst>
               <a:ext uri="{FF2B5EF4-FFF2-40B4-BE49-F238E27FC236}">
-                <a16:creationId xmlns:a16="http://schemas.microsoft.com/office/drawing/2014/main" id="{0F4D0CD4-90BF-36AE-3BF7-5CAFCF325129}"/>
+                <a16:creationId xmlns:a16="http://schemas.microsoft.com/office/drawing/2014/main" id="{76813037-F850-8673-3040-B2B5A1530203}"/>
               </a:ext>
             </a:extLst>
           </p:cNvPr>
@@ -13533,7 +13620,7 @@
           <p:cNvPr id="4" name="橢圓 3">
             <a:extLst>
               <a:ext uri="{FF2B5EF4-FFF2-40B4-BE49-F238E27FC236}">
-                <a16:creationId xmlns:a16="http://schemas.microsoft.com/office/drawing/2014/main" id="{8607A3D3-FE78-08A9-90BE-3CED3F89A0A5}"/>
+                <a16:creationId xmlns:a16="http://schemas.microsoft.com/office/drawing/2014/main" id="{87F509C2-F4F3-51EA-E9B0-C26219880751}"/>
               </a:ext>
             </a:extLst>
           </p:cNvPr>
@@ -13571,7 +13658,7 @@
           <p:cNvPr id="5" name="橢圓 4">
             <a:extLst>
               <a:ext uri="{FF2B5EF4-FFF2-40B4-BE49-F238E27FC236}">
-                <a16:creationId xmlns:a16="http://schemas.microsoft.com/office/drawing/2014/main" id="{ACF0C8B3-4546-3F8A-C57A-C23FC47FF3BD}"/>
+                <a16:creationId xmlns:a16="http://schemas.microsoft.com/office/drawing/2014/main" id="{A7B0C55F-75A7-F3C1-CF0B-336BD42D2E9A}"/>
               </a:ext>
             </a:extLst>
           </p:cNvPr>
@@ -13609,7 +13696,7 @@
           <p:cNvPr id="6" name="橢圓 5">
             <a:extLst>
               <a:ext uri="{FF2B5EF4-FFF2-40B4-BE49-F238E27FC236}">
-                <a16:creationId xmlns:a16="http://schemas.microsoft.com/office/drawing/2014/main" id="{358E9AD3-754D-18B1-AA81-561E9DA4DC3A}"/>
+                <a16:creationId xmlns:a16="http://schemas.microsoft.com/office/drawing/2014/main" id="{BAB27425-2FBD-2EDD-035C-875009EF31C7}"/>
               </a:ext>
             </a:extLst>
           </p:cNvPr>
@@ -13647,7 +13734,7 @@
           <p:cNvPr id="7" name="矩形 6">
             <a:extLst>
               <a:ext uri="{FF2B5EF4-FFF2-40B4-BE49-F238E27FC236}">
-                <a16:creationId xmlns:a16="http://schemas.microsoft.com/office/drawing/2014/main" id="{413623EE-2EBB-3C14-781F-81ED36E55D7D}"/>
+                <a16:creationId xmlns:a16="http://schemas.microsoft.com/office/drawing/2014/main" id="{656FB54A-DFF0-5D3C-05B3-581010038433}"/>
               </a:ext>
             </a:extLst>
           </p:cNvPr>
@@ -13687,7 +13774,7 @@
           </a:p>
           <a:p>
             <a:r>
-              <a:rPr lang="zh-TW" altLang="en-US" dirty="0">
+              <a:rPr lang="en-US" altLang="zh-TW" dirty="0">
                 <a:solidFill>
                   <a:schemeClr val="bg1"/>
                 </a:solidFill>
@@ -13700,31 +13787,7 @@
                   <a:schemeClr val="bg1"/>
                 </a:solidFill>
               </a:rPr>
-              <a:t>image: </a:t>
-            </a:r>
-            <a:r>
-              <a:rPr lang="en-US" altLang="zh-TW" dirty="0" err="1">
-                <a:solidFill>
-                  <a:schemeClr val="bg1"/>
-                </a:solidFill>
-              </a:rPr>
-              <a:t>yourname</a:t>
-            </a:r>
-            <a:r>
-              <a:rPr lang="en-US" altLang="zh-TW" dirty="0">
-                <a:solidFill>
-                  <a:schemeClr val="bg1"/>
-                </a:solidFill>
-              </a:rPr>
-              <a:t>/</a:t>
-            </a:r>
-            <a:r>
-              <a:rPr lang="zh-TW" altLang="zh-TW" dirty="0">
-                <a:solidFill>
-                  <a:schemeClr val="bg1"/>
-                </a:solidFill>
-              </a:rPr>
-              <a:t>my-flask-app:latest</a:t>
+              <a:t>image: my-flask-app:latest</a:t>
             </a:r>
             <a:r>
               <a:rPr lang="zh-TW" altLang="en-US" dirty="0">
@@ -13940,7 +14003,7 @@
           <p:cNvPr id="8" name="矩形: 圓角 7">
             <a:extLst>
               <a:ext uri="{FF2B5EF4-FFF2-40B4-BE49-F238E27FC236}">
-                <a16:creationId xmlns:a16="http://schemas.microsoft.com/office/drawing/2014/main" id="{308796B6-52D8-4776-0878-338DAEA956F7}"/>
+                <a16:creationId xmlns:a16="http://schemas.microsoft.com/office/drawing/2014/main" id="{7EA80B9E-DD2A-BFEA-BF85-32D3F59134BA}"/>
               </a:ext>
             </a:extLst>
           </p:cNvPr>
@@ -13994,7 +14057,7 @@
           <p:cNvPr id="9" name="矩形 8">
             <a:extLst>
               <a:ext uri="{FF2B5EF4-FFF2-40B4-BE49-F238E27FC236}">
-                <a16:creationId xmlns:a16="http://schemas.microsoft.com/office/drawing/2014/main" id="{EFF6F66E-A9FB-77E7-0EA2-4FB395215E67}"/>
+                <a16:creationId xmlns:a16="http://schemas.microsoft.com/office/drawing/2014/main" id="{A18890AA-D94F-E4B4-F8A2-3E48E21CADA3}"/>
               </a:ext>
             </a:extLst>
           </p:cNvPr>
@@ -14064,7 +14127,7 @@
           <p:cNvPr id="10" name="矩形 9">
             <a:extLst>
               <a:ext uri="{FF2B5EF4-FFF2-40B4-BE49-F238E27FC236}">
-                <a16:creationId xmlns:a16="http://schemas.microsoft.com/office/drawing/2014/main" id="{30E92BC7-0AFA-AEA8-FC4B-E1FCD4AD20C8}"/>
+                <a16:creationId xmlns:a16="http://schemas.microsoft.com/office/drawing/2014/main" id="{CCF950C0-1091-4CBD-F5BF-015D8CE019B9}"/>
               </a:ext>
             </a:extLst>
           </p:cNvPr>
@@ -14180,7 +14243,7 @@
           <p:cNvPr id="12" name="矩形 11">
             <a:extLst>
               <a:ext uri="{FF2B5EF4-FFF2-40B4-BE49-F238E27FC236}">
-                <a16:creationId xmlns:a16="http://schemas.microsoft.com/office/drawing/2014/main" id="{3B635F64-AF7B-FDFC-2CCB-A55BBC277B04}"/>
+                <a16:creationId xmlns:a16="http://schemas.microsoft.com/office/drawing/2014/main" id="{6505E446-B194-E7E0-73DD-5235C9FDB615}"/>
               </a:ext>
             </a:extLst>
           </p:cNvPr>
@@ -14218,7 +14281,7 @@
           <p:cNvPr id="13" name="矩形 12">
             <a:extLst>
               <a:ext uri="{FF2B5EF4-FFF2-40B4-BE49-F238E27FC236}">
-                <a16:creationId xmlns:a16="http://schemas.microsoft.com/office/drawing/2014/main" id="{479CD3FF-006B-A65E-EDCB-171E8975EF7A}"/>
+                <a16:creationId xmlns:a16="http://schemas.microsoft.com/office/drawing/2014/main" id="{7FDA39BA-01B2-EF1A-8F88-988623827072}"/>
               </a:ext>
             </a:extLst>
           </p:cNvPr>
@@ -14280,7 +14343,7 @@
           <p:cNvPr id="14" name="矩形 13">
             <a:extLst>
               <a:ext uri="{FF2B5EF4-FFF2-40B4-BE49-F238E27FC236}">
-                <a16:creationId xmlns:a16="http://schemas.microsoft.com/office/drawing/2014/main" id="{69D36E0C-3DDB-D09C-F7CC-5F3419D13928}"/>
+                <a16:creationId xmlns:a16="http://schemas.microsoft.com/office/drawing/2014/main" id="{895A26D1-9796-700E-BC15-B0C2D9BFBAB8}"/>
               </a:ext>
             </a:extLst>
           </p:cNvPr>
@@ -14340,7 +14403,7 @@
     </p:spTree>
     <p:extLst>
       <p:ext uri="{BB962C8B-B14F-4D97-AF65-F5344CB8AC3E}">
-        <p14:creationId xmlns:p14="http://schemas.microsoft.com/office/powerpoint/2010/main" val="1716190585"/>
+        <p14:creationId xmlns:p14="http://schemas.microsoft.com/office/powerpoint/2010/main" val="3568310058"/>
       </p:ext>
     </p:extLst>
   </p:cSld>
@@ -15494,9 +15557,23 @@
 <file path=ppt/slides/slide20.xml><?xml version="1.0" encoding="utf-8"?>
 <p:sld xmlns:a="http://schemas.openxmlformats.org/drawingml/2006/main" xmlns:r="http://schemas.openxmlformats.org/officeDocument/2006/relationships" xmlns:p="http://schemas.openxmlformats.org/presentationml/2006/main">
   <p:cSld>
+    <p:bg>
+      <p:bgPr>
+        <a:solidFill>
+          <a:srgbClr val="0B1220"/>
+        </a:solidFill>
+        <a:effectLst/>
+      </p:bgPr>
+    </p:bg>
     <p:spTree>
       <p:nvGrpSpPr>
-        <p:cNvPr id="1" name=""/>
+        <p:cNvPr id="1" name="">
+          <a:extLst>
+            <a:ext uri="{FF2B5EF4-FFF2-40B4-BE49-F238E27FC236}">
+              <a16:creationId xmlns:a16="http://schemas.microsoft.com/office/drawing/2014/main" id="{8F496644-4814-3B4B-0311-3D4541477991}"/>
+            </a:ext>
+          </a:extLst>
+        </p:cNvPr>
         <p:cNvGrpSpPr/>
         <p:nvPr/>
       </p:nvGrpSpPr>
@@ -15510,35 +15587,1006 @@
       </p:grpSpPr>
       <p:sp>
         <p:nvSpPr>
-          <p:cNvPr id="3" name="文字方塊 2">
-            <a:extLst>
-              <a:ext uri="{FF2B5EF4-FFF2-40B4-BE49-F238E27FC236}">
-                <a16:creationId xmlns:a16="http://schemas.microsoft.com/office/drawing/2014/main" id="{A0046382-DB90-61EC-B4A3-9C75E13AAD73}"/>
-              </a:ext>
-            </a:extLst>
-          </p:cNvPr>
-          <p:cNvSpPr txBox="1"/>
-          <p:nvPr/>
-        </p:nvSpPr>
-        <p:spPr>
-          <a:xfrm>
-            <a:off x="7569200" y="5411450"/>
-            <a:ext cx="5143500" cy="1446550"/>
+          <p:cNvPr id="15" name="矩形 14">
+            <a:extLst>
+              <a:ext uri="{FF2B5EF4-FFF2-40B4-BE49-F238E27FC236}">
+                <a16:creationId xmlns:a16="http://schemas.microsoft.com/office/drawing/2014/main" id="{9DF4E20A-26B2-FC18-DFF5-9191440063ED}"/>
+              </a:ext>
+            </a:extLst>
+          </p:cNvPr>
+          <p:cNvSpPr>
+            <a:spLocks noGrp="1"/>
+          </p:cNvSpPr>
+          <p:nvPr/>
+        </p:nvSpPr>
+        <p:spPr>
+          <a:xfrm>
+            <a:off x="609600" y="400050"/>
+            <a:ext cx="6191250" cy="228600"/>
           </a:xfrm>
           <a:prstGeom prst="rect">
             <a:avLst/>
           </a:prstGeom>
           <a:noFill/>
-        </p:spPr>
-        <p:txBody>
-          <a:bodyPr wrap="square">
-            <a:spAutoFit/>
+          <a:ln w="0">
+            <a:noFill/>
+            <a:prstDash val="solid"/>
+          </a:ln>
+        </p:spPr>
+        <p:txBody>
+          <a:bodyPr lIns="0" tIns="0" rIns="0" bIns="0" anchor="t">
+            <a:normAutofit/>
           </a:bodyPr>
           <a:lstStyle/>
           <a:p>
-            <a:r>
-              <a:rPr lang="zh-TW" altLang="en-US" sz="8800" dirty="0"/>
-              <a:t>額外補充</a:t>
+            <a:pPr algn="l">
+              <a:lnSpc>
+                <a:spcPct val="106000"/>
+              </a:lnSpc>
+              <a:buNone/>
+              <a:defRPr sz="900" b="1">
+                <a:solidFill>
+                  <a:srgbClr val="A5B4FC"/>
+                </a:solidFill>
+                <a:latin typeface="Aptos"/>
+                <a:ea typeface="Aptos"/>
+                <a:cs typeface="Aptos"/>
+              </a:defRPr>
+            </a:pPr>
+            <a:r>
+              <a:rPr sz="900" b="1">
+                <a:solidFill>
+                  <a:srgbClr val="A5B4FC"/>
+                </a:solidFill>
+                <a:latin typeface="Aptos"/>
+                <a:ea typeface="Aptos"/>
+                <a:cs typeface="Aptos"/>
+              </a:rPr>
+              <a:t>EXERCISE P3</a:t>
+            </a:r>
+          </a:p>
+        </p:txBody>
+      </p:sp>
+      <p:sp>
+        <p:nvSpPr>
+          <p:cNvPr id="2" name="矩形 1">
+            <a:extLst>
+              <a:ext uri="{FF2B5EF4-FFF2-40B4-BE49-F238E27FC236}">
+                <a16:creationId xmlns:a16="http://schemas.microsoft.com/office/drawing/2014/main" id="{52CC891E-4F90-CF0C-CF54-0D9BA54DB74D}"/>
+              </a:ext>
+            </a:extLst>
+          </p:cNvPr>
+          <p:cNvSpPr>
+            <a:spLocks noGrp="1"/>
+          </p:cNvSpPr>
+          <p:nvPr/>
+        </p:nvSpPr>
+        <p:spPr>
+          <a:xfrm>
+            <a:off x="609600" y="742950"/>
+            <a:ext cx="9906000" cy="590550"/>
+          </a:xfrm>
+          <a:prstGeom prst="rect">
+            <a:avLst/>
+          </a:prstGeom>
+          <a:noFill/>
+          <a:ln w="0">
+            <a:noFill/>
+            <a:prstDash val="solid"/>
+          </a:ln>
+        </p:spPr>
+        <p:txBody>
+          <a:bodyPr lIns="0" tIns="0" rIns="0" bIns="0" anchor="t">
+            <a:normAutofit/>
+          </a:bodyPr>
+          <a:lstStyle/>
+          <a:p>
+            <a:pPr algn="l">
+              <a:lnSpc>
+                <a:spcPct val="95000"/>
+              </a:lnSpc>
+              <a:buNone/>
+              <a:defRPr sz="2850" b="1">
+                <a:solidFill>
+                  <a:srgbClr val="FFFFFF"/>
+                </a:solidFill>
+                <a:latin typeface="Aptos Display"/>
+                <a:ea typeface="Aptos Display"/>
+                <a:cs typeface="Aptos Display"/>
+              </a:defRPr>
+            </a:pPr>
+            <a:r>
+              <a:rPr lang="en-US" sz="2850" b="1" dirty="0" err="1">
+                <a:solidFill>
+                  <a:srgbClr val="FFFFFF"/>
+                </a:solidFill>
+                <a:latin typeface="Aptos Display"/>
+                <a:ea typeface="Aptos Display"/>
+                <a:cs typeface="Aptos Display"/>
+              </a:rPr>
+              <a:t>使用自己的遠端flask</a:t>
+            </a:r>
+            <a:r>
+              <a:rPr lang="en-US" sz="2850" b="1" dirty="0">
+                <a:solidFill>
+                  <a:srgbClr val="FFFFFF"/>
+                </a:solidFill>
+                <a:latin typeface="Aptos Display"/>
+                <a:ea typeface="Aptos Display"/>
+                <a:cs typeface="Aptos Display"/>
+              </a:rPr>
+              <a:t> image</a:t>
+            </a:r>
+            <a:endParaRPr sz="2850" b="1" dirty="0">
+              <a:solidFill>
+                <a:srgbClr val="FFFFFF"/>
+              </a:solidFill>
+              <a:latin typeface="Aptos Display"/>
+              <a:ea typeface="Aptos Display"/>
+              <a:cs typeface="Aptos Display"/>
+            </a:endParaRPr>
+          </a:p>
+        </p:txBody>
+      </p:sp>
+      <p:sp>
+        <p:nvSpPr>
+          <p:cNvPr id="3" name="矩形: 圓角 2">
+            <a:extLst>
+              <a:ext uri="{FF2B5EF4-FFF2-40B4-BE49-F238E27FC236}">
+                <a16:creationId xmlns:a16="http://schemas.microsoft.com/office/drawing/2014/main" id="{0F4D0CD4-90BF-36AE-3BF7-5CAFCF325129}"/>
+              </a:ext>
+            </a:extLst>
+          </p:cNvPr>
+          <p:cNvSpPr>
+            <a:spLocks noGrp="1"/>
+          </p:cNvSpPr>
+          <p:nvPr/>
+        </p:nvSpPr>
+        <p:spPr>
+          <a:xfrm>
+            <a:off x="800100" y="1428750"/>
+            <a:ext cx="6464300" cy="4686300"/>
+          </a:xfrm>
+          <a:prstGeom prst="roundRect">
+            <a:avLst>
+              <a:gd name="adj" fmla="val 2564"/>
+            </a:avLst>
+          </a:prstGeom>
+          <a:solidFill>
+            <a:srgbClr val="0B1220"/>
+          </a:solidFill>
+          <a:ln w="9525">
+            <a:solidFill>
+              <a:srgbClr val="1E293B"/>
+            </a:solidFill>
+            <a:prstDash val="solid"/>
+          </a:ln>
+        </p:spPr>
+        <p:style>
+          <a:lnRef idx="0">
+            <a:scrgbClr r="0" g="0" b="0"/>
+          </a:lnRef>
+          <a:fillRef idx="0">
+            <a:scrgbClr r="0" g="0" b="0"/>
+          </a:fillRef>
+          <a:effectRef idx="6">
+            <a:scrgbClr r="0" g="0" b="0"/>
+          </a:effectRef>
+          <a:fontRef idx="major"/>
+        </p:style>
+        <p:txBody>
+          <a:bodyPr/>
+          <a:lstStyle/>
+          <a:p>
+            <a:endParaRPr dirty="0"/>
+          </a:p>
+        </p:txBody>
+      </p:sp>
+      <p:sp>
+        <p:nvSpPr>
+          <p:cNvPr id="4" name="橢圓 3">
+            <a:extLst>
+              <a:ext uri="{FF2B5EF4-FFF2-40B4-BE49-F238E27FC236}">
+                <a16:creationId xmlns:a16="http://schemas.microsoft.com/office/drawing/2014/main" id="{8607A3D3-FE78-08A9-90BE-3CED3F89A0A5}"/>
+              </a:ext>
+            </a:extLst>
+          </p:cNvPr>
+          <p:cNvSpPr>
+            <a:spLocks noGrp="1"/>
+          </p:cNvSpPr>
+          <p:nvPr/>
+        </p:nvSpPr>
+        <p:spPr>
+          <a:xfrm>
+            <a:off x="971550" y="1590675"/>
+            <a:ext cx="95250" cy="95250"/>
+          </a:xfrm>
+          <a:prstGeom prst="ellipse">
+            <a:avLst/>
+          </a:prstGeom>
+          <a:solidFill>
+            <a:srgbClr val="FB7185"/>
+          </a:solidFill>
+          <a:ln w="0">
+            <a:noFill/>
+            <a:prstDash val="solid"/>
+          </a:ln>
+        </p:spPr>
+        <p:txBody>
+          <a:bodyPr/>
+          <a:lstStyle/>
+          <a:p>
+            <a:endParaRPr/>
+          </a:p>
+        </p:txBody>
+      </p:sp>
+      <p:sp>
+        <p:nvSpPr>
+          <p:cNvPr id="5" name="橢圓 4">
+            <a:extLst>
+              <a:ext uri="{FF2B5EF4-FFF2-40B4-BE49-F238E27FC236}">
+                <a16:creationId xmlns:a16="http://schemas.microsoft.com/office/drawing/2014/main" id="{ACF0C8B3-4546-3F8A-C57A-C23FC47FF3BD}"/>
+              </a:ext>
+            </a:extLst>
+          </p:cNvPr>
+          <p:cNvSpPr>
+            <a:spLocks noGrp="1"/>
+          </p:cNvSpPr>
+          <p:nvPr/>
+        </p:nvSpPr>
+        <p:spPr>
+          <a:xfrm>
+            <a:off x="1143000" y="1590675"/>
+            <a:ext cx="95250" cy="95250"/>
+          </a:xfrm>
+          <a:prstGeom prst="ellipse">
+            <a:avLst/>
+          </a:prstGeom>
+          <a:solidFill>
+            <a:srgbClr val="FBBF24"/>
+          </a:solidFill>
+          <a:ln w="0">
+            <a:noFill/>
+            <a:prstDash val="solid"/>
+          </a:ln>
+        </p:spPr>
+        <p:txBody>
+          <a:bodyPr/>
+          <a:lstStyle/>
+          <a:p>
+            <a:endParaRPr/>
+          </a:p>
+        </p:txBody>
+      </p:sp>
+      <p:sp>
+        <p:nvSpPr>
+          <p:cNvPr id="6" name="橢圓 5">
+            <a:extLst>
+              <a:ext uri="{FF2B5EF4-FFF2-40B4-BE49-F238E27FC236}">
+                <a16:creationId xmlns:a16="http://schemas.microsoft.com/office/drawing/2014/main" id="{358E9AD3-754D-18B1-AA81-561E9DA4DC3A}"/>
+              </a:ext>
+            </a:extLst>
+          </p:cNvPr>
+          <p:cNvSpPr>
+            <a:spLocks noGrp="1"/>
+          </p:cNvSpPr>
+          <p:nvPr/>
+        </p:nvSpPr>
+        <p:spPr>
+          <a:xfrm>
+            <a:off x="1314450" y="1590675"/>
+            <a:ext cx="95250" cy="95250"/>
+          </a:xfrm>
+          <a:prstGeom prst="ellipse">
+            <a:avLst/>
+          </a:prstGeom>
+          <a:solidFill>
+            <a:srgbClr val="34D399"/>
+          </a:solidFill>
+          <a:ln w="0">
+            <a:noFill/>
+            <a:prstDash val="solid"/>
+          </a:ln>
+        </p:spPr>
+        <p:txBody>
+          <a:bodyPr/>
+          <a:lstStyle/>
+          <a:p>
+            <a:endParaRPr/>
+          </a:p>
+        </p:txBody>
+      </p:sp>
+      <p:sp>
+        <p:nvSpPr>
+          <p:cNvPr id="7" name="矩形 6">
+            <a:extLst>
+              <a:ext uri="{FF2B5EF4-FFF2-40B4-BE49-F238E27FC236}">
+                <a16:creationId xmlns:a16="http://schemas.microsoft.com/office/drawing/2014/main" id="{413623EE-2EBB-3C14-781F-81ED36E55D7D}"/>
+              </a:ext>
+            </a:extLst>
+          </p:cNvPr>
+          <p:cNvSpPr>
+            <a:spLocks noGrp="1"/>
+          </p:cNvSpPr>
+          <p:nvPr/>
+        </p:nvSpPr>
+        <p:spPr>
+          <a:xfrm>
+            <a:off x="1009650" y="1847849"/>
+            <a:ext cx="6057900" cy="4253865"/>
+          </a:xfrm>
+          <a:prstGeom prst="rect">
+            <a:avLst/>
+          </a:prstGeom>
+          <a:noFill/>
+          <a:ln w="0">
+            <a:noFill/>
+            <a:prstDash val="solid"/>
+          </a:ln>
+        </p:spPr>
+        <p:txBody>
+          <a:bodyPr lIns="0" tIns="0" rIns="0" bIns="0" anchor="t">
+            <a:normAutofit/>
+          </a:bodyPr>
+          <a:lstStyle/>
+          <a:p>
+            <a:r>
+              <a:rPr lang="zh-TW" altLang="zh-TW" dirty="0">
+                <a:solidFill>
+                  <a:schemeClr val="bg1"/>
+                </a:solidFill>
+              </a:rPr>
+              <a:t>app:</a:t>
+            </a:r>
+          </a:p>
+          <a:p>
+            <a:r>
+              <a:rPr lang="zh-TW" altLang="en-US" dirty="0">
+                <a:solidFill>
+                  <a:schemeClr val="bg1"/>
+                </a:solidFill>
+              </a:rPr>
+              <a:t>  </a:t>
+            </a:r>
+            <a:r>
+              <a:rPr lang="zh-TW" altLang="zh-TW" dirty="0">
+                <a:solidFill>
+                  <a:schemeClr val="bg1"/>
+                </a:solidFill>
+              </a:rPr>
+              <a:t>image: </a:t>
+            </a:r>
+            <a:r>
+              <a:rPr lang="en-US" altLang="zh-TW" dirty="0" err="1">
+                <a:solidFill>
+                  <a:schemeClr val="bg1"/>
+                </a:solidFill>
+              </a:rPr>
+              <a:t>yourname</a:t>
+            </a:r>
+            <a:r>
+              <a:rPr lang="en-US" altLang="zh-TW" dirty="0">
+                <a:solidFill>
+                  <a:schemeClr val="bg1"/>
+                </a:solidFill>
+              </a:rPr>
+              <a:t>/</a:t>
+            </a:r>
+            <a:r>
+              <a:rPr lang="zh-TW" altLang="zh-TW" dirty="0">
+                <a:solidFill>
+                  <a:schemeClr val="bg1"/>
+                </a:solidFill>
+              </a:rPr>
+              <a:t>my-flask-app:latest</a:t>
+            </a:r>
+            <a:r>
+              <a:rPr lang="zh-TW" altLang="en-US" dirty="0">
+                <a:solidFill>
+                  <a:schemeClr val="bg1"/>
+                </a:solidFill>
+              </a:rPr>
+              <a:t>  </a:t>
+            </a:r>
+            <a:endParaRPr lang="zh-TW" altLang="zh-TW" dirty="0">
+              <a:solidFill>
+                <a:schemeClr val="bg1"/>
+              </a:solidFill>
+            </a:endParaRPr>
+          </a:p>
+          <a:p>
+            <a:r>
+              <a:rPr lang="zh-TW" altLang="en-US" dirty="0">
+                <a:solidFill>
+                  <a:schemeClr val="bg1"/>
+                </a:solidFill>
+              </a:rPr>
+              <a:t>  </a:t>
+            </a:r>
+            <a:r>
+              <a:rPr lang="zh-TW" altLang="zh-TW" dirty="0">
+                <a:solidFill>
+                  <a:schemeClr val="bg1"/>
+                </a:solidFill>
+              </a:rPr>
+              <a:t>restart: unless-stopped</a:t>
+            </a:r>
+          </a:p>
+          <a:p>
+            <a:r>
+              <a:rPr lang="zh-TW" altLang="en-US" dirty="0">
+                <a:solidFill>
+                  <a:schemeClr val="bg1"/>
+                </a:solidFill>
+              </a:rPr>
+              <a:t>  </a:t>
+            </a:r>
+            <a:r>
+              <a:rPr lang="zh-TW" altLang="zh-TW" dirty="0">
+                <a:solidFill>
+                  <a:schemeClr val="bg1"/>
+                </a:solidFill>
+              </a:rPr>
+              <a:t>environment:</a:t>
+            </a:r>
+          </a:p>
+          <a:p>
+            <a:r>
+              <a:rPr lang="zh-TW" altLang="en-US" dirty="0">
+                <a:solidFill>
+                  <a:schemeClr val="bg1"/>
+                </a:solidFill>
+              </a:rPr>
+              <a:t>    </a:t>
+            </a:r>
+            <a:r>
+              <a:rPr lang="zh-TW" altLang="zh-TW" dirty="0">
+                <a:solidFill>
+                  <a:schemeClr val="bg1"/>
+                </a:solidFill>
+              </a:rPr>
+              <a:t>DB_HOST: db</a:t>
+            </a:r>
+          </a:p>
+          <a:p>
+            <a:r>
+              <a:rPr lang="zh-TW" altLang="en-US" dirty="0">
+                <a:solidFill>
+                  <a:schemeClr val="bg1"/>
+                </a:solidFill>
+              </a:rPr>
+              <a:t>    </a:t>
+            </a:r>
+            <a:r>
+              <a:rPr lang="zh-TW" altLang="zh-TW" dirty="0">
+                <a:solidFill>
+                  <a:schemeClr val="bg1"/>
+                </a:solidFill>
+              </a:rPr>
+              <a:t>DB_NAME: testdb</a:t>
+            </a:r>
+            <a:r>
+              <a:rPr lang="zh-TW" altLang="en-US" dirty="0">
+                <a:solidFill>
+                  <a:schemeClr val="bg1"/>
+                </a:solidFill>
+              </a:rPr>
+              <a:t>  </a:t>
+            </a:r>
+            <a:endParaRPr lang="zh-TW" altLang="zh-TW" dirty="0">
+              <a:solidFill>
+                <a:schemeClr val="bg1"/>
+              </a:solidFill>
+            </a:endParaRPr>
+          </a:p>
+          <a:p>
+            <a:r>
+              <a:rPr lang="zh-TW" altLang="en-US" dirty="0">
+                <a:solidFill>
+                  <a:schemeClr val="bg1"/>
+                </a:solidFill>
+              </a:rPr>
+              <a:t>    </a:t>
+            </a:r>
+            <a:r>
+              <a:rPr lang="zh-TW" altLang="zh-TW" dirty="0">
+                <a:solidFill>
+                  <a:schemeClr val="bg1"/>
+                </a:solidFill>
+              </a:rPr>
+              <a:t>DB_USER: testuser</a:t>
+            </a:r>
+          </a:p>
+          <a:p>
+            <a:r>
+              <a:rPr lang="zh-TW" altLang="en-US" dirty="0">
+                <a:solidFill>
+                  <a:schemeClr val="bg1"/>
+                </a:solidFill>
+              </a:rPr>
+              <a:t>    </a:t>
+            </a:r>
+            <a:r>
+              <a:rPr lang="zh-TW" altLang="zh-TW" dirty="0">
+                <a:solidFill>
+                  <a:schemeClr val="bg1"/>
+                </a:solidFill>
+              </a:rPr>
+              <a:t>DB_PASSWORD: testpass</a:t>
+            </a:r>
+          </a:p>
+          <a:p>
+            <a:r>
+              <a:rPr lang="zh-TW" altLang="en-US" dirty="0">
+                <a:solidFill>
+                  <a:schemeClr val="bg1"/>
+                </a:solidFill>
+              </a:rPr>
+              <a:t>  </a:t>
+            </a:r>
+            <a:r>
+              <a:rPr lang="zh-TW" altLang="zh-TW" dirty="0">
+                <a:solidFill>
+                  <a:schemeClr val="bg1"/>
+                </a:solidFill>
+              </a:rPr>
+              <a:t>ports:</a:t>
+            </a:r>
+          </a:p>
+          <a:p>
+            <a:r>
+              <a:rPr lang="zh-TW" altLang="en-US" dirty="0">
+                <a:solidFill>
+                  <a:schemeClr val="bg1"/>
+                </a:solidFill>
+              </a:rPr>
+              <a:t>    </a:t>
+            </a:r>
+            <a:r>
+              <a:rPr lang="zh-TW" altLang="zh-TW" dirty="0">
+                <a:solidFill>
+                  <a:schemeClr val="bg1"/>
+                </a:solidFill>
+              </a:rPr>
+              <a:t>- "8000:5000"</a:t>
+            </a:r>
+          </a:p>
+          <a:p>
+            <a:r>
+              <a:rPr lang="zh-TW" altLang="en-US" dirty="0">
+                <a:solidFill>
+                  <a:schemeClr val="bg1"/>
+                </a:solidFill>
+              </a:rPr>
+              <a:t>  </a:t>
+            </a:r>
+            <a:r>
+              <a:rPr lang="zh-TW" altLang="zh-TW" dirty="0">
+                <a:solidFill>
+                  <a:schemeClr val="bg1"/>
+                </a:solidFill>
+              </a:rPr>
+              <a:t>depends_on:</a:t>
+            </a:r>
+          </a:p>
+          <a:p>
+            <a:r>
+              <a:rPr lang="zh-TW" altLang="en-US" dirty="0">
+                <a:solidFill>
+                  <a:schemeClr val="bg1"/>
+                </a:solidFill>
+              </a:rPr>
+              <a:t>    </a:t>
+            </a:r>
+            <a:r>
+              <a:rPr lang="zh-TW" altLang="zh-TW" dirty="0">
+                <a:solidFill>
+                  <a:schemeClr val="bg1"/>
+                </a:solidFill>
+              </a:rPr>
+              <a:t>- db</a:t>
+            </a:r>
+          </a:p>
+        </p:txBody>
+      </p:sp>
+      <p:sp>
+        <p:nvSpPr>
+          <p:cNvPr id="8" name="矩形: 圓角 7">
+            <a:extLst>
+              <a:ext uri="{FF2B5EF4-FFF2-40B4-BE49-F238E27FC236}">
+                <a16:creationId xmlns:a16="http://schemas.microsoft.com/office/drawing/2014/main" id="{308796B6-52D8-4776-0878-338DAEA956F7}"/>
+              </a:ext>
+            </a:extLst>
+          </p:cNvPr>
+          <p:cNvSpPr>
+            <a:spLocks noGrp="1"/>
+          </p:cNvSpPr>
+          <p:nvPr/>
+        </p:nvSpPr>
+        <p:spPr>
+          <a:xfrm>
+            <a:off x="7905750" y="1962150"/>
+            <a:ext cx="3048000" cy="1943100"/>
+          </a:xfrm>
+          <a:prstGeom prst="roundRect">
+            <a:avLst>
+              <a:gd name="adj" fmla="val 5882"/>
+            </a:avLst>
+          </a:prstGeom>
+          <a:solidFill>
+            <a:srgbClr val="111827"/>
+          </a:solidFill>
+          <a:ln w="9525">
+            <a:solidFill>
+              <a:srgbClr val="34D399"/>
+            </a:solidFill>
+            <a:prstDash val="solid"/>
+          </a:ln>
+        </p:spPr>
+        <p:style>
+          <a:lnRef idx="0">
+            <a:scrgbClr r="0" g="0" b="0"/>
+          </a:lnRef>
+          <a:fillRef idx="0">
+            <a:scrgbClr r="0" g="0" b="0"/>
+          </a:fillRef>
+          <a:effectRef idx="4">
+            <a:scrgbClr r="0" g="0" b="0"/>
+          </a:effectRef>
+          <a:fontRef idx="major"/>
+        </p:style>
+        <p:txBody>
+          <a:bodyPr/>
+          <a:lstStyle/>
+          <a:p>
+            <a:endParaRPr/>
+          </a:p>
+        </p:txBody>
+      </p:sp>
+      <p:sp>
+        <p:nvSpPr>
+          <p:cNvPr id="9" name="矩形 8">
+            <a:extLst>
+              <a:ext uri="{FF2B5EF4-FFF2-40B4-BE49-F238E27FC236}">
+                <a16:creationId xmlns:a16="http://schemas.microsoft.com/office/drawing/2014/main" id="{EFF6F66E-A9FB-77E7-0EA2-4FB395215E67}"/>
+              </a:ext>
+            </a:extLst>
+          </p:cNvPr>
+          <p:cNvSpPr>
+            <a:spLocks noGrp="1"/>
+          </p:cNvSpPr>
+          <p:nvPr/>
+        </p:nvSpPr>
+        <p:spPr>
+          <a:xfrm>
+            <a:off x="8134350" y="2152650"/>
+            <a:ext cx="2590800" cy="323850"/>
+          </a:xfrm>
+          <a:prstGeom prst="rect">
+            <a:avLst/>
+          </a:prstGeom>
+          <a:noFill/>
+          <a:ln w="0">
+            <a:noFill/>
+            <a:prstDash val="solid"/>
+          </a:ln>
+        </p:spPr>
+        <p:txBody>
+          <a:bodyPr lIns="0" tIns="0" rIns="0" bIns="0" anchor="t">
+            <a:normAutofit fontScale="95463"/>
+          </a:bodyPr>
+          <a:lstStyle/>
+          <a:p>
+            <a:pPr algn="l">
+              <a:lnSpc>
+                <a:spcPct val="106000"/>
+              </a:lnSpc>
+              <a:buNone/>
+              <a:defRPr sz="2100" b="1">
+                <a:solidFill>
+                  <a:srgbClr val="86EFAC"/>
+                </a:solidFill>
+                <a:latin typeface="Aptos Display"/>
+                <a:ea typeface="Aptos Display"/>
+                <a:cs typeface="Aptos Display"/>
+              </a:defRPr>
+            </a:pPr>
+            <a:r>
+              <a:rPr sz="2100" b="1" dirty="0" err="1">
+                <a:solidFill>
+                  <a:srgbClr val="86EFAC"/>
+                </a:solidFill>
+                <a:latin typeface="Aptos Display"/>
+                <a:ea typeface="Aptos Display"/>
+                <a:cs typeface="Aptos Display"/>
+              </a:rPr>
+              <a:t>完成標準</a:t>
+            </a:r>
+            <a:endParaRPr sz="2100" b="1" dirty="0">
+              <a:solidFill>
+                <a:srgbClr val="86EFAC"/>
+              </a:solidFill>
+              <a:latin typeface="Aptos Display"/>
+              <a:ea typeface="Aptos Display"/>
+              <a:cs typeface="Aptos Display"/>
+            </a:endParaRPr>
+          </a:p>
+        </p:txBody>
+      </p:sp>
+      <p:sp>
+        <p:nvSpPr>
+          <p:cNvPr id="10" name="矩形 9">
+            <a:extLst>
+              <a:ext uri="{FF2B5EF4-FFF2-40B4-BE49-F238E27FC236}">
+                <a16:creationId xmlns:a16="http://schemas.microsoft.com/office/drawing/2014/main" id="{30E92BC7-0AFA-AEA8-FC4B-E1FCD4AD20C8}"/>
+              </a:ext>
+            </a:extLst>
+          </p:cNvPr>
+          <p:cNvSpPr>
+            <a:spLocks noGrp="1"/>
+          </p:cNvSpPr>
+          <p:nvPr/>
+        </p:nvSpPr>
+        <p:spPr>
+          <a:xfrm>
+            <a:off x="8134350" y="2686050"/>
+            <a:ext cx="2590800" cy="1028700"/>
+          </a:xfrm>
+          <a:prstGeom prst="rect">
+            <a:avLst/>
+          </a:prstGeom>
+          <a:noFill/>
+          <a:ln w="0">
+            <a:noFill/>
+            <a:prstDash val="solid"/>
+          </a:ln>
+        </p:spPr>
+        <p:txBody>
+          <a:bodyPr lIns="0" tIns="0" rIns="0" bIns="0" anchor="t">
+            <a:normAutofit/>
+          </a:bodyPr>
+          <a:lstStyle/>
+          <a:p>
+            <a:pPr algn="l">
+              <a:lnSpc>
+                <a:spcPct val="106000"/>
+              </a:lnSpc>
+              <a:buNone/>
+              <a:defRPr sz="1500" b="0">
+                <a:solidFill>
+                  <a:srgbClr val="E2E8F0"/>
+                </a:solidFill>
+                <a:latin typeface="Aptos"/>
+                <a:ea typeface="Aptos"/>
+                <a:cs typeface="Aptos"/>
+              </a:defRPr>
+            </a:pPr>
+            <a:r>
+              <a:rPr sz="1500" b="0">
+                <a:solidFill>
+                  <a:srgbClr val="E2E8F0"/>
+                </a:solidFill>
+                <a:latin typeface="Aptos"/>
+                <a:ea typeface="Aptos"/>
+                <a:cs typeface="Aptos"/>
+              </a:rPr>
+              <a:t>1. Docker Hub 網頁看得到 repository</a:t>
+            </a:r>
+          </a:p>
+          <a:p>
+            <a:pPr algn="l">
+              <a:lnSpc>
+                <a:spcPct val="106000"/>
+              </a:lnSpc>
+              <a:buNone/>
+              <a:defRPr sz="1500" b="0">
+                <a:solidFill>
+                  <a:srgbClr val="E2E8F0"/>
+                </a:solidFill>
+                <a:latin typeface="Aptos"/>
+                <a:ea typeface="Aptos"/>
+                <a:cs typeface="Aptos"/>
+              </a:defRPr>
+            </a:pPr>
+            <a:r>
+              <a:rPr sz="1500" b="0">
+                <a:solidFill>
+                  <a:srgbClr val="E2E8F0"/>
+                </a:solidFill>
+                <a:latin typeface="Aptos"/>
+                <a:ea typeface="Aptos"/>
+                <a:cs typeface="Aptos"/>
+              </a:rPr>
+              <a:t>2. 本機刪除後可以 pull 回來</a:t>
+            </a:r>
+          </a:p>
+          <a:p>
+            <a:pPr algn="l">
+              <a:lnSpc>
+                <a:spcPct val="106000"/>
+              </a:lnSpc>
+              <a:buNone/>
+              <a:defRPr sz="1500" b="0">
+                <a:solidFill>
+                  <a:srgbClr val="E2E8F0"/>
+                </a:solidFill>
+                <a:latin typeface="Aptos"/>
+                <a:ea typeface="Aptos"/>
+                <a:cs typeface="Aptos"/>
+              </a:defRPr>
+            </a:pPr>
+            <a:r>
+              <a:rPr sz="1500" b="0">
+                <a:solidFill>
+                  <a:srgbClr val="E2E8F0"/>
+                </a:solidFill>
+                <a:latin typeface="Aptos"/>
+                <a:ea typeface="Aptos"/>
+                <a:cs typeface="Aptos"/>
+              </a:rPr>
+              <a:t>3. run 後仍能看到正確輸出</a:t>
+            </a:r>
+          </a:p>
+        </p:txBody>
+      </p:sp>
+      <p:sp>
+        <p:nvSpPr>
+          <p:cNvPr id="12" name="矩形 11">
+            <a:extLst>
+              <a:ext uri="{FF2B5EF4-FFF2-40B4-BE49-F238E27FC236}">
+                <a16:creationId xmlns:a16="http://schemas.microsoft.com/office/drawing/2014/main" id="{3B635F64-AF7B-FDFC-2CCB-A55BBC277B04}"/>
+              </a:ext>
+            </a:extLst>
+          </p:cNvPr>
+          <p:cNvSpPr>
+            <a:spLocks noGrp="1"/>
+          </p:cNvSpPr>
+          <p:nvPr/>
+        </p:nvSpPr>
+        <p:spPr>
+          <a:xfrm>
+            <a:off x="609600" y="6305550"/>
+            <a:ext cx="9906000" cy="13335"/>
+          </a:xfrm>
+          <a:prstGeom prst="rect">
+            <a:avLst/>
+          </a:prstGeom>
+          <a:solidFill>
+            <a:srgbClr val="334155"/>
+          </a:solidFill>
+          <a:ln w="0">
+            <a:noFill/>
+            <a:prstDash val="solid"/>
+          </a:ln>
+        </p:spPr>
+        <p:txBody>
+          <a:bodyPr/>
+          <a:lstStyle/>
+          <a:p>
+            <a:endParaRPr/>
+          </a:p>
+        </p:txBody>
+      </p:sp>
+      <p:sp>
+        <p:nvSpPr>
+          <p:cNvPr id="13" name="矩形 12">
+            <a:extLst>
+              <a:ext uri="{FF2B5EF4-FFF2-40B4-BE49-F238E27FC236}">
+                <a16:creationId xmlns:a16="http://schemas.microsoft.com/office/drawing/2014/main" id="{479CD3FF-006B-A65E-EDCB-171E8975EF7A}"/>
+              </a:ext>
+            </a:extLst>
+          </p:cNvPr>
+          <p:cNvSpPr>
+            <a:spLocks noGrp="1"/>
+          </p:cNvSpPr>
+          <p:nvPr/>
+        </p:nvSpPr>
+        <p:spPr>
+          <a:xfrm>
+            <a:off x="609600" y="6400800"/>
+            <a:ext cx="2762250" cy="171450"/>
+          </a:xfrm>
+          <a:prstGeom prst="rect">
+            <a:avLst/>
+          </a:prstGeom>
+          <a:noFill/>
+          <a:ln w="0">
+            <a:noFill/>
+            <a:prstDash val="solid"/>
+          </a:ln>
+        </p:spPr>
+        <p:txBody>
+          <a:bodyPr lIns="0" tIns="0" rIns="0" bIns="0" anchor="t">
+            <a:normAutofit/>
+          </a:bodyPr>
+          <a:lstStyle/>
+          <a:p>
+            <a:pPr algn="l">
+              <a:lnSpc>
+                <a:spcPct val="106000"/>
+              </a:lnSpc>
+              <a:buNone/>
+              <a:defRPr sz="825" b="0">
+                <a:solidFill>
+                  <a:srgbClr val="CBD5E1"/>
+                </a:solidFill>
+                <a:latin typeface="Aptos"/>
+                <a:ea typeface="Aptos"/>
+                <a:cs typeface="Aptos"/>
+              </a:defRPr>
+            </a:pPr>
+            <a:r>
+              <a:rPr sz="825" b="0">
+                <a:solidFill>
+                  <a:srgbClr val="CBD5E1"/>
+                </a:solidFill>
+                <a:latin typeface="Aptos"/>
+                <a:ea typeface="Aptos"/>
+                <a:cs typeface="Aptos"/>
+              </a:rPr>
+              <a:t>Docker 基礎教學 | 第 4 堂</a:t>
+            </a:r>
+          </a:p>
+        </p:txBody>
+      </p:sp>
+      <p:sp>
+        <p:nvSpPr>
+          <p:cNvPr id="14" name="矩形 13">
+            <a:extLst>
+              <a:ext uri="{FF2B5EF4-FFF2-40B4-BE49-F238E27FC236}">
+                <a16:creationId xmlns:a16="http://schemas.microsoft.com/office/drawing/2014/main" id="{69D36E0C-3DDB-D09C-F7CC-5F3419D13928}"/>
+              </a:ext>
+            </a:extLst>
+          </p:cNvPr>
+          <p:cNvSpPr>
+            <a:spLocks noGrp="1"/>
+          </p:cNvSpPr>
+          <p:nvPr/>
+        </p:nvSpPr>
+        <p:spPr>
+          <a:xfrm>
+            <a:off x="11010900" y="6381750"/>
+            <a:ext cx="571500" cy="190500"/>
+          </a:xfrm>
+          <a:prstGeom prst="rect">
+            <a:avLst/>
+          </a:prstGeom>
+          <a:noFill/>
+          <a:ln w="0">
+            <a:noFill/>
+            <a:prstDash val="solid"/>
+          </a:ln>
+        </p:spPr>
+        <p:txBody>
+          <a:bodyPr lIns="0" tIns="0" rIns="0" bIns="0" anchor="t">
+            <a:normAutofit/>
+          </a:bodyPr>
+          <a:lstStyle/>
+          <a:p>
+            <a:pPr algn="r">
+              <a:lnSpc>
+                <a:spcPct val="106000"/>
+              </a:lnSpc>
+              <a:buNone/>
+              <a:defRPr sz="900" b="1">
+                <a:solidFill>
+                  <a:srgbClr val="CBD5E1"/>
+                </a:solidFill>
+                <a:latin typeface="Aptos"/>
+                <a:ea typeface="Aptos"/>
+                <a:cs typeface="Aptos"/>
+              </a:defRPr>
+            </a:pPr>
+            <a:r>
+              <a:rPr sz="900" b="1">
+                <a:solidFill>
+                  <a:srgbClr val="CBD5E1"/>
+                </a:solidFill>
+                <a:latin typeface="Aptos"/>
+                <a:ea typeface="Aptos"/>
+                <a:cs typeface="Aptos"/>
+              </a:rPr>
+              <a:t>18</a:t>
             </a:r>
           </a:p>
         </p:txBody>
@@ -15546,7 +16594,7 @@
     </p:spTree>
     <p:extLst>
       <p:ext uri="{BB962C8B-B14F-4D97-AF65-F5344CB8AC3E}">
-        <p14:creationId xmlns:p14="http://schemas.microsoft.com/office/powerpoint/2010/main" val="1095336420"/>
+        <p14:creationId xmlns:p14="http://schemas.microsoft.com/office/powerpoint/2010/main" val="1716190585"/>
       </p:ext>
     </p:extLst>
   </p:cSld>
@@ -15575,993 +16623,35 @@
       </p:grpSpPr>
       <p:sp>
         <p:nvSpPr>
-          <p:cNvPr id="19" name="矩形 18">
-            <a:extLst>
-              <a:ext uri="{FF2B5EF4-FFF2-40B4-BE49-F238E27FC236}">
-                <a16:creationId xmlns:a16="http://schemas.microsoft.com/office/drawing/2014/main" id="{D230D268-1A45-4EAB-B8C3-978F0176BDB3}"/>
-              </a:ext>
-            </a:extLst>
-          </p:cNvPr>
-          <p:cNvSpPr>
-            <a:spLocks noGrp="1"/>
-          </p:cNvSpPr>
-          <p:nvPr/>
-        </p:nvSpPr>
-        <p:spPr>
-          <a:xfrm>
-            <a:off x="0" y="0"/>
-            <a:ext cx="12192000" cy="6858000"/>
+          <p:cNvPr id="3" name="文字方塊 2">
+            <a:extLst>
+              <a:ext uri="{FF2B5EF4-FFF2-40B4-BE49-F238E27FC236}">
+                <a16:creationId xmlns:a16="http://schemas.microsoft.com/office/drawing/2014/main" id="{A0046382-DB90-61EC-B4A3-9C75E13AAD73}"/>
+              </a:ext>
+            </a:extLst>
+          </p:cNvPr>
+          <p:cNvSpPr txBox="1"/>
+          <p:nvPr/>
+        </p:nvSpPr>
+        <p:spPr>
+          <a:xfrm>
+            <a:off x="7569200" y="5411450"/>
+            <a:ext cx="5143500" cy="1446550"/>
           </a:xfrm>
           <a:prstGeom prst="rect">
             <a:avLst/>
           </a:prstGeom>
-          <a:solidFill>
-            <a:srgbClr val="0B1220"/>
-          </a:solidFill>
-          <a:ln w="0">
-            <a:noFill/>
-            <a:prstDash val="solid"/>
-          </a:ln>
-        </p:spPr>
-        <p:txBody>
-          <a:bodyPr/>
-          <a:lstStyle/>
-          <a:p>
-            <a:endParaRPr/>
-          </a:p>
-        </p:txBody>
-      </p:sp>
-      <p:sp>
-        <p:nvSpPr>
-          <p:cNvPr id="2" name="矩形 1">
-            <a:extLst>
-              <a:ext uri="{FF2B5EF4-FFF2-40B4-BE49-F238E27FC236}">
-                <a16:creationId xmlns:a16="http://schemas.microsoft.com/office/drawing/2014/main" id="{FA46435F-713C-4BFB-8CF7-F64FAC0F5D29}"/>
-              </a:ext>
-            </a:extLst>
-          </p:cNvPr>
-          <p:cNvSpPr>
-            <a:spLocks noGrp="1"/>
-          </p:cNvSpPr>
-          <p:nvPr/>
-        </p:nvSpPr>
-        <p:spPr>
-          <a:xfrm>
-            <a:off x="609600" y="400050"/>
-            <a:ext cx="5905500" cy="285750"/>
-          </a:xfrm>
-          <a:prstGeom prst="rect">
-            <a:avLst/>
-          </a:prstGeom>
           <a:noFill/>
-          <a:ln w="0">
-            <a:noFill/>
-            <a:prstDash val="solid"/>
-          </a:ln>
-        </p:spPr>
-        <p:txBody>
-          <a:bodyPr/>
-          <a:lstStyle/>
-          <a:p>
-            <a:pPr>
-              <a:buNone/>
-              <a:defRPr sz="900" b="1">
-                <a:solidFill>
-                  <a:srgbClr val="A5B4FC"/>
-                </a:solidFill>
-              </a:defRPr>
-            </a:pPr>
-            <a:r>
-              <a:rPr sz="900" b="1">
-                <a:solidFill>
-                  <a:srgbClr val="A5B4FC"/>
-                </a:solidFill>
-              </a:rPr>
-              <a:t>DOCKERFILE BEHAVIOR</a:t>
-            </a:r>
-          </a:p>
-        </p:txBody>
-      </p:sp>
-      <p:sp>
-        <p:nvSpPr>
-          <p:cNvPr id="3" name="矩形 2">
-            <a:extLst>
-              <a:ext uri="{FF2B5EF4-FFF2-40B4-BE49-F238E27FC236}">
-                <a16:creationId xmlns:a16="http://schemas.microsoft.com/office/drawing/2014/main" id="{9A02230D-32A0-40D1-A345-6248F189D7EB}"/>
-              </a:ext>
-            </a:extLst>
-          </p:cNvPr>
-          <p:cNvSpPr>
-            <a:spLocks noGrp="1"/>
-          </p:cNvSpPr>
-          <p:nvPr/>
-        </p:nvSpPr>
-        <p:spPr>
-          <a:xfrm>
-            <a:off x="609600" y="781050"/>
-            <a:ext cx="10668000" cy="666750"/>
-          </a:xfrm>
-          <a:prstGeom prst="rect">
-            <a:avLst/>
-          </a:prstGeom>
-          <a:noFill/>
-          <a:ln w="0">
-            <a:noFill/>
-            <a:prstDash val="solid"/>
-          </a:ln>
-        </p:spPr>
-        <p:txBody>
-          <a:bodyPr/>
-          <a:lstStyle/>
-          <a:p>
-            <a:pPr>
-              <a:buNone/>
-              <a:defRPr sz="2850" b="1">
-                <a:solidFill>
-                  <a:srgbClr val="FFFFFF"/>
-                </a:solidFill>
-              </a:defRPr>
-            </a:pPr>
-            <a:r>
-              <a:rPr sz="2850" b="1">
-                <a:solidFill>
-                  <a:srgbClr val="FFFFFF"/>
-                </a:solidFill>
-              </a:rPr>
-              <a:t>CMD vs ENTRYPOINT：誰會被 docker run 覆蓋？</a:t>
-            </a:r>
-          </a:p>
-        </p:txBody>
-      </p:sp>
-      <p:sp>
-        <p:nvSpPr>
-          <p:cNvPr id="4" name="矩形: 圓角 3">
-            <a:extLst>
-              <a:ext uri="{FF2B5EF4-FFF2-40B4-BE49-F238E27FC236}">
-                <a16:creationId xmlns:a16="http://schemas.microsoft.com/office/drawing/2014/main" id="{8AD4939C-7775-4AE5-9EDF-C7AA19B798B8}"/>
-              </a:ext>
-            </a:extLst>
-          </p:cNvPr>
-          <p:cNvSpPr>
-            <a:spLocks noGrp="1"/>
-          </p:cNvSpPr>
-          <p:nvPr/>
-        </p:nvSpPr>
-        <p:spPr>
-          <a:xfrm>
-            <a:off x="762000" y="1695450"/>
-            <a:ext cx="5048250" cy="2952750"/>
-          </a:xfrm>
-          <a:prstGeom prst="roundRect">
-            <a:avLst>
-              <a:gd name="adj" fmla="val 3871"/>
-            </a:avLst>
-          </a:prstGeom>
-          <a:solidFill>
-            <a:srgbClr val="111827"/>
-          </a:solidFill>
-          <a:ln w="9525">
-            <a:solidFill>
-              <a:srgbClr val="60A5FA"/>
-            </a:solidFill>
-            <a:prstDash val="solid"/>
-          </a:ln>
-        </p:spPr>
-        <p:style>
-          <a:lnRef idx="0">
-            <a:scrgbClr r="0" g="0" b="0"/>
-          </a:lnRef>
-          <a:fillRef idx="0">
-            <a:scrgbClr r="0" g="0" b="0"/>
-          </a:fillRef>
-          <a:effectRef idx="4">
-            <a:scrgbClr r="0" g="0" b="0"/>
-          </a:effectRef>
-          <a:fontRef idx="major"/>
-        </p:style>
-        <p:txBody>
-          <a:bodyPr/>
-          <a:lstStyle/>
-          <a:p>
-            <a:endParaRPr/>
-          </a:p>
-        </p:txBody>
-      </p:sp>
-      <p:sp>
-        <p:nvSpPr>
-          <p:cNvPr id="5" name="矩形: 圓角 4">
-            <a:extLst>
-              <a:ext uri="{FF2B5EF4-FFF2-40B4-BE49-F238E27FC236}">
-                <a16:creationId xmlns:a16="http://schemas.microsoft.com/office/drawing/2014/main" id="{900B08E6-3D17-48AC-B82C-3E0D7F2E4D56}"/>
-              </a:ext>
-            </a:extLst>
-          </p:cNvPr>
-          <p:cNvSpPr>
-            <a:spLocks noGrp="1"/>
-          </p:cNvSpPr>
-          <p:nvPr/>
-        </p:nvSpPr>
-        <p:spPr>
-          <a:xfrm>
-            <a:off x="6381750" y="1695450"/>
-            <a:ext cx="5048250" cy="2952750"/>
-          </a:xfrm>
-          <a:prstGeom prst="roundRect">
-            <a:avLst>
-              <a:gd name="adj" fmla="val 3871"/>
-            </a:avLst>
-          </a:prstGeom>
-          <a:solidFill>
-            <a:srgbClr val="111827"/>
-          </a:solidFill>
-          <a:ln w="9525">
-            <a:solidFill>
-              <a:srgbClr val="34D399"/>
-            </a:solidFill>
-            <a:prstDash val="solid"/>
-          </a:ln>
-        </p:spPr>
-        <p:style>
-          <a:lnRef idx="0">
-            <a:scrgbClr r="0" g="0" b="0"/>
-          </a:lnRef>
-          <a:fillRef idx="0">
-            <a:scrgbClr r="0" g="0" b="0"/>
-          </a:fillRef>
-          <a:effectRef idx="4">
-            <a:scrgbClr r="0" g="0" b="0"/>
-          </a:effectRef>
-          <a:fontRef idx="major"/>
-        </p:style>
-        <p:txBody>
-          <a:bodyPr/>
-          <a:lstStyle/>
-          <a:p>
-            <a:endParaRPr/>
-          </a:p>
-        </p:txBody>
-      </p:sp>
-      <p:sp>
-        <p:nvSpPr>
-          <p:cNvPr id="6" name="矩形 5">
-            <a:extLst>
-              <a:ext uri="{FF2B5EF4-FFF2-40B4-BE49-F238E27FC236}">
-                <a16:creationId xmlns:a16="http://schemas.microsoft.com/office/drawing/2014/main" id="{CF8A6635-8265-45C3-A483-0860CE52BC39}"/>
-              </a:ext>
-            </a:extLst>
-          </p:cNvPr>
-          <p:cNvSpPr>
-            <a:spLocks noGrp="1"/>
-          </p:cNvSpPr>
-          <p:nvPr/>
-        </p:nvSpPr>
-        <p:spPr>
-          <a:xfrm>
-            <a:off x="1028700" y="1943100"/>
-            <a:ext cx="4514850" cy="342900"/>
-          </a:xfrm>
-          <a:prstGeom prst="rect">
-            <a:avLst/>
-          </a:prstGeom>
-          <a:noFill/>
-          <a:ln w="0">
-            <a:noFill/>
-            <a:prstDash val="solid"/>
-          </a:ln>
-        </p:spPr>
-        <p:txBody>
-          <a:bodyPr/>
-          <a:lstStyle/>
-          <a:p>
-            <a:pPr>
-              <a:buNone/>
-              <a:defRPr sz="1950" b="1">
-                <a:solidFill>
-                  <a:srgbClr val="93C5FD"/>
-                </a:solidFill>
-              </a:defRPr>
-            </a:pPr>
-            <a:r>
-              <a:rPr sz="1950" b="1">
-                <a:solidFill>
-                  <a:srgbClr val="93C5FD"/>
-                </a:solidFill>
-              </a:rPr>
-              <a:t>CMD：預設指令</a:t>
-            </a:r>
-          </a:p>
-        </p:txBody>
-      </p:sp>
-      <p:sp>
-        <p:nvSpPr>
-          <p:cNvPr id="7" name="矩形 6">
-            <a:extLst>
-              <a:ext uri="{FF2B5EF4-FFF2-40B4-BE49-F238E27FC236}">
-                <a16:creationId xmlns:a16="http://schemas.microsoft.com/office/drawing/2014/main" id="{1BED2816-4224-441C-A59A-2718D65B713F}"/>
-              </a:ext>
-            </a:extLst>
-          </p:cNvPr>
-          <p:cNvSpPr>
-            <a:spLocks noGrp="1"/>
-          </p:cNvSpPr>
-          <p:nvPr/>
-        </p:nvSpPr>
-        <p:spPr>
-          <a:xfrm>
-            <a:off x="1028700" y="2419350"/>
-            <a:ext cx="4514850" cy="552450"/>
-          </a:xfrm>
-          <a:prstGeom prst="rect">
-            <a:avLst/>
-          </a:prstGeom>
-          <a:noFill/>
-          <a:ln w="0">
-            <a:noFill/>
-            <a:prstDash val="solid"/>
-          </a:ln>
-        </p:spPr>
-        <p:txBody>
-          <a:bodyPr/>
-          <a:lstStyle/>
-          <a:p>
-            <a:pPr>
-              <a:buNone/>
-              <a:defRPr sz="1350">
-                <a:solidFill>
-                  <a:srgbClr val="E2E8F0"/>
-                </a:solidFill>
-              </a:defRPr>
-            </a:pPr>
-            <a:r>
-              <a:rPr sz="1350">
-                <a:solidFill>
-                  <a:srgbClr val="E2E8F0"/>
-                </a:solidFill>
-              </a:rPr>
-              <a:t>使用者在 docker run 後面補指令時，整個 CMD 會被取代。</a:t>
-            </a:r>
-          </a:p>
-        </p:txBody>
-      </p:sp>
-      <p:sp>
-        <p:nvSpPr>
-          <p:cNvPr id="8" name="矩形: 圓角 7">
-            <a:extLst>
-              <a:ext uri="{FF2B5EF4-FFF2-40B4-BE49-F238E27FC236}">
-                <a16:creationId xmlns:a16="http://schemas.microsoft.com/office/drawing/2014/main" id="{C91BB24C-1DE9-4243-91B9-838B8C08A756}"/>
-              </a:ext>
-            </a:extLst>
-          </p:cNvPr>
-          <p:cNvSpPr>
-            <a:spLocks noGrp="1"/>
-          </p:cNvSpPr>
-          <p:nvPr/>
-        </p:nvSpPr>
-        <p:spPr>
-          <a:xfrm>
-            <a:off x="1028700" y="3143250"/>
-            <a:ext cx="4514850" cy="1219200"/>
-          </a:xfrm>
-          <a:prstGeom prst="roundRect">
-            <a:avLst>
-              <a:gd name="adj" fmla="val 9375"/>
-            </a:avLst>
-          </a:prstGeom>
-          <a:solidFill>
-            <a:srgbClr val="0B1220"/>
-          </a:solidFill>
-          <a:ln w="9525">
-            <a:solidFill>
-              <a:srgbClr val="1E293B"/>
-            </a:solidFill>
-            <a:prstDash val="solid"/>
-          </a:ln>
-        </p:spPr>
-        <p:style>
-          <a:lnRef idx="0">
-            <a:scrgbClr r="0" g="0" b="0"/>
-          </a:lnRef>
-          <a:fillRef idx="0">
-            <a:scrgbClr r="0" g="0" b="0"/>
-          </a:fillRef>
-          <a:effectRef idx="4">
-            <a:scrgbClr r="0" g="0" b="0"/>
-          </a:effectRef>
-          <a:fontRef idx="major"/>
-        </p:style>
-        <p:txBody>
-          <a:bodyPr/>
-          <a:lstStyle/>
-          <a:p>
-            <a:endParaRPr/>
-          </a:p>
-        </p:txBody>
-      </p:sp>
-      <p:sp>
-        <p:nvSpPr>
-          <p:cNvPr id="9" name="矩形 8">
-            <a:extLst>
-              <a:ext uri="{FF2B5EF4-FFF2-40B4-BE49-F238E27FC236}">
-                <a16:creationId xmlns:a16="http://schemas.microsoft.com/office/drawing/2014/main" id="{8F7D58BC-452B-4DDD-B9F2-B36B6263D592}"/>
-              </a:ext>
-            </a:extLst>
-          </p:cNvPr>
-          <p:cNvSpPr>
-            <a:spLocks noGrp="1"/>
-          </p:cNvSpPr>
-          <p:nvPr/>
-        </p:nvSpPr>
-        <p:spPr>
-          <a:xfrm>
-            <a:off x="1238250" y="3314700"/>
-            <a:ext cx="4095750" cy="876300"/>
-          </a:xfrm>
-          <a:prstGeom prst="rect">
-            <a:avLst/>
-          </a:prstGeom>
-          <a:noFill/>
-          <a:ln w="0">
-            <a:noFill/>
-            <a:prstDash val="solid"/>
-          </a:ln>
-        </p:spPr>
-        <p:txBody>
-          <a:bodyPr/>
-          <a:lstStyle/>
-          <a:p>
-            <a:pPr>
-              <a:buNone/>
-              <a:defRPr sz="1275">
-                <a:solidFill>
-                  <a:srgbClr val="E5E7EB"/>
-                </a:solidFill>
-              </a:defRPr>
-            </a:pPr>
-            <a:r>
-              <a:rPr sz="1275">
-                <a:solidFill>
-                  <a:srgbClr val="E5E7EB"/>
-                </a:solidFill>
-              </a:rPr>
-              <a:t>CMD ["python", "app.py"]</a:t>
-            </a:r>
-          </a:p>
-          <a:p>
-            <a:endParaRPr sz="1275">
-              <a:solidFill>
-                <a:srgbClr val="E5E7EB"/>
-              </a:solidFill>
-            </a:endParaRPr>
-          </a:p>
-          <a:p>
-            <a:pPr>
-              <a:buNone/>
-              <a:defRPr sz="1275">
-                <a:solidFill>
-                  <a:srgbClr val="E5E7EB"/>
-                </a:solidFill>
-              </a:defRPr>
-            </a:pPr>
-            <a:r>
-              <a:rPr sz="1275">
-                <a:solidFill>
-                  <a:srgbClr val="E5E7EB"/>
-                </a:solidFill>
-              </a:rPr>
-              <a:t>$ docker run my-app bash</a:t>
-            </a:r>
-          </a:p>
-          <a:p>
-            <a:pPr>
-              <a:buNone/>
-              <a:defRPr sz="1275">
-                <a:solidFill>
-                  <a:srgbClr val="E5E7EB"/>
-                </a:solidFill>
-              </a:defRPr>
-            </a:pPr>
-            <a:r>
-              <a:rPr sz="1275">
-                <a:solidFill>
-                  <a:srgbClr val="E5E7EB"/>
-                </a:solidFill>
-              </a:rPr>
-              <a:t>=&gt; bash</a:t>
-            </a:r>
-          </a:p>
-        </p:txBody>
-      </p:sp>
-      <p:sp>
-        <p:nvSpPr>
-          <p:cNvPr id="10" name="矩形 9">
-            <a:extLst>
-              <a:ext uri="{FF2B5EF4-FFF2-40B4-BE49-F238E27FC236}">
-                <a16:creationId xmlns:a16="http://schemas.microsoft.com/office/drawing/2014/main" id="{CE57BBED-35BC-4909-B3B3-CC8A7DCB5882}"/>
-              </a:ext>
-            </a:extLst>
-          </p:cNvPr>
-          <p:cNvSpPr>
-            <a:spLocks noGrp="1"/>
-          </p:cNvSpPr>
-          <p:nvPr/>
-        </p:nvSpPr>
-        <p:spPr>
-          <a:xfrm>
-            <a:off x="6648450" y="1943100"/>
-            <a:ext cx="4514850" cy="342900"/>
-          </a:xfrm>
-          <a:prstGeom prst="rect">
-            <a:avLst/>
-          </a:prstGeom>
-          <a:noFill/>
-          <a:ln w="0">
-            <a:noFill/>
-            <a:prstDash val="solid"/>
-          </a:ln>
-        </p:spPr>
-        <p:txBody>
-          <a:bodyPr/>
-          <a:lstStyle/>
-          <a:p>
-            <a:pPr>
-              <a:buNone/>
-              <a:defRPr sz="1950" b="1">
-                <a:solidFill>
-                  <a:srgbClr val="86EFAC"/>
-                </a:solidFill>
-              </a:defRPr>
-            </a:pPr>
-            <a:r>
-              <a:rPr sz="1950" b="1">
-                <a:solidFill>
-                  <a:srgbClr val="86EFAC"/>
-                </a:solidFill>
-              </a:rPr>
-              <a:t>ENTRYPOINT：固定主程式</a:t>
-            </a:r>
-          </a:p>
-        </p:txBody>
-      </p:sp>
-      <p:sp>
-        <p:nvSpPr>
-          <p:cNvPr id="11" name="矩形 10">
-            <a:extLst>
-              <a:ext uri="{FF2B5EF4-FFF2-40B4-BE49-F238E27FC236}">
-                <a16:creationId xmlns:a16="http://schemas.microsoft.com/office/drawing/2014/main" id="{9B69BC4F-0FD8-4A53-9F9A-6FFC2C062F2A}"/>
-              </a:ext>
-            </a:extLst>
-          </p:cNvPr>
-          <p:cNvSpPr>
-            <a:spLocks noGrp="1"/>
-          </p:cNvSpPr>
-          <p:nvPr/>
-        </p:nvSpPr>
-        <p:spPr>
-          <a:xfrm>
-            <a:off x="6648450" y="2419350"/>
-            <a:ext cx="4514850" cy="552450"/>
-          </a:xfrm>
-          <a:prstGeom prst="rect">
-            <a:avLst/>
-          </a:prstGeom>
-          <a:noFill/>
-          <a:ln w="0">
-            <a:noFill/>
-            <a:prstDash val="solid"/>
-          </a:ln>
-        </p:spPr>
-        <p:txBody>
-          <a:bodyPr/>
-          <a:lstStyle/>
-          <a:p>
-            <a:pPr>
-              <a:buNone/>
-              <a:defRPr sz="1350">
-                <a:solidFill>
-                  <a:srgbClr val="E2E8F0"/>
-                </a:solidFill>
-              </a:defRPr>
-            </a:pPr>
-            <a:r>
-              <a:rPr sz="1350">
-                <a:solidFill>
-                  <a:srgbClr val="E2E8F0"/>
-                </a:solidFill>
-              </a:rPr>
-              <a:t>使用者補的內容通常會接在 ENTRYPOINT 後面，變成參數。</a:t>
-            </a:r>
-          </a:p>
-        </p:txBody>
-      </p:sp>
-      <p:sp>
-        <p:nvSpPr>
-          <p:cNvPr id="12" name="矩形: 圓角 11">
-            <a:extLst>
-              <a:ext uri="{FF2B5EF4-FFF2-40B4-BE49-F238E27FC236}">
-                <a16:creationId xmlns:a16="http://schemas.microsoft.com/office/drawing/2014/main" id="{1F18840B-74F1-407B-969A-0A1E49A8961D}"/>
-              </a:ext>
-            </a:extLst>
-          </p:cNvPr>
-          <p:cNvSpPr>
-            <a:spLocks noGrp="1"/>
-          </p:cNvSpPr>
-          <p:nvPr/>
-        </p:nvSpPr>
-        <p:spPr>
-          <a:xfrm>
-            <a:off x="6648450" y="3143250"/>
-            <a:ext cx="4514850" cy="1219200"/>
-          </a:xfrm>
-          <a:prstGeom prst="roundRect">
-            <a:avLst>
-              <a:gd name="adj" fmla="val 9375"/>
-            </a:avLst>
-          </a:prstGeom>
-          <a:solidFill>
-            <a:srgbClr val="0B1220"/>
-          </a:solidFill>
-          <a:ln w="9525">
-            <a:solidFill>
-              <a:srgbClr val="1E293B"/>
-            </a:solidFill>
-            <a:prstDash val="solid"/>
-          </a:ln>
-        </p:spPr>
-        <p:style>
-          <a:lnRef idx="0">
-            <a:scrgbClr r="0" g="0" b="0"/>
-          </a:lnRef>
-          <a:fillRef idx="0">
-            <a:scrgbClr r="0" g="0" b="0"/>
-          </a:fillRef>
-          <a:effectRef idx="4">
-            <a:scrgbClr r="0" g="0" b="0"/>
-          </a:effectRef>
-          <a:fontRef idx="major"/>
-        </p:style>
-        <p:txBody>
-          <a:bodyPr/>
-          <a:lstStyle/>
-          <a:p>
-            <a:endParaRPr/>
-          </a:p>
-        </p:txBody>
-      </p:sp>
-      <p:sp>
-        <p:nvSpPr>
-          <p:cNvPr id="13" name="矩形 12">
-            <a:extLst>
-              <a:ext uri="{FF2B5EF4-FFF2-40B4-BE49-F238E27FC236}">
-                <a16:creationId xmlns:a16="http://schemas.microsoft.com/office/drawing/2014/main" id="{9424678F-5DB3-4528-9E56-B9763162097B}"/>
-              </a:ext>
-            </a:extLst>
-          </p:cNvPr>
-          <p:cNvSpPr>
-            <a:spLocks noGrp="1"/>
-          </p:cNvSpPr>
-          <p:nvPr/>
-        </p:nvSpPr>
-        <p:spPr>
-          <a:xfrm>
-            <a:off x="6858000" y="3314700"/>
-            <a:ext cx="4095750" cy="876300"/>
-          </a:xfrm>
-          <a:prstGeom prst="rect">
-            <a:avLst/>
-          </a:prstGeom>
-          <a:noFill/>
-          <a:ln w="0">
-            <a:noFill/>
-            <a:prstDash val="solid"/>
-          </a:ln>
-        </p:spPr>
-        <p:txBody>
-          <a:bodyPr/>
-          <a:lstStyle/>
-          <a:p>
-            <a:pPr>
-              <a:buNone/>
-              <a:defRPr sz="1275">
-                <a:solidFill>
-                  <a:srgbClr val="E5E7EB"/>
-                </a:solidFill>
-              </a:defRPr>
-            </a:pPr>
-            <a:r>
-              <a:rPr sz="1275">
-                <a:solidFill>
-                  <a:srgbClr val="E5E7EB"/>
-                </a:solidFill>
-              </a:rPr>
-              <a:t>ENTRYPOINT ["python", "app.py"]</a:t>
-            </a:r>
-          </a:p>
-          <a:p>
-            <a:endParaRPr sz="1275">
-              <a:solidFill>
-                <a:srgbClr val="E5E7EB"/>
-              </a:solidFill>
-            </a:endParaRPr>
-          </a:p>
-          <a:p>
-            <a:pPr>
-              <a:buNone/>
-              <a:defRPr sz="1275">
-                <a:solidFill>
-                  <a:srgbClr val="E5E7EB"/>
-                </a:solidFill>
-              </a:defRPr>
-            </a:pPr>
-            <a:r>
-              <a:rPr sz="1275">
-                <a:solidFill>
-                  <a:srgbClr val="E5E7EB"/>
-                </a:solidFill>
-              </a:rPr>
-              <a:t>$ docker run my-app bash</a:t>
-            </a:r>
-          </a:p>
-          <a:p>
-            <a:pPr>
-              <a:buNone/>
-              <a:defRPr sz="1275">
-                <a:solidFill>
-                  <a:srgbClr val="E5E7EB"/>
-                </a:solidFill>
-              </a:defRPr>
-            </a:pPr>
-            <a:r>
-              <a:rPr sz="1275">
-                <a:solidFill>
-                  <a:srgbClr val="E5E7EB"/>
-                </a:solidFill>
-              </a:rPr>
-              <a:t>=&gt; python app.py bash</a:t>
-            </a:r>
-          </a:p>
-        </p:txBody>
-      </p:sp>
-      <p:sp>
-        <p:nvSpPr>
-          <p:cNvPr id="14" name="矩形: 圓角 13">
-            <a:extLst>
-              <a:ext uri="{FF2B5EF4-FFF2-40B4-BE49-F238E27FC236}">
-                <a16:creationId xmlns:a16="http://schemas.microsoft.com/office/drawing/2014/main" id="{F851357A-852D-473B-B5D3-02DDCB6E1267}"/>
-              </a:ext>
-            </a:extLst>
-          </p:cNvPr>
-          <p:cNvSpPr>
-            <a:spLocks noGrp="1"/>
-          </p:cNvSpPr>
-          <p:nvPr/>
-        </p:nvSpPr>
-        <p:spPr>
-          <a:xfrm>
-            <a:off x="2000250" y="5010150"/>
-            <a:ext cx="8191500" cy="704850"/>
-          </a:xfrm>
-          <a:prstGeom prst="roundRect">
-            <a:avLst>
-              <a:gd name="adj" fmla="val 16216"/>
-            </a:avLst>
-          </a:prstGeom>
-          <a:solidFill>
-            <a:srgbClr val="0F172A"/>
-          </a:solidFill>
-          <a:ln w="9525">
-            <a:solidFill>
-              <a:srgbClr val="475569"/>
-            </a:solidFill>
-            <a:prstDash val="solid"/>
-          </a:ln>
-        </p:spPr>
-        <p:style>
-          <a:lnRef idx="0">
-            <a:scrgbClr r="0" g="0" b="0"/>
-          </a:lnRef>
-          <a:fillRef idx="0">
-            <a:scrgbClr r="0" g="0" b="0"/>
-          </a:fillRef>
-          <a:effectRef idx="4">
-            <a:scrgbClr r="0" g="0" b="0"/>
-          </a:effectRef>
-          <a:fontRef idx="major"/>
-        </p:style>
-        <p:txBody>
-          <a:bodyPr/>
-          <a:lstStyle/>
-          <a:p>
-            <a:endParaRPr/>
-          </a:p>
-        </p:txBody>
-      </p:sp>
-      <p:sp>
-        <p:nvSpPr>
-          <p:cNvPr id="15" name="矩形 14">
-            <a:extLst>
-              <a:ext uri="{FF2B5EF4-FFF2-40B4-BE49-F238E27FC236}">
-                <a16:creationId xmlns:a16="http://schemas.microsoft.com/office/drawing/2014/main" id="{B60E5D2C-00A1-4DF3-B70A-85B9DAAB1C4D}"/>
-              </a:ext>
-            </a:extLst>
-          </p:cNvPr>
-          <p:cNvSpPr>
-            <a:spLocks noGrp="1"/>
-          </p:cNvSpPr>
-          <p:nvPr/>
-        </p:nvSpPr>
-        <p:spPr>
-          <a:xfrm>
-            <a:off x="2362200" y="5219700"/>
-            <a:ext cx="7467600" cy="323850"/>
-          </a:xfrm>
-          <a:prstGeom prst="rect">
-            <a:avLst/>
-          </a:prstGeom>
-          <a:noFill/>
-          <a:ln w="0">
-            <a:noFill/>
-            <a:prstDash val="solid"/>
-          </a:ln>
-        </p:spPr>
-        <p:txBody>
-          <a:bodyPr/>
-          <a:lstStyle/>
-          <a:p>
-            <a:pPr>
-              <a:buNone/>
-              <a:defRPr sz="1350">
-                <a:solidFill>
-                  <a:srgbClr val="E5E7EB"/>
-                </a:solidFill>
-              </a:defRPr>
-            </a:pPr>
-            <a:r>
-              <a:rPr sz="1350">
-                <a:solidFill>
-                  <a:srgbClr val="E5E7EB"/>
-                </a:solidFill>
-              </a:rPr>
-              <a:t>真的要換掉 ENTRYPOINT，可以用 --entrypoint；新手先記住：CMD 容易被取代，ENTRYPOINT 比較固定。</a:t>
-            </a:r>
-          </a:p>
-        </p:txBody>
-      </p:sp>
-      <p:sp>
-        <p:nvSpPr>
-          <p:cNvPr id="16" name="矩形 15">
-            <a:extLst>
-              <a:ext uri="{FF2B5EF4-FFF2-40B4-BE49-F238E27FC236}">
-                <a16:creationId xmlns:a16="http://schemas.microsoft.com/office/drawing/2014/main" id="{803793AB-ECD2-4773-82CD-FB618C15AE56}"/>
-              </a:ext>
-            </a:extLst>
-          </p:cNvPr>
-          <p:cNvSpPr>
-            <a:spLocks noGrp="1"/>
-          </p:cNvSpPr>
-          <p:nvPr/>
-        </p:nvSpPr>
-        <p:spPr>
-          <a:xfrm>
-            <a:off x="609600" y="6305550"/>
-            <a:ext cx="9906000" cy="14288"/>
-          </a:xfrm>
-          <a:prstGeom prst="rect">
-            <a:avLst/>
-          </a:prstGeom>
-          <a:solidFill>
-            <a:srgbClr val="334155"/>
-          </a:solidFill>
-          <a:ln w="0">
-            <a:noFill/>
-            <a:prstDash val="solid"/>
-          </a:ln>
-        </p:spPr>
-        <p:txBody>
-          <a:bodyPr/>
-          <a:lstStyle/>
-          <a:p>
-            <a:endParaRPr/>
-          </a:p>
-        </p:txBody>
-      </p:sp>
-      <p:sp>
-        <p:nvSpPr>
-          <p:cNvPr id="17" name="矩形 16">
-            <a:extLst>
-              <a:ext uri="{FF2B5EF4-FFF2-40B4-BE49-F238E27FC236}">
-                <a16:creationId xmlns:a16="http://schemas.microsoft.com/office/drawing/2014/main" id="{F4C37016-0280-4EFC-A098-EC30CEA5138A}"/>
-              </a:ext>
-            </a:extLst>
-          </p:cNvPr>
-          <p:cNvSpPr>
-            <a:spLocks noGrp="1"/>
-          </p:cNvSpPr>
-          <p:nvPr/>
-        </p:nvSpPr>
-        <p:spPr>
-          <a:xfrm>
-            <a:off x="609600" y="6419850"/>
-            <a:ext cx="2762250" cy="190500"/>
-          </a:xfrm>
-          <a:prstGeom prst="rect">
-            <a:avLst/>
-          </a:prstGeom>
-          <a:noFill/>
-          <a:ln w="0">
-            <a:noFill/>
-            <a:prstDash val="solid"/>
-          </a:ln>
-        </p:spPr>
-        <p:txBody>
-          <a:bodyPr/>
-          <a:lstStyle/>
-          <a:p>
-            <a:pPr>
-              <a:buNone/>
-              <a:defRPr sz="825">
-                <a:solidFill>
-                  <a:srgbClr val="CBD5E1"/>
-                </a:solidFill>
-              </a:defRPr>
-            </a:pPr>
-            <a:r>
-              <a:rPr sz="825">
-                <a:solidFill>
-                  <a:srgbClr val="CBD5E1"/>
-                </a:solidFill>
-              </a:rPr>
-              <a:t>Docker 基礎教學 | 第 4 堂</a:t>
-            </a:r>
-          </a:p>
-        </p:txBody>
-      </p:sp>
-      <p:sp>
-        <p:nvSpPr>
-          <p:cNvPr id="18" name="矩形 17">
-            <a:extLst>
-              <a:ext uri="{FF2B5EF4-FFF2-40B4-BE49-F238E27FC236}">
-                <a16:creationId xmlns:a16="http://schemas.microsoft.com/office/drawing/2014/main" id="{3BA89AC2-B8C3-4C58-87F1-78D58BBE6137}"/>
-              </a:ext>
-            </a:extLst>
-          </p:cNvPr>
-          <p:cNvSpPr>
-            <a:spLocks noGrp="1"/>
-          </p:cNvSpPr>
-          <p:nvPr/>
-        </p:nvSpPr>
-        <p:spPr>
-          <a:xfrm>
-            <a:off x="9810750" y="6400800"/>
-            <a:ext cx="1524000" cy="228600"/>
-          </a:xfrm>
-          <a:prstGeom prst="rect">
-            <a:avLst/>
-          </a:prstGeom>
-          <a:noFill/>
-          <a:ln w="0">
-            <a:noFill/>
-            <a:prstDash val="solid"/>
-          </a:ln>
-        </p:spPr>
-        <p:txBody>
-          <a:bodyPr/>
-          <a:lstStyle/>
-          <a:p>
-            <a:pPr algn="r">
-              <a:buNone/>
-              <a:defRPr sz="900" b="1">
-                <a:solidFill>
-                  <a:srgbClr val="CBD5E1"/>
-                </a:solidFill>
-              </a:defRPr>
-            </a:pPr>
-            <a:r>
-              <a:rPr sz="900" b="1">
-                <a:solidFill>
-                  <a:srgbClr val="CBD5E1"/>
-                </a:solidFill>
-              </a:rPr>
-              <a:t>CMD / ENTRYPOINT 1</a:t>
+        </p:spPr>
+        <p:txBody>
+          <a:bodyPr wrap="square">
+            <a:spAutoFit/>
+          </a:bodyPr>
+          <a:lstStyle/>
+          <a:p>
+            <a:r>
+              <a:rPr lang="zh-TW" altLang="en-US" sz="8800" dirty="0"/>
+              <a:t>額外補充</a:t>
             </a:r>
           </a:p>
         </p:txBody>
@@ -16569,7 +16659,7 @@
     </p:spTree>
     <p:extLst>
       <p:ext uri="{BB962C8B-B14F-4D97-AF65-F5344CB8AC3E}">
-        <p14:creationId xmlns:p14="http://schemas.microsoft.com/office/powerpoint/2010/main" val="1001492653"/>
+        <p14:creationId xmlns:p14="http://schemas.microsoft.com/office/powerpoint/2010/main" val="1095336420"/>
       </p:ext>
     </p:extLst>
   </p:cSld>
@@ -16680,7 +16770,7 @@
                   <a:srgbClr val="A5B4FC"/>
                 </a:solidFill>
               </a:rPr>
-              <a:t>DOCKER RUN COMMAND</a:t>
+              <a:t>DOCKERFILE BEHAVIOR</a:t>
             </a:r>
           </a:p>
         </p:txBody>
@@ -16731,7 +16821,7 @@
                   <a:srgbClr val="FFFFFF"/>
                 </a:solidFill>
               </a:rPr>
-              <a:t>不加 sh/bash vs 結尾加 sh/bash</a:t>
+              <a:t>CMD vs ENTRYPOINT：誰會被 docker run 覆蓋？</a:t>
             </a:r>
           </a:p>
         </p:txBody>
@@ -16890,7 +16980,7 @@
                   <a:srgbClr val="93C5FD"/>
                 </a:solidFill>
               </a:rPr>
-              <a:t>不補指令：跑預設 CMD</a:t>
+              <a:t>CMD：預設指令</a:t>
             </a:r>
           </a:p>
         </p:txBody>
@@ -16941,7 +17031,7 @@
                   <a:srgbClr val="E2E8F0"/>
                 </a:solidFill>
               </a:rPr>
-              <a:t>Dockerfile 的 CMD 會在 container 啟動時執行。</a:t>
+              <a:t>使用者在 docker run 後面補指令時，整個 CMD 會被取代。</a:t>
             </a:r>
           </a:p>
         </p:txBody>
@@ -17071,7 +17161,7 @@
                   <a:srgbClr val="E5E7EB"/>
                 </a:solidFill>
               </a:rPr>
-              <a:t>$ docker run my-app</a:t>
+              <a:t>$ docker run my-app bash</a:t>
             </a:r>
           </a:p>
           <a:p>
@@ -17089,7 +17179,7 @@
                   <a:srgbClr val="E5E7EB"/>
                 </a:solidFill>
               </a:rPr>
-              <a:t>=&gt; python app.py</a:t>
+              <a:t>=&gt; bash</a:t>
             </a:r>
           </a:p>
         </p:txBody>
@@ -17140,7 +17230,7 @@
                   <a:srgbClr val="86EFAC"/>
                 </a:solidFill>
               </a:rPr>
-              <a:t>結尾加 sh/bash：覆蓋 CMD</a:t>
+              <a:t>ENTRYPOINT：固定主程式</a:t>
             </a:r>
           </a:p>
         </p:txBody>
@@ -17191,7 +17281,7 @@
                   <a:srgbClr val="E2E8F0"/>
                 </a:solidFill>
               </a:rPr>
-              <a:t>docker run 後面補的指令會取代整個 CMD。</a:t>
+              <a:t>使用者補的內容通常會接在 ENTRYPOINT 後面，變成參數。</a:t>
             </a:r>
           </a:p>
         </p:txBody>
@@ -17296,7 +17386,7 @@
                   <a:srgbClr val="E5E7EB"/>
                 </a:solidFill>
               </a:rPr>
-              <a:t>CMD ["python", "app.py"]</a:t>
+              <a:t>ENTRYPOINT ["python", "app.py"]</a:t>
             </a:r>
           </a:p>
           <a:p>
@@ -17339,7 +17429,7 @@
                   <a:srgbClr val="E5E7EB"/>
                 </a:solidFill>
               </a:rPr>
-              <a:t>=&gt; bash（服務不會啟動）</a:t>
+              <a:t>=&gt; python app.py bash</a:t>
             </a:r>
           </a:p>
         </p:txBody>
@@ -17444,7 +17534,7 @@
                   <a:srgbClr val="E5E7EB"/>
                 </a:solidFill>
               </a:rPr>
-              <a:t>第二章回扣：docker run nginx sh 是只開 shell；docker exec -it nginx-life sh 是進入已在跑的 nginx，服務仍在。</a:t>
+              <a:t>真的要換掉 ENTRYPOINT，可以用 --entrypoint；新手先記住：CMD 容易被取代，ENTRYPOINT 比較固定。</a:t>
             </a:r>
           </a:p>
         </p:txBody>
@@ -17584,7 +17674,7 @@
                   <a:srgbClr val="CBD5E1"/>
                 </a:solidFill>
               </a:rPr>
-              <a:t>CMD 覆蓋小觀念</a:t>
+              <a:t>CMD / ENTRYPOINT 1</a:t>
             </a:r>
           </a:p>
         </p:txBody>
@@ -17621,10 +17711,10 @@
       </p:grpSpPr>
       <p:sp>
         <p:nvSpPr>
-          <p:cNvPr id="18" name="矩形 17">
-            <a:extLst>
-              <a:ext uri="{FF2B5EF4-FFF2-40B4-BE49-F238E27FC236}">
-                <a16:creationId xmlns:a16="http://schemas.microsoft.com/office/drawing/2014/main" id="{418A3494-4B9D-4BED-BAA7-9CC087350506}"/>
+          <p:cNvPr id="19" name="矩形 18">
+            <a:extLst>
+              <a:ext uri="{FF2B5EF4-FFF2-40B4-BE49-F238E27FC236}">
+                <a16:creationId xmlns:a16="http://schemas.microsoft.com/office/drawing/2014/main" id="{D230D268-1A45-4EAB-B8C3-978F0176BDB3}"/>
               </a:ext>
             </a:extLst>
           </p:cNvPr>
@@ -17653,7 +17743,7 @@
           <a:bodyPr/>
           <a:lstStyle/>
           <a:p>
-            <a:endParaRPr dirty="0"/>
+            <a:endParaRPr/>
           </a:p>
         </p:txBody>
       </p:sp>
@@ -17662,7 +17752,7 @@
           <p:cNvPr id="2" name="矩形 1">
             <a:extLst>
               <a:ext uri="{FF2B5EF4-FFF2-40B4-BE49-F238E27FC236}">
-                <a16:creationId xmlns:a16="http://schemas.microsoft.com/office/drawing/2014/main" id="{920DCE9B-AB07-43D4-9AB4-67DB818AD107}"/>
+                <a16:creationId xmlns:a16="http://schemas.microsoft.com/office/drawing/2014/main" id="{FA46435F-713C-4BFB-8CF7-F64FAC0F5D29}"/>
               </a:ext>
             </a:extLst>
           </p:cNvPr>
@@ -17703,7 +17793,7 @@
                   <a:srgbClr val="A5B4FC"/>
                 </a:solidFill>
               </a:rPr>
-              <a:t>BEST PRACTICE</a:t>
+              <a:t>DOCKER RUN COMMAND</a:t>
             </a:r>
           </a:p>
         </p:txBody>
@@ -17713,7 +17803,7 @@
           <p:cNvPr id="3" name="矩形 2">
             <a:extLst>
               <a:ext uri="{FF2B5EF4-FFF2-40B4-BE49-F238E27FC236}">
-                <a16:creationId xmlns:a16="http://schemas.microsoft.com/office/drawing/2014/main" id="{2E470020-12EF-4C85-A0CD-4ADF38CC6BF7}"/>
+                <a16:creationId xmlns:a16="http://schemas.microsoft.com/office/drawing/2014/main" id="{9A02230D-32A0-40D1-A345-6248F189D7EB}"/>
               </a:ext>
             </a:extLst>
           </p:cNvPr>
@@ -17754,92 +17844,41 @@
                   <a:srgbClr val="FFFFFF"/>
                 </a:solidFill>
               </a:rPr>
-              <a:t>實戰組合：ENTRYPOINT 放工具，CMD 放預設參數</a:t>
-            </a:r>
-          </a:p>
-        </p:txBody>
-      </p:sp>
-      <p:sp>
-        <p:nvSpPr>
-          <p:cNvPr id="4" name="矩形 3">
-            <a:extLst>
-              <a:ext uri="{FF2B5EF4-FFF2-40B4-BE49-F238E27FC236}">
-                <a16:creationId xmlns:a16="http://schemas.microsoft.com/office/drawing/2014/main" id="{6A427EE0-4D2F-47AD-94BB-4A827634A4BF}"/>
-              </a:ext>
-            </a:extLst>
-          </p:cNvPr>
-          <p:cNvSpPr>
-            <a:spLocks noGrp="1"/>
-          </p:cNvSpPr>
-          <p:nvPr/>
-        </p:nvSpPr>
-        <p:spPr>
-          <a:xfrm>
-            <a:off x="857250" y="1524000"/>
-            <a:ext cx="10477500" cy="381000"/>
-          </a:xfrm>
-          <a:prstGeom prst="rect">
-            <a:avLst/>
-          </a:prstGeom>
-          <a:noFill/>
-          <a:ln w="0">
-            <a:noFill/>
-            <a:prstDash val="solid"/>
-          </a:ln>
-        </p:spPr>
-        <p:txBody>
-          <a:bodyPr/>
-          <a:lstStyle/>
-          <a:p>
-            <a:pPr>
-              <a:buNone/>
-              <a:defRPr sz="1500">
-                <a:solidFill>
-                  <a:srgbClr val="E2E8F0"/>
-                </a:solidFill>
-              </a:defRPr>
-            </a:pPr>
-            <a:r>
-              <a:rPr sz="1500">
-                <a:solidFill>
-                  <a:srgbClr val="E2E8F0"/>
-                </a:solidFill>
-              </a:rPr>
-              <a:t>把固定不變的主程式放在 ENTRYPOINT，把可以被使用者替換的預設目標放在 CMD。</a:t>
-            </a:r>
-          </a:p>
-        </p:txBody>
-      </p:sp>
-      <p:sp>
-        <p:nvSpPr>
-          <p:cNvPr id="5" name="矩形: 圓角 4">
-            <a:extLst>
-              <a:ext uri="{FF2B5EF4-FFF2-40B4-BE49-F238E27FC236}">
-                <a16:creationId xmlns:a16="http://schemas.microsoft.com/office/drawing/2014/main" id="{12552BAF-1E7B-4805-BB0B-CA6A36C4AD47}"/>
-              </a:ext>
-            </a:extLst>
-          </p:cNvPr>
-          <p:cNvSpPr>
-            <a:spLocks noGrp="1"/>
-          </p:cNvSpPr>
-          <p:nvPr/>
-        </p:nvSpPr>
-        <p:spPr>
-          <a:xfrm>
-            <a:off x="857250" y="2209800"/>
-            <a:ext cx="4762500" cy="2000250"/>
+              <a:t>不加 sh/bash vs 結尾加 sh/bash</a:t>
+            </a:r>
+          </a:p>
+        </p:txBody>
+      </p:sp>
+      <p:sp>
+        <p:nvSpPr>
+          <p:cNvPr id="4" name="矩形: 圓角 3">
+            <a:extLst>
+              <a:ext uri="{FF2B5EF4-FFF2-40B4-BE49-F238E27FC236}">
+                <a16:creationId xmlns:a16="http://schemas.microsoft.com/office/drawing/2014/main" id="{8AD4939C-7775-4AE5-9EDF-C7AA19B798B8}"/>
+              </a:ext>
+            </a:extLst>
+          </p:cNvPr>
+          <p:cNvSpPr>
+            <a:spLocks noGrp="1"/>
+          </p:cNvSpPr>
+          <p:nvPr/>
+        </p:nvSpPr>
+        <p:spPr>
+          <a:xfrm>
+            <a:off x="762000" y="1695450"/>
+            <a:ext cx="5048250" cy="2952750"/>
           </a:xfrm>
           <a:prstGeom prst="roundRect">
             <a:avLst>
-              <a:gd name="adj" fmla="val 5714"/>
+              <a:gd name="adj" fmla="val 3871"/>
             </a:avLst>
           </a:prstGeom>
           <a:solidFill>
-            <a:srgbClr val="0B1220"/>
+            <a:srgbClr val="111827"/>
           </a:solidFill>
           <a:ln w="9525">
             <a:solidFill>
-              <a:srgbClr val="1E293B"/>
+              <a:srgbClr val="60A5FA"/>
             </a:solidFill>
             <a:prstDash val="solid"/>
           </a:ln>
@@ -17866,138 +17905,26 @@
       </p:sp>
       <p:sp>
         <p:nvSpPr>
-          <p:cNvPr id="6" name="矩形 5">
-            <a:extLst>
-              <a:ext uri="{FF2B5EF4-FFF2-40B4-BE49-F238E27FC236}">
-                <a16:creationId xmlns:a16="http://schemas.microsoft.com/office/drawing/2014/main" id="{82354283-B5F9-4D4A-9855-3BE475F3E0F3}"/>
-              </a:ext>
-            </a:extLst>
-          </p:cNvPr>
-          <p:cNvSpPr>
-            <a:spLocks noGrp="1"/>
-          </p:cNvSpPr>
-          <p:nvPr/>
-        </p:nvSpPr>
-        <p:spPr>
-          <a:xfrm>
-            <a:off x="1066800" y="2381250"/>
-            <a:ext cx="4343400" cy="1657350"/>
-          </a:xfrm>
-          <a:prstGeom prst="rect">
-            <a:avLst/>
-          </a:prstGeom>
-          <a:noFill/>
-          <a:ln w="0">
-            <a:noFill/>
-            <a:prstDash val="solid"/>
-          </a:ln>
-        </p:spPr>
-        <p:txBody>
-          <a:bodyPr/>
-          <a:lstStyle/>
-          <a:p>
-            <a:pPr>
-              <a:buNone/>
-              <a:defRPr sz="1275">
-                <a:solidFill>
-                  <a:srgbClr val="E5E7EB"/>
-                </a:solidFill>
-              </a:defRPr>
-            </a:pPr>
-            <a:r>
-              <a:rPr sz="1275">
-                <a:solidFill>
-                  <a:srgbClr val="E5E7EB"/>
-                </a:solidFill>
-              </a:rPr>
-              <a:t># 一定會執行的主程式</a:t>
-            </a:r>
-          </a:p>
-          <a:p>
-            <a:pPr>
-              <a:buNone/>
-              <a:defRPr sz="1275">
-                <a:solidFill>
-                  <a:srgbClr val="E5E7EB"/>
-                </a:solidFill>
-              </a:defRPr>
-            </a:pPr>
-            <a:r>
-              <a:rPr sz="1275">
-                <a:solidFill>
-                  <a:srgbClr val="E5E7EB"/>
-                </a:solidFill>
-              </a:rPr>
-              <a:t>ENTRYPOINT ["ping"]</a:t>
-            </a:r>
-          </a:p>
-          <a:p>
-            <a:endParaRPr sz="1275">
-              <a:solidFill>
-                <a:srgbClr val="E5E7EB"/>
-              </a:solidFill>
-            </a:endParaRPr>
-          </a:p>
-          <a:p>
-            <a:pPr>
-              <a:buNone/>
-              <a:defRPr sz="1275">
-                <a:solidFill>
-                  <a:srgbClr val="E5E7EB"/>
-                </a:solidFill>
-              </a:defRPr>
-            </a:pPr>
-            <a:r>
-              <a:rPr sz="1275">
-                <a:solidFill>
-                  <a:srgbClr val="E5E7EB"/>
-                </a:solidFill>
-              </a:rPr>
-              <a:t># 預設參數，可以被 docker run 後面的內容取代</a:t>
-            </a:r>
-          </a:p>
-          <a:p>
-            <a:pPr>
-              <a:buNone/>
-              <a:defRPr sz="1275">
-                <a:solidFill>
-                  <a:srgbClr val="E5E7EB"/>
-                </a:solidFill>
-              </a:defRPr>
-            </a:pPr>
-            <a:r>
-              <a:rPr sz="1275">
-                <a:solidFill>
-                  <a:srgbClr val="E5E7EB"/>
-                </a:solidFill>
-              </a:rPr>
-              <a:t>CMD ["google.com"]</a:t>
-            </a:r>
-          </a:p>
-        </p:txBody>
-      </p:sp>
-      <p:sp>
-        <p:nvSpPr>
-          <p:cNvPr id="7" name="矩形: 圓角 6">
-            <a:extLst>
-              <a:ext uri="{FF2B5EF4-FFF2-40B4-BE49-F238E27FC236}">
-                <a16:creationId xmlns:a16="http://schemas.microsoft.com/office/drawing/2014/main" id="{58A91E4C-4114-4E8B-AC40-0B23BA38E6EA}"/>
-              </a:ext>
-            </a:extLst>
-          </p:cNvPr>
-          <p:cNvSpPr>
-            <a:spLocks noGrp="1"/>
-          </p:cNvSpPr>
-          <p:nvPr/>
-        </p:nvSpPr>
-        <p:spPr>
-          <a:xfrm>
-            <a:off x="6286500" y="2133600"/>
-            <a:ext cx="4286250" cy="819150"/>
+          <p:cNvPr id="5" name="矩形: 圓角 4">
+            <a:extLst>
+              <a:ext uri="{FF2B5EF4-FFF2-40B4-BE49-F238E27FC236}">
+                <a16:creationId xmlns:a16="http://schemas.microsoft.com/office/drawing/2014/main" id="{900B08E6-3D17-48AC-B82C-3E0D7F2E4D56}"/>
+              </a:ext>
+            </a:extLst>
+          </p:cNvPr>
+          <p:cNvSpPr>
+            <a:spLocks noGrp="1"/>
+          </p:cNvSpPr>
+          <p:nvPr/>
+        </p:nvSpPr>
+        <p:spPr>
+          <a:xfrm>
+            <a:off x="6381750" y="1695450"/>
+            <a:ext cx="5048250" cy="2952750"/>
           </a:xfrm>
           <a:prstGeom prst="roundRect">
             <a:avLst>
-              <a:gd name="adj" fmla="val 13953"/>
+              <a:gd name="adj" fmla="val 3871"/>
             </a:avLst>
           </a:prstGeom>
           <a:solidFill>
@@ -18005,7 +17932,7 @@
           </a:solidFill>
           <a:ln w="9525">
             <a:solidFill>
-              <a:srgbClr val="60A5FA"/>
+              <a:srgbClr val="34D399"/>
             </a:solidFill>
             <a:prstDash val="solid"/>
           </a:ln>
@@ -18032,22 +17959,22 @@
       </p:sp>
       <p:sp>
         <p:nvSpPr>
-          <p:cNvPr id="8" name="矩形 7">
-            <a:extLst>
-              <a:ext uri="{FF2B5EF4-FFF2-40B4-BE49-F238E27FC236}">
-                <a16:creationId xmlns:a16="http://schemas.microsoft.com/office/drawing/2014/main" id="{C599016E-7451-420C-9B6E-8316E1C7C41F}"/>
-              </a:ext>
-            </a:extLst>
-          </p:cNvPr>
-          <p:cNvSpPr>
-            <a:spLocks noGrp="1"/>
-          </p:cNvSpPr>
-          <p:nvPr/>
-        </p:nvSpPr>
-        <p:spPr>
-          <a:xfrm>
-            <a:off x="6610350" y="2324100"/>
-            <a:ext cx="3714750" cy="266700"/>
+          <p:cNvPr id="6" name="矩形 5">
+            <a:extLst>
+              <a:ext uri="{FF2B5EF4-FFF2-40B4-BE49-F238E27FC236}">
+                <a16:creationId xmlns:a16="http://schemas.microsoft.com/office/drawing/2014/main" id="{CF8A6635-8265-45C3-A483-0860CE52BC39}"/>
+              </a:ext>
+            </a:extLst>
+          </p:cNvPr>
+          <p:cNvSpPr>
+            <a:spLocks noGrp="1"/>
+          </p:cNvSpPr>
+          <p:nvPr/>
+        </p:nvSpPr>
+        <p:spPr>
+          <a:xfrm>
+            <a:off x="1028700" y="1943100"/>
+            <a:ext cx="4514850" cy="342900"/>
           </a:xfrm>
           <a:prstGeom prst="rect">
             <a:avLst/>
@@ -18064,41 +17991,41 @@
           <a:p>
             <a:pPr>
               <a:buNone/>
-              <a:defRPr sz="1500">
-                <a:solidFill>
-                  <a:srgbClr val="E5E7EB"/>
-                </a:solidFill>
-              </a:defRPr>
-            </a:pPr>
-            <a:r>
-              <a:rPr sz="1500">
-                <a:solidFill>
-                  <a:srgbClr val="E5E7EB"/>
-                </a:solidFill>
-              </a:rPr>
-              <a:t>$ docker run my-ping</a:t>
-            </a:r>
-          </a:p>
-        </p:txBody>
-      </p:sp>
-      <p:sp>
-        <p:nvSpPr>
-          <p:cNvPr id="9" name="矩形 8">
-            <a:extLst>
-              <a:ext uri="{FF2B5EF4-FFF2-40B4-BE49-F238E27FC236}">
-                <a16:creationId xmlns:a16="http://schemas.microsoft.com/office/drawing/2014/main" id="{9A1EE215-5779-404A-BA0C-A421D5112FB1}"/>
-              </a:ext>
-            </a:extLst>
-          </p:cNvPr>
-          <p:cNvSpPr>
-            <a:spLocks noGrp="1"/>
-          </p:cNvSpPr>
-          <p:nvPr/>
-        </p:nvSpPr>
-        <p:spPr>
-          <a:xfrm>
-            <a:off x="6610350" y="2647950"/>
-            <a:ext cx="3714750" cy="266700"/>
+              <a:defRPr sz="1950" b="1">
+                <a:solidFill>
+                  <a:srgbClr val="93C5FD"/>
+                </a:solidFill>
+              </a:defRPr>
+            </a:pPr>
+            <a:r>
+              <a:rPr sz="1950" b="1">
+                <a:solidFill>
+                  <a:srgbClr val="93C5FD"/>
+                </a:solidFill>
+              </a:rPr>
+              <a:t>不補指令：跑預設 CMD</a:t>
+            </a:r>
+          </a:p>
+        </p:txBody>
+      </p:sp>
+      <p:sp>
+        <p:nvSpPr>
+          <p:cNvPr id="7" name="矩形 6">
+            <a:extLst>
+              <a:ext uri="{FF2B5EF4-FFF2-40B4-BE49-F238E27FC236}">
+                <a16:creationId xmlns:a16="http://schemas.microsoft.com/office/drawing/2014/main" id="{1BED2816-4224-441C-A59A-2718D65B713F}"/>
+              </a:ext>
+            </a:extLst>
+          </p:cNvPr>
+          <p:cNvSpPr>
+            <a:spLocks noGrp="1"/>
+          </p:cNvSpPr>
+          <p:nvPr/>
+        </p:nvSpPr>
+        <p:spPr>
+          <a:xfrm>
+            <a:off x="1028700" y="2419350"/>
+            <a:ext cx="4514850" cy="552450"/>
           </a:xfrm>
           <a:prstGeom prst="rect">
             <a:avLst/>
@@ -18115,53 +18042,53 @@
           <a:p>
             <a:pPr>
               <a:buNone/>
-              <a:defRPr sz="1500" b="1">
-                <a:solidFill>
-                  <a:srgbClr val="93C5FD"/>
-                </a:solidFill>
-              </a:defRPr>
-            </a:pPr>
-            <a:r>
-              <a:rPr sz="1500" b="1">
-                <a:solidFill>
-                  <a:srgbClr val="93C5FD"/>
-                </a:solidFill>
-              </a:rPr>
-              <a:t>=&gt; ping google.com</a:t>
-            </a:r>
-          </a:p>
-        </p:txBody>
-      </p:sp>
-      <p:sp>
-        <p:nvSpPr>
-          <p:cNvPr id="10" name="矩形: 圓角 9">
-            <a:extLst>
-              <a:ext uri="{FF2B5EF4-FFF2-40B4-BE49-F238E27FC236}">
-                <a16:creationId xmlns:a16="http://schemas.microsoft.com/office/drawing/2014/main" id="{8BE5BA40-09A0-41D8-AF68-C76850D8C992}"/>
-              </a:ext>
-            </a:extLst>
-          </p:cNvPr>
-          <p:cNvSpPr>
-            <a:spLocks noGrp="1"/>
-          </p:cNvSpPr>
-          <p:nvPr/>
-        </p:nvSpPr>
-        <p:spPr>
-          <a:xfrm>
-            <a:off x="6286500" y="3390900"/>
-            <a:ext cx="4286250" cy="819150"/>
+              <a:defRPr sz="1350">
+                <a:solidFill>
+                  <a:srgbClr val="E2E8F0"/>
+                </a:solidFill>
+              </a:defRPr>
+            </a:pPr>
+            <a:r>
+              <a:rPr sz="1350">
+                <a:solidFill>
+                  <a:srgbClr val="E2E8F0"/>
+                </a:solidFill>
+              </a:rPr>
+              <a:t>Dockerfile 的 CMD 會在 container 啟動時執行。</a:t>
+            </a:r>
+          </a:p>
+        </p:txBody>
+      </p:sp>
+      <p:sp>
+        <p:nvSpPr>
+          <p:cNvPr id="8" name="矩形: 圓角 7">
+            <a:extLst>
+              <a:ext uri="{FF2B5EF4-FFF2-40B4-BE49-F238E27FC236}">
+                <a16:creationId xmlns:a16="http://schemas.microsoft.com/office/drawing/2014/main" id="{C91BB24C-1DE9-4243-91B9-838B8C08A756}"/>
+              </a:ext>
+            </a:extLst>
+          </p:cNvPr>
+          <p:cNvSpPr>
+            <a:spLocks noGrp="1"/>
+          </p:cNvSpPr>
+          <p:nvPr/>
+        </p:nvSpPr>
+        <p:spPr>
+          <a:xfrm>
+            <a:off x="1028700" y="3143250"/>
+            <a:ext cx="4514850" cy="1219200"/>
           </a:xfrm>
           <a:prstGeom prst="roundRect">
             <a:avLst>
-              <a:gd name="adj" fmla="val 13953"/>
+              <a:gd name="adj" fmla="val 9375"/>
             </a:avLst>
           </a:prstGeom>
           <a:solidFill>
-            <a:srgbClr val="111827"/>
+            <a:srgbClr val="0B1220"/>
           </a:solidFill>
           <a:ln w="9525">
             <a:solidFill>
-              <a:srgbClr val="34D399"/>
+              <a:srgbClr val="1E293B"/>
             </a:solidFill>
             <a:prstDash val="solid"/>
           </a:ln>
@@ -18188,22 +18115,22 @@
       </p:sp>
       <p:sp>
         <p:nvSpPr>
-          <p:cNvPr id="11" name="矩形 10">
-            <a:extLst>
-              <a:ext uri="{FF2B5EF4-FFF2-40B4-BE49-F238E27FC236}">
-                <a16:creationId xmlns:a16="http://schemas.microsoft.com/office/drawing/2014/main" id="{1FC56D24-2B6F-41DA-87DD-3284E6841CC4}"/>
-              </a:ext>
-            </a:extLst>
-          </p:cNvPr>
-          <p:cNvSpPr>
-            <a:spLocks noGrp="1"/>
-          </p:cNvSpPr>
-          <p:nvPr/>
-        </p:nvSpPr>
-        <p:spPr>
-          <a:xfrm>
-            <a:off x="6610350" y="3581400"/>
-            <a:ext cx="3714750" cy="266700"/>
+          <p:cNvPr id="9" name="矩形 8">
+            <a:extLst>
+              <a:ext uri="{FF2B5EF4-FFF2-40B4-BE49-F238E27FC236}">
+                <a16:creationId xmlns:a16="http://schemas.microsoft.com/office/drawing/2014/main" id="{8F7D58BC-452B-4DDD-B9F2-B36B6263D592}"/>
+              </a:ext>
+            </a:extLst>
+          </p:cNvPr>
+          <p:cNvSpPr>
+            <a:spLocks noGrp="1"/>
+          </p:cNvSpPr>
+          <p:nvPr/>
+        </p:nvSpPr>
+        <p:spPr>
+          <a:xfrm>
+            <a:off x="1238250" y="3314700"/>
+            <a:ext cx="4095750" cy="876300"/>
           </a:xfrm>
           <a:prstGeom prst="rect">
             <a:avLst/>
@@ -18220,41 +18147,84 @@
           <a:p>
             <a:pPr>
               <a:buNone/>
-              <a:defRPr sz="1500">
+              <a:defRPr sz="1275">
                 <a:solidFill>
                   <a:srgbClr val="E5E7EB"/>
                 </a:solidFill>
               </a:defRPr>
             </a:pPr>
             <a:r>
-              <a:rPr sz="1500">
+              <a:rPr sz="1275">
                 <a:solidFill>
                   <a:srgbClr val="E5E7EB"/>
                 </a:solidFill>
               </a:rPr>
-              <a:t>$ docker run my-ping yahoo.com</a:t>
-            </a:r>
-          </a:p>
-        </p:txBody>
-      </p:sp>
-      <p:sp>
-        <p:nvSpPr>
-          <p:cNvPr id="12" name="矩形 11">
-            <a:extLst>
-              <a:ext uri="{FF2B5EF4-FFF2-40B4-BE49-F238E27FC236}">
-                <a16:creationId xmlns:a16="http://schemas.microsoft.com/office/drawing/2014/main" id="{30103952-8727-4573-BF4D-915BF8A3CAE2}"/>
-              </a:ext>
-            </a:extLst>
-          </p:cNvPr>
-          <p:cNvSpPr>
-            <a:spLocks noGrp="1"/>
-          </p:cNvSpPr>
-          <p:nvPr/>
-        </p:nvSpPr>
-        <p:spPr>
-          <a:xfrm>
-            <a:off x="6610350" y="3905250"/>
-            <a:ext cx="3714750" cy="266700"/>
+              <a:t>CMD ["python", "app.py"]</a:t>
+            </a:r>
+          </a:p>
+          <a:p>
+            <a:endParaRPr sz="1275">
+              <a:solidFill>
+                <a:srgbClr val="E5E7EB"/>
+              </a:solidFill>
+            </a:endParaRPr>
+          </a:p>
+          <a:p>
+            <a:pPr>
+              <a:buNone/>
+              <a:defRPr sz="1275">
+                <a:solidFill>
+                  <a:srgbClr val="E5E7EB"/>
+                </a:solidFill>
+              </a:defRPr>
+            </a:pPr>
+            <a:r>
+              <a:rPr sz="1275">
+                <a:solidFill>
+                  <a:srgbClr val="E5E7EB"/>
+                </a:solidFill>
+              </a:rPr>
+              <a:t>$ docker run my-app</a:t>
+            </a:r>
+          </a:p>
+          <a:p>
+            <a:pPr>
+              <a:buNone/>
+              <a:defRPr sz="1275">
+                <a:solidFill>
+                  <a:srgbClr val="E5E7EB"/>
+                </a:solidFill>
+              </a:defRPr>
+            </a:pPr>
+            <a:r>
+              <a:rPr sz="1275">
+                <a:solidFill>
+                  <a:srgbClr val="E5E7EB"/>
+                </a:solidFill>
+              </a:rPr>
+              <a:t>=&gt; python app.py</a:t>
+            </a:r>
+          </a:p>
+        </p:txBody>
+      </p:sp>
+      <p:sp>
+        <p:nvSpPr>
+          <p:cNvPr id="10" name="矩形 9">
+            <a:extLst>
+              <a:ext uri="{FF2B5EF4-FFF2-40B4-BE49-F238E27FC236}">
+                <a16:creationId xmlns:a16="http://schemas.microsoft.com/office/drawing/2014/main" id="{CE57BBED-35BC-4909-B3B3-CC8A7DCB5882}"/>
+              </a:ext>
+            </a:extLst>
+          </p:cNvPr>
+          <p:cNvSpPr>
+            <a:spLocks noGrp="1"/>
+          </p:cNvSpPr>
+          <p:nvPr/>
+        </p:nvSpPr>
+        <p:spPr>
+          <a:xfrm>
+            <a:off x="6648450" y="1943100"/>
+            <a:ext cx="4514850" cy="342900"/>
           </a:xfrm>
           <a:prstGeom prst="rect">
             <a:avLst/>
@@ -18271,53 +18241,104 @@
           <a:p>
             <a:pPr>
               <a:buNone/>
-              <a:defRPr sz="1500" b="1">
+              <a:defRPr sz="1950" b="1">
                 <a:solidFill>
                   <a:srgbClr val="86EFAC"/>
                 </a:solidFill>
               </a:defRPr>
             </a:pPr>
             <a:r>
-              <a:rPr sz="1500" b="1">
+              <a:rPr sz="1950" b="1">
                 <a:solidFill>
                   <a:srgbClr val="86EFAC"/>
                 </a:solidFill>
               </a:rPr>
-              <a:t>=&gt; ping yahoo.com</a:t>
-            </a:r>
-          </a:p>
-        </p:txBody>
-      </p:sp>
-      <p:sp>
-        <p:nvSpPr>
-          <p:cNvPr id="13" name="矩形: 圓角 12">
-            <a:extLst>
-              <a:ext uri="{FF2B5EF4-FFF2-40B4-BE49-F238E27FC236}">
-                <a16:creationId xmlns:a16="http://schemas.microsoft.com/office/drawing/2014/main" id="{8DF076BE-085A-4B4D-8958-C295373310B0}"/>
-              </a:ext>
-            </a:extLst>
-          </p:cNvPr>
-          <p:cNvSpPr>
-            <a:spLocks noGrp="1"/>
-          </p:cNvSpPr>
-          <p:nvPr/>
-        </p:nvSpPr>
-        <p:spPr>
-          <a:xfrm>
-            <a:off x="1962150" y="4953000"/>
-            <a:ext cx="8267700" cy="781050"/>
+              <a:t>結尾加 sh/bash：覆蓋 CMD</a:t>
+            </a:r>
+          </a:p>
+        </p:txBody>
+      </p:sp>
+      <p:sp>
+        <p:nvSpPr>
+          <p:cNvPr id="11" name="矩形 10">
+            <a:extLst>
+              <a:ext uri="{FF2B5EF4-FFF2-40B4-BE49-F238E27FC236}">
+                <a16:creationId xmlns:a16="http://schemas.microsoft.com/office/drawing/2014/main" id="{9B69BC4F-0FD8-4A53-9F9A-6FFC2C062F2A}"/>
+              </a:ext>
+            </a:extLst>
+          </p:cNvPr>
+          <p:cNvSpPr>
+            <a:spLocks noGrp="1"/>
+          </p:cNvSpPr>
+          <p:nvPr/>
+        </p:nvSpPr>
+        <p:spPr>
+          <a:xfrm>
+            <a:off x="6648450" y="2419350"/>
+            <a:ext cx="4514850" cy="552450"/>
+          </a:xfrm>
+          <a:prstGeom prst="rect">
+            <a:avLst/>
+          </a:prstGeom>
+          <a:noFill/>
+          <a:ln w="0">
+            <a:noFill/>
+            <a:prstDash val="solid"/>
+          </a:ln>
+        </p:spPr>
+        <p:txBody>
+          <a:bodyPr/>
+          <a:lstStyle/>
+          <a:p>
+            <a:pPr>
+              <a:buNone/>
+              <a:defRPr sz="1350">
+                <a:solidFill>
+                  <a:srgbClr val="E2E8F0"/>
+                </a:solidFill>
+              </a:defRPr>
+            </a:pPr>
+            <a:r>
+              <a:rPr sz="1350">
+                <a:solidFill>
+                  <a:srgbClr val="E2E8F0"/>
+                </a:solidFill>
+              </a:rPr>
+              <a:t>docker run 後面補的指令會取代整個 CMD。</a:t>
+            </a:r>
+          </a:p>
+        </p:txBody>
+      </p:sp>
+      <p:sp>
+        <p:nvSpPr>
+          <p:cNvPr id="12" name="矩形: 圓角 11">
+            <a:extLst>
+              <a:ext uri="{FF2B5EF4-FFF2-40B4-BE49-F238E27FC236}">
+                <a16:creationId xmlns:a16="http://schemas.microsoft.com/office/drawing/2014/main" id="{1F18840B-74F1-407B-969A-0A1E49A8961D}"/>
+              </a:ext>
+            </a:extLst>
+          </p:cNvPr>
+          <p:cNvSpPr>
+            <a:spLocks noGrp="1"/>
+          </p:cNvSpPr>
+          <p:nvPr/>
+        </p:nvSpPr>
+        <p:spPr>
+          <a:xfrm>
+            <a:off x="6648450" y="3143250"/>
+            <a:ext cx="4514850" cy="1219200"/>
           </a:xfrm>
           <a:prstGeom prst="roundRect">
             <a:avLst>
-              <a:gd name="adj" fmla="val 14634"/>
+              <a:gd name="adj" fmla="val 9375"/>
             </a:avLst>
           </a:prstGeom>
           <a:solidFill>
-            <a:srgbClr val="0F172A"/>
+            <a:srgbClr val="0B1220"/>
           </a:solidFill>
           <a:ln w="9525">
             <a:solidFill>
-              <a:srgbClr val="475569"/>
+              <a:srgbClr val="1E293B"/>
             </a:solidFill>
             <a:prstDash val="solid"/>
           </a:ln>
@@ -18344,22 +18365,22 @@
       </p:sp>
       <p:sp>
         <p:nvSpPr>
-          <p:cNvPr id="14" name="矩形 13">
-            <a:extLst>
-              <a:ext uri="{FF2B5EF4-FFF2-40B4-BE49-F238E27FC236}">
-                <a16:creationId xmlns:a16="http://schemas.microsoft.com/office/drawing/2014/main" id="{EE9E3420-5F55-4A1D-8D12-C78A84C5DAE4}"/>
-              </a:ext>
-            </a:extLst>
-          </p:cNvPr>
-          <p:cNvSpPr>
-            <a:spLocks noGrp="1"/>
-          </p:cNvSpPr>
-          <p:nvPr/>
-        </p:nvSpPr>
-        <p:spPr>
-          <a:xfrm>
-            <a:off x="2324100" y="5219700"/>
-            <a:ext cx="7543800" cy="285750"/>
+          <p:cNvPr id="13" name="矩形 12">
+            <a:extLst>
+              <a:ext uri="{FF2B5EF4-FFF2-40B4-BE49-F238E27FC236}">
+                <a16:creationId xmlns:a16="http://schemas.microsoft.com/office/drawing/2014/main" id="{9424678F-5DB3-4528-9E56-B9763162097B}"/>
+              </a:ext>
+            </a:extLst>
+          </p:cNvPr>
+          <p:cNvSpPr>
+            <a:spLocks noGrp="1"/>
+          </p:cNvSpPr>
+          <p:nvPr/>
+        </p:nvSpPr>
+        <p:spPr>
+          <a:xfrm>
+            <a:off x="6858000" y="3314700"/>
+            <a:ext cx="4095750" cy="876300"/>
           </a:xfrm>
           <a:prstGeom prst="rect">
             <a:avLst/>
@@ -18376,20 +18397,117 @@
           <a:p>
             <a:pPr>
               <a:buNone/>
-              <a:defRPr sz="1650" b="1">
-                <a:solidFill>
-                  <a:srgbClr val="FFFFFF"/>
-                </a:solidFill>
-              </a:defRPr>
-            </a:pPr>
-            <a:r>
-              <a:rPr sz="1650" b="1">
-                <a:solidFill>
-                  <a:srgbClr val="FFFFFF"/>
-                </a:solidFill>
-              </a:rPr>
-              <a:t>一句話：ENTRYPOINT 決定容器像什麼工具，CMD 提供這個工具的預設參數。</a:t>
-            </a:r>
+              <a:defRPr sz="1275">
+                <a:solidFill>
+                  <a:srgbClr val="E5E7EB"/>
+                </a:solidFill>
+              </a:defRPr>
+            </a:pPr>
+            <a:r>
+              <a:rPr sz="1275">
+                <a:solidFill>
+                  <a:srgbClr val="E5E7EB"/>
+                </a:solidFill>
+              </a:rPr>
+              <a:t>CMD ["python", "app.py"]</a:t>
+            </a:r>
+          </a:p>
+          <a:p>
+            <a:endParaRPr sz="1275">
+              <a:solidFill>
+                <a:srgbClr val="E5E7EB"/>
+              </a:solidFill>
+            </a:endParaRPr>
+          </a:p>
+          <a:p>
+            <a:pPr>
+              <a:buNone/>
+              <a:defRPr sz="1275">
+                <a:solidFill>
+                  <a:srgbClr val="E5E7EB"/>
+                </a:solidFill>
+              </a:defRPr>
+            </a:pPr>
+            <a:r>
+              <a:rPr sz="1275">
+                <a:solidFill>
+                  <a:srgbClr val="E5E7EB"/>
+                </a:solidFill>
+              </a:rPr>
+              <a:t>$ docker run my-app bash</a:t>
+            </a:r>
+          </a:p>
+          <a:p>
+            <a:pPr>
+              <a:buNone/>
+              <a:defRPr sz="1275">
+                <a:solidFill>
+                  <a:srgbClr val="E5E7EB"/>
+                </a:solidFill>
+              </a:defRPr>
+            </a:pPr>
+            <a:r>
+              <a:rPr sz="1275">
+                <a:solidFill>
+                  <a:srgbClr val="E5E7EB"/>
+                </a:solidFill>
+              </a:rPr>
+              <a:t>=&gt; bash（服務不會啟動）</a:t>
+            </a:r>
+          </a:p>
+        </p:txBody>
+      </p:sp>
+      <p:sp>
+        <p:nvSpPr>
+          <p:cNvPr id="14" name="矩形: 圓角 13">
+            <a:extLst>
+              <a:ext uri="{FF2B5EF4-FFF2-40B4-BE49-F238E27FC236}">
+                <a16:creationId xmlns:a16="http://schemas.microsoft.com/office/drawing/2014/main" id="{F851357A-852D-473B-B5D3-02DDCB6E1267}"/>
+              </a:ext>
+            </a:extLst>
+          </p:cNvPr>
+          <p:cNvSpPr>
+            <a:spLocks noGrp="1"/>
+          </p:cNvSpPr>
+          <p:nvPr/>
+        </p:nvSpPr>
+        <p:spPr>
+          <a:xfrm>
+            <a:off x="2000250" y="5010150"/>
+            <a:ext cx="8191500" cy="704850"/>
+          </a:xfrm>
+          <a:prstGeom prst="roundRect">
+            <a:avLst>
+              <a:gd name="adj" fmla="val 16216"/>
+            </a:avLst>
+          </a:prstGeom>
+          <a:solidFill>
+            <a:srgbClr val="0F172A"/>
+          </a:solidFill>
+          <a:ln w="9525">
+            <a:solidFill>
+              <a:srgbClr val="475569"/>
+            </a:solidFill>
+            <a:prstDash val="solid"/>
+          </a:ln>
+        </p:spPr>
+        <p:style>
+          <a:lnRef idx="0">
+            <a:scrgbClr r="0" g="0" b="0"/>
+          </a:lnRef>
+          <a:fillRef idx="0">
+            <a:scrgbClr r="0" g="0" b="0"/>
+          </a:fillRef>
+          <a:effectRef idx="4">
+            <a:scrgbClr r="0" g="0" b="0"/>
+          </a:effectRef>
+          <a:fontRef idx="major"/>
+        </p:style>
+        <p:txBody>
+          <a:bodyPr/>
+          <a:lstStyle/>
+          <a:p>
+            <a:endParaRPr/>
           </a:p>
         </p:txBody>
       </p:sp>
@@ -18398,7 +18516,58 @@
           <p:cNvPr id="15" name="矩形 14">
             <a:extLst>
               <a:ext uri="{FF2B5EF4-FFF2-40B4-BE49-F238E27FC236}">
-                <a16:creationId xmlns:a16="http://schemas.microsoft.com/office/drawing/2014/main" id="{C471035E-DB62-4B03-A501-2DF6C0BF42FC}"/>
+                <a16:creationId xmlns:a16="http://schemas.microsoft.com/office/drawing/2014/main" id="{B60E5D2C-00A1-4DF3-B70A-85B9DAAB1C4D}"/>
+              </a:ext>
+            </a:extLst>
+          </p:cNvPr>
+          <p:cNvSpPr>
+            <a:spLocks noGrp="1"/>
+          </p:cNvSpPr>
+          <p:nvPr/>
+        </p:nvSpPr>
+        <p:spPr>
+          <a:xfrm>
+            <a:off x="2362200" y="5219700"/>
+            <a:ext cx="7467600" cy="323850"/>
+          </a:xfrm>
+          <a:prstGeom prst="rect">
+            <a:avLst/>
+          </a:prstGeom>
+          <a:noFill/>
+          <a:ln w="0">
+            <a:noFill/>
+            <a:prstDash val="solid"/>
+          </a:ln>
+        </p:spPr>
+        <p:txBody>
+          <a:bodyPr/>
+          <a:lstStyle/>
+          <a:p>
+            <a:pPr>
+              <a:buNone/>
+              <a:defRPr sz="1350">
+                <a:solidFill>
+                  <a:srgbClr val="E5E7EB"/>
+                </a:solidFill>
+              </a:defRPr>
+            </a:pPr>
+            <a:r>
+              <a:rPr sz="1350">
+                <a:solidFill>
+                  <a:srgbClr val="E5E7EB"/>
+                </a:solidFill>
+              </a:rPr>
+              <a:t>第二章回扣：docker run nginx sh 是只開 shell；docker exec -it nginx-life sh 是進入已在跑的 nginx，服務仍在。</a:t>
+            </a:r>
+          </a:p>
+        </p:txBody>
+      </p:sp>
+      <p:sp>
+        <p:nvSpPr>
+          <p:cNvPr id="16" name="矩形 15">
+            <a:extLst>
+              <a:ext uri="{FF2B5EF4-FFF2-40B4-BE49-F238E27FC236}">
+                <a16:creationId xmlns:a16="http://schemas.microsoft.com/office/drawing/2014/main" id="{803793AB-ECD2-4773-82CD-FB618C15AE56}"/>
               </a:ext>
             </a:extLst>
           </p:cNvPr>
@@ -18433,10 +18602,10 @@
       </p:sp>
       <p:sp>
         <p:nvSpPr>
-          <p:cNvPr id="16" name="矩形 15">
-            <a:extLst>
-              <a:ext uri="{FF2B5EF4-FFF2-40B4-BE49-F238E27FC236}">
-                <a16:creationId xmlns:a16="http://schemas.microsoft.com/office/drawing/2014/main" id="{D97AE55B-13E3-4E7D-B991-CFE036F4C787}"/>
+          <p:cNvPr id="17" name="矩形 16">
+            <a:extLst>
+              <a:ext uri="{FF2B5EF4-FFF2-40B4-BE49-F238E27FC236}">
+                <a16:creationId xmlns:a16="http://schemas.microsoft.com/office/drawing/2014/main" id="{F4C37016-0280-4EFC-A098-EC30CEA5138A}"/>
               </a:ext>
             </a:extLst>
           </p:cNvPr>
@@ -18484,10 +18653,10 @@
       </p:sp>
       <p:sp>
         <p:nvSpPr>
-          <p:cNvPr id="17" name="矩形 16">
-            <a:extLst>
-              <a:ext uri="{FF2B5EF4-FFF2-40B4-BE49-F238E27FC236}">
-                <a16:creationId xmlns:a16="http://schemas.microsoft.com/office/drawing/2014/main" id="{0FAF5892-94CB-4824-94E3-3D7B8D47CB1D}"/>
+          <p:cNvPr id="18" name="矩形 17">
+            <a:extLst>
+              <a:ext uri="{FF2B5EF4-FFF2-40B4-BE49-F238E27FC236}">
+                <a16:creationId xmlns:a16="http://schemas.microsoft.com/office/drawing/2014/main" id="{3BA89AC2-B8C3-4C58-87F1-78D58BBE6137}"/>
               </a:ext>
             </a:extLst>
           </p:cNvPr>
@@ -18528,7 +18697,7 @@
                   <a:srgbClr val="CBD5E1"/>
                 </a:solidFill>
               </a:rPr>
-              <a:t>CMD / ENTRYPOINT 2</a:t>
+              <a:t>CMD 覆蓋小觀念</a:t>
             </a:r>
           </a:p>
         </p:txBody>
@@ -18536,7 +18705,7 @@
     </p:spTree>
     <p:extLst>
       <p:ext uri="{BB962C8B-B14F-4D97-AF65-F5344CB8AC3E}">
-        <p14:creationId xmlns:p14="http://schemas.microsoft.com/office/powerpoint/2010/main" val="1877316584"/>
+        <p14:creationId xmlns:p14="http://schemas.microsoft.com/office/powerpoint/2010/main" val="1001492653"/>
       </p:ext>
     </p:extLst>
   </p:cSld>
@@ -18549,14 +18718,6 @@
 <file path=ppt/slides/slide24.xml><?xml version="1.0" encoding="utf-8"?>
 <p:sld xmlns:a="http://schemas.openxmlformats.org/drawingml/2006/main" xmlns:r="http://schemas.openxmlformats.org/officeDocument/2006/relationships" xmlns:p="http://schemas.openxmlformats.org/presentationml/2006/main">
   <p:cSld>
-    <p:bg>
-      <p:bgPr>
-        <a:solidFill>
-          <a:srgbClr val="F6F8FB"/>
-        </a:solidFill>
-        <a:effectLst/>
-      </p:bgPr>
-    </p:bg>
     <p:spTree>
       <p:nvGrpSpPr>
         <p:cNvPr id="1" name=""/>
@@ -18573,10 +18734,48 @@
       </p:grpSpPr>
       <p:sp>
         <p:nvSpPr>
+          <p:cNvPr id="18" name="矩形 17">
+            <a:extLst>
+              <a:ext uri="{FF2B5EF4-FFF2-40B4-BE49-F238E27FC236}">
+                <a16:creationId xmlns:a16="http://schemas.microsoft.com/office/drawing/2014/main" id="{418A3494-4B9D-4BED-BAA7-9CC087350506}"/>
+              </a:ext>
+            </a:extLst>
+          </p:cNvPr>
+          <p:cNvSpPr>
+            <a:spLocks noGrp="1"/>
+          </p:cNvSpPr>
+          <p:nvPr/>
+        </p:nvSpPr>
+        <p:spPr>
+          <a:xfrm>
+            <a:off x="0" y="0"/>
+            <a:ext cx="12192000" cy="6858000"/>
+          </a:xfrm>
+          <a:prstGeom prst="rect">
+            <a:avLst/>
+          </a:prstGeom>
+          <a:solidFill>
+            <a:srgbClr val="0B1220"/>
+          </a:solidFill>
+          <a:ln w="0">
+            <a:noFill/>
+            <a:prstDash val="solid"/>
+          </a:ln>
+        </p:spPr>
+        <p:txBody>
+          <a:bodyPr/>
+          <a:lstStyle/>
+          <a:p>
+            <a:endParaRPr dirty="0"/>
+          </a:p>
+        </p:txBody>
+      </p:sp>
+      <p:sp>
+        <p:nvSpPr>
           <p:cNvPr id="2" name="矩形 1">
             <a:extLst>
               <a:ext uri="{FF2B5EF4-FFF2-40B4-BE49-F238E27FC236}">
-                <a16:creationId xmlns:a16="http://schemas.microsoft.com/office/drawing/2014/main" id="{843093B7-3227-41B5-AFBC-201D13ACDAC6}"/>
+                <a16:creationId xmlns:a16="http://schemas.microsoft.com/office/drawing/2014/main" id="{920DCE9B-AB07-43D4-9AB4-67DB818AD107}"/>
               </a:ext>
             </a:extLst>
           </p:cNvPr>
@@ -18588,7 +18787,7 @@
         <p:spPr>
           <a:xfrm>
             <a:off x="609600" y="400050"/>
-            <a:ext cx="6191250" cy="228600"/>
+            <a:ext cx="5905500" cy="285750"/>
           </a:xfrm>
           <a:prstGeom prst="rect">
             <a:avLst/>
@@ -18600,35 +18799,24 @@
           </a:ln>
         </p:spPr>
         <p:txBody>
-          <a:bodyPr lIns="0" tIns="0" rIns="0" bIns="0" anchor="t">
-            <a:normAutofit/>
-          </a:bodyPr>
-          <a:lstStyle/>
-          <a:p>
-            <a:pPr algn="l">
-              <a:lnSpc>
-                <a:spcPct val="106000"/>
-              </a:lnSpc>
+          <a:bodyPr/>
+          <a:lstStyle/>
+          <a:p>
+            <a:pPr>
               <a:buNone/>
               <a:defRPr sz="900" b="1">
                 <a:solidFill>
-                  <a:srgbClr val="0B5CAD"/>
-                </a:solidFill>
-                <a:latin typeface="Aptos"/>
-                <a:ea typeface="Aptos"/>
-                <a:cs typeface="Aptos"/>
+                  <a:srgbClr val="A5B4FC"/>
+                </a:solidFill>
               </a:defRPr>
             </a:pPr>
             <a:r>
               <a:rPr sz="900" b="1">
                 <a:solidFill>
-                  <a:srgbClr val="0B5CAD"/>
-                </a:solidFill>
-                <a:latin typeface="Aptos"/>
-                <a:ea typeface="Aptos"/>
-                <a:cs typeface="Aptos"/>
-              </a:rPr>
-              <a:t>DEVELOPMENT WORKFLOW</a:t>
+                  <a:srgbClr val="A5B4FC"/>
+                </a:solidFill>
+              </a:rPr>
+              <a:t>BEST PRACTICE</a:t>
             </a:r>
           </a:p>
         </p:txBody>
@@ -18638,19 +18826,19 @@
           <p:cNvPr id="3" name="矩形 2">
             <a:extLst>
               <a:ext uri="{FF2B5EF4-FFF2-40B4-BE49-F238E27FC236}">
-                <a16:creationId xmlns:a16="http://schemas.microsoft.com/office/drawing/2014/main" id="{AE9AFDD6-4A76-4FDD-B10B-5E2C4EEC064E}"/>
-              </a:ext>
-            </a:extLst>
-          </p:cNvPr>
-          <p:cNvSpPr>
-            <a:spLocks noGrp="1"/>
-          </p:cNvSpPr>
-          <p:nvPr/>
-        </p:nvSpPr>
-        <p:spPr>
-          <a:xfrm>
-            <a:off x="609600" y="742950"/>
-            <a:ext cx="9906000" cy="571500"/>
+                <a16:creationId xmlns:a16="http://schemas.microsoft.com/office/drawing/2014/main" id="{2E470020-12EF-4C85-A0CD-4ADF38CC6BF7}"/>
+              </a:ext>
+            </a:extLst>
+          </p:cNvPr>
+          <p:cNvSpPr>
+            <a:spLocks noGrp="1"/>
+          </p:cNvSpPr>
+          <p:nvPr/>
+        </p:nvSpPr>
+        <p:spPr>
+          <a:xfrm>
+            <a:off x="609600" y="781050"/>
+            <a:ext cx="10668000" cy="666750"/>
           </a:xfrm>
           <a:prstGeom prst="rect">
             <a:avLst/>
@@ -18662,509 +18850,686 @@
           </a:ln>
         </p:spPr>
         <p:txBody>
-          <a:bodyPr lIns="0" tIns="0" rIns="0" bIns="0" anchor="t">
-            <a:normAutofit/>
-          </a:bodyPr>
-          <a:lstStyle/>
-          <a:p>
-            <a:pPr algn="l">
-              <a:lnSpc>
-                <a:spcPct val="106000"/>
-              </a:lnSpc>
-              <a:buNone/>
-              <a:defRPr sz="2800" b="1">
-                <a:solidFill>
-                  <a:srgbClr val="0B1220"/>
-                </a:solidFill>
-                <a:latin typeface="Aptos Display"/>
-                <a:ea typeface="Aptos Display"/>
-                <a:cs typeface="Aptos Display"/>
-              </a:defRPr>
-            </a:pPr>
-            <a:r>
-              <a:rPr sz="2800" b="1">
-                <a:solidFill>
-                  <a:srgbClr val="0B1220"/>
-                </a:solidFill>
-                <a:latin typeface="Aptos Display"/>
-                <a:ea typeface="Aptos Display"/>
-                <a:cs typeface="Aptos Display"/>
-              </a:rPr>
-              <a:t>開發環境管理：常見有兩條路</a:t>
-            </a:r>
-          </a:p>
-        </p:txBody>
-      </p:sp>
-      <p:sp>
-        <p:nvSpPr>
-          <p:cNvPr id="4" name="矩形: 圓角 3">
-            <a:extLst>
-              <a:ext uri="{FF2B5EF4-FFF2-40B4-BE49-F238E27FC236}">
-                <a16:creationId xmlns:a16="http://schemas.microsoft.com/office/drawing/2014/main" id="{FB3B2462-E948-4379-A9DE-3D0833F385AC}"/>
-              </a:ext>
-            </a:extLst>
-          </p:cNvPr>
-          <p:cNvSpPr>
-            <a:spLocks noGrp="1"/>
-          </p:cNvSpPr>
-          <p:nvPr/>
-        </p:nvSpPr>
-        <p:spPr>
-          <a:xfrm>
-            <a:off x="609600" y="1495425"/>
-            <a:ext cx="4953000" cy="3152775"/>
+          <a:bodyPr/>
+          <a:lstStyle/>
+          <a:p>
+            <a:pPr>
+              <a:buNone/>
+              <a:defRPr sz="2850" b="1">
+                <a:solidFill>
+                  <a:srgbClr val="FFFFFF"/>
+                </a:solidFill>
+              </a:defRPr>
+            </a:pPr>
+            <a:r>
+              <a:rPr sz="2850" b="1">
+                <a:solidFill>
+                  <a:srgbClr val="FFFFFF"/>
+                </a:solidFill>
+              </a:rPr>
+              <a:t>實戰組合：ENTRYPOINT 放工具，CMD 放預設參數</a:t>
+            </a:r>
+          </a:p>
+        </p:txBody>
+      </p:sp>
+      <p:sp>
+        <p:nvSpPr>
+          <p:cNvPr id="4" name="矩形 3">
+            <a:extLst>
+              <a:ext uri="{FF2B5EF4-FFF2-40B4-BE49-F238E27FC236}">
+                <a16:creationId xmlns:a16="http://schemas.microsoft.com/office/drawing/2014/main" id="{6A427EE0-4D2F-47AD-94BB-4A827634A4BF}"/>
+              </a:ext>
+            </a:extLst>
+          </p:cNvPr>
+          <p:cNvSpPr>
+            <a:spLocks noGrp="1"/>
+          </p:cNvSpPr>
+          <p:nvPr/>
+        </p:nvSpPr>
+        <p:spPr>
+          <a:xfrm>
+            <a:off x="857250" y="1524000"/>
+            <a:ext cx="10477500" cy="381000"/>
+          </a:xfrm>
+          <a:prstGeom prst="rect">
+            <a:avLst/>
+          </a:prstGeom>
+          <a:noFill/>
+          <a:ln w="0">
+            <a:noFill/>
+            <a:prstDash val="solid"/>
+          </a:ln>
+        </p:spPr>
+        <p:txBody>
+          <a:bodyPr/>
+          <a:lstStyle/>
+          <a:p>
+            <a:pPr>
+              <a:buNone/>
+              <a:defRPr sz="1500">
+                <a:solidFill>
+                  <a:srgbClr val="E2E8F0"/>
+                </a:solidFill>
+              </a:defRPr>
+            </a:pPr>
+            <a:r>
+              <a:rPr sz="1500">
+                <a:solidFill>
+                  <a:srgbClr val="E2E8F0"/>
+                </a:solidFill>
+              </a:rPr>
+              <a:t>把固定不變的主程式放在 ENTRYPOINT，把可以被使用者替換的預設目標放在 CMD。</a:t>
+            </a:r>
+          </a:p>
+        </p:txBody>
+      </p:sp>
+      <p:sp>
+        <p:nvSpPr>
+          <p:cNvPr id="5" name="矩形: 圓角 4">
+            <a:extLst>
+              <a:ext uri="{FF2B5EF4-FFF2-40B4-BE49-F238E27FC236}">
+                <a16:creationId xmlns:a16="http://schemas.microsoft.com/office/drawing/2014/main" id="{12552BAF-1E7B-4805-BB0B-CA6A36C4AD47}"/>
+              </a:ext>
+            </a:extLst>
+          </p:cNvPr>
+          <p:cNvSpPr>
+            <a:spLocks noGrp="1"/>
+          </p:cNvSpPr>
+          <p:nvPr/>
+        </p:nvSpPr>
+        <p:spPr>
+          <a:xfrm>
+            <a:off x="857250" y="2209800"/>
+            <a:ext cx="4762500" cy="2000250"/>
           </a:xfrm>
           <a:prstGeom prst="roundRect">
             <a:avLst>
-              <a:gd name="adj" fmla="val 8000"/>
+              <a:gd name="adj" fmla="val 5714"/>
             </a:avLst>
           </a:prstGeom>
           <a:solidFill>
-            <a:srgbClr val="E8F3FF"/>
+            <a:srgbClr val="0B1220"/>
           </a:solidFill>
           <a:ln w="9525">
             <a:solidFill>
-              <a:srgbClr val="B7DCFF"/>
+              <a:srgbClr val="1E293B"/>
             </a:solidFill>
             <a:prstDash val="solid"/>
           </a:ln>
         </p:spPr>
-        <p:txBody>
-          <a:bodyPr lIns="228600" tIns="228600" rIns="228600" bIns="228600" anchor="t">
-            <a:normAutofit/>
-          </a:bodyPr>
-          <a:lstStyle/>
-          <a:p>
-            <a:pPr algn="ctr">
-              <a:lnSpc>
-                <a:spcPct val="106000"/>
-              </a:lnSpc>
-              <a:buNone/>
-              <a:defRPr sz="2100" b="1">
-                <a:solidFill>
-                  <a:srgbClr val="0B5CAD"/>
-                </a:solidFill>
-                <a:latin typeface="Aptos Display"/>
-                <a:ea typeface="Aptos Display"/>
-                <a:cs typeface="Aptos Display"/>
-              </a:defRPr>
-            </a:pPr>
-            <a:r>
-              <a:rPr sz="2100" b="1">
-                <a:solidFill>
-                  <a:srgbClr val="0B5CAD"/>
-                </a:solidFill>
-                <a:latin typeface="Aptos Display"/>
-                <a:ea typeface="Aptos Display"/>
-                <a:cs typeface="Aptos Display"/>
-              </a:rPr>
-              <a:t>Docker 派</a:t>
-            </a:r>
-          </a:p>
-          <a:p>
-            <a:pPr algn="ctr">
-              <a:lnSpc>
-                <a:spcPct val="106000"/>
-              </a:lnSpc>
-              <a:buNone/>
-              <a:defRPr sz="1500" b="1">
-                <a:solidFill>
-                  <a:srgbClr val="0B1220"/>
-                </a:solidFill>
-                <a:latin typeface="Aptos"/>
-                <a:ea typeface="Aptos"/>
-                <a:cs typeface="Aptos"/>
-              </a:defRPr>
-            </a:pPr>
-            <a:r>
-              <a:rPr sz="1500" b="1">
-                <a:solidFill>
-                  <a:srgbClr val="0B1220"/>
-                </a:solidFill>
-                <a:latin typeface="Aptos"/>
-                <a:ea typeface="Aptos"/>
-                <a:cs typeface="Aptos"/>
-              </a:rPr>
-              <a:t>VS Code Dev Containers</a:t>
-            </a:r>
-          </a:p>
+        <p:style>
+          <a:lnRef idx="0">
+            <a:scrgbClr r="0" g="0" b="0"/>
+          </a:lnRef>
+          <a:fillRef idx="0">
+            <a:scrgbClr r="0" g="0" b="0"/>
+          </a:fillRef>
+          <a:effectRef idx="4">
+            <a:scrgbClr r="0" g="0" b="0"/>
+          </a:effectRef>
+          <a:fontRef idx="major"/>
+        </p:style>
+        <p:txBody>
+          <a:bodyPr/>
+          <a:lstStyle/>
+          <a:p>
+            <a:endParaRPr/>
+          </a:p>
+        </p:txBody>
+      </p:sp>
+      <p:sp>
+        <p:nvSpPr>
+          <p:cNvPr id="6" name="矩形 5">
+            <a:extLst>
+              <a:ext uri="{FF2B5EF4-FFF2-40B4-BE49-F238E27FC236}">
+                <a16:creationId xmlns:a16="http://schemas.microsoft.com/office/drawing/2014/main" id="{82354283-B5F9-4D4A-9855-3BE475F3E0F3}"/>
+              </a:ext>
+            </a:extLst>
+          </p:cNvPr>
+          <p:cNvSpPr>
+            <a:spLocks noGrp="1"/>
+          </p:cNvSpPr>
+          <p:nvPr/>
+        </p:nvSpPr>
+        <p:spPr>
+          <a:xfrm>
+            <a:off x="1066800" y="2381250"/>
+            <a:ext cx="4343400" cy="1657350"/>
+          </a:xfrm>
+          <a:prstGeom prst="rect">
+            <a:avLst/>
+          </a:prstGeom>
+          <a:noFill/>
+          <a:ln w="0">
+            <a:noFill/>
+            <a:prstDash val="solid"/>
+          </a:ln>
+        </p:spPr>
+        <p:txBody>
+          <a:bodyPr/>
+          <a:lstStyle/>
           <a:p>
             <a:pPr>
               <a:buNone/>
-              <a:defRPr sz="600"/>
-            </a:pPr>
-            <a:endParaRPr sz="1500" b="1">
+              <a:defRPr sz="1275">
+                <a:solidFill>
+                  <a:srgbClr val="E5E7EB"/>
+                </a:solidFill>
+              </a:defRPr>
+            </a:pPr>
+            <a:r>
+              <a:rPr sz="1275">
+                <a:solidFill>
+                  <a:srgbClr val="E5E7EB"/>
+                </a:solidFill>
+              </a:rPr>
+              <a:t># 一定會執行的主程式</a:t>
+            </a:r>
+          </a:p>
+          <a:p>
+            <a:pPr>
+              <a:buNone/>
+              <a:defRPr sz="1275">
+                <a:solidFill>
+                  <a:srgbClr val="E5E7EB"/>
+                </a:solidFill>
+              </a:defRPr>
+            </a:pPr>
+            <a:r>
+              <a:rPr sz="1275">
+                <a:solidFill>
+                  <a:srgbClr val="E5E7EB"/>
+                </a:solidFill>
+              </a:rPr>
+              <a:t>ENTRYPOINT ["ping"]</a:t>
+            </a:r>
+          </a:p>
+          <a:p>
+            <a:endParaRPr sz="1275">
               <a:solidFill>
-                <a:srgbClr val="0B1220"/>
+                <a:srgbClr val="E5E7EB"/>
               </a:solidFill>
-              <a:latin typeface="Aptos"/>
-              <a:ea typeface="Aptos"/>
-              <a:cs typeface="Aptos"/>
             </a:endParaRPr>
           </a:p>
           <a:p>
-            <a:pPr algn="l">
-              <a:lnSpc>
-                <a:spcPct val="106000"/>
-              </a:lnSpc>
-              <a:buNone/>
-              <a:defRPr sz="1250" b="0">
-                <a:solidFill>
-                  <a:srgbClr val="334155"/>
-                </a:solidFill>
-                <a:latin typeface="Aptos"/>
-                <a:ea typeface="Aptos"/>
-                <a:cs typeface="Aptos"/>
-              </a:defRPr>
-            </a:pPr>
-            <a:r>
-              <a:rPr sz="1250" b="0">
-                <a:solidFill>
-                  <a:srgbClr val="334155"/>
-                </a:solidFill>
-                <a:latin typeface="Aptos"/>
-                <a:ea typeface="Aptos"/>
-                <a:cs typeface="Aptos"/>
-              </a:rPr>
-              <a:t>把「開發用的作業系統、工具、套件」都放進容器。</a:t>
-            </a:r>
-          </a:p>
-          <a:p>
-            <a:pPr algn="l">
-              <a:lnSpc>
-                <a:spcPct val="106000"/>
-              </a:lnSpc>
-              <a:buNone/>
-              <a:defRPr sz="1250" b="0">
-                <a:solidFill>
-                  <a:srgbClr val="334155"/>
-                </a:solidFill>
-                <a:latin typeface="Aptos"/>
-                <a:ea typeface="Aptos"/>
-                <a:cs typeface="Aptos"/>
-              </a:defRPr>
-            </a:pPr>
-            <a:r>
-              <a:rPr sz="1250" b="0">
-                <a:solidFill>
-                  <a:srgbClr val="334155"/>
-                </a:solidFill>
-                <a:latin typeface="Aptos"/>
-                <a:ea typeface="Aptos"/>
-                <a:cs typeface="Aptos"/>
-              </a:rPr>
-              <a:t>適合團隊電腦不同、需要系統套件、想讓 VS Code 也進容器。</a:t>
-            </a:r>
-          </a:p>
-          <a:p>
-            <a:pPr algn="l">
-              <a:lnSpc>
-                <a:spcPct val="106000"/>
-              </a:lnSpc>
-              <a:buNone/>
-              <a:defRPr sz="1250" b="1">
-                <a:solidFill>
-                  <a:srgbClr val="0B5CAD"/>
-                </a:solidFill>
-                <a:latin typeface="Aptos"/>
-                <a:ea typeface="Aptos"/>
-                <a:cs typeface="Aptos"/>
-              </a:defRPr>
-            </a:pPr>
-            <a:r>
-              <a:rPr sz="1250" b="1">
-                <a:solidFill>
-                  <a:srgbClr val="0B5CAD"/>
-                </a:solidFill>
-                <a:latin typeface="Aptos"/>
-                <a:ea typeface="Aptos"/>
-                <a:cs typeface="Aptos"/>
-              </a:rPr>
-              <a:t>外掛名稱：Dev Containers（Microsoft）</a:t>
-            </a:r>
-          </a:p>
-        </p:txBody>
-      </p:sp>
-      <p:sp>
-        <p:nvSpPr>
-          <p:cNvPr id="5" name="矩形: 圓角 4">
-            <a:extLst>
-              <a:ext uri="{FF2B5EF4-FFF2-40B4-BE49-F238E27FC236}">
-                <a16:creationId xmlns:a16="http://schemas.microsoft.com/office/drawing/2014/main" id="{67209F59-79E5-46ED-B710-7027BE031DCA}"/>
-              </a:ext>
-            </a:extLst>
-          </p:cNvPr>
-          <p:cNvSpPr>
-            <a:spLocks noGrp="1"/>
-          </p:cNvSpPr>
-          <p:nvPr/>
-        </p:nvSpPr>
-        <p:spPr>
-          <a:xfrm>
-            <a:off x="5791200" y="1495425"/>
-            <a:ext cx="4953000" cy="3152775"/>
+            <a:pPr>
+              <a:buNone/>
+              <a:defRPr sz="1275">
+                <a:solidFill>
+                  <a:srgbClr val="E5E7EB"/>
+                </a:solidFill>
+              </a:defRPr>
+            </a:pPr>
+            <a:r>
+              <a:rPr sz="1275">
+                <a:solidFill>
+                  <a:srgbClr val="E5E7EB"/>
+                </a:solidFill>
+              </a:rPr>
+              <a:t># 預設參數，可以被 docker run 後面的內容取代</a:t>
+            </a:r>
+          </a:p>
+          <a:p>
+            <a:pPr>
+              <a:buNone/>
+              <a:defRPr sz="1275">
+                <a:solidFill>
+                  <a:srgbClr val="E5E7EB"/>
+                </a:solidFill>
+              </a:defRPr>
+            </a:pPr>
+            <a:r>
+              <a:rPr sz="1275">
+                <a:solidFill>
+                  <a:srgbClr val="E5E7EB"/>
+                </a:solidFill>
+              </a:rPr>
+              <a:t>CMD ["google.com"]</a:t>
+            </a:r>
+          </a:p>
+        </p:txBody>
+      </p:sp>
+      <p:sp>
+        <p:nvSpPr>
+          <p:cNvPr id="7" name="矩形: 圓角 6">
+            <a:extLst>
+              <a:ext uri="{FF2B5EF4-FFF2-40B4-BE49-F238E27FC236}">
+                <a16:creationId xmlns:a16="http://schemas.microsoft.com/office/drawing/2014/main" id="{58A91E4C-4114-4E8B-AC40-0B23BA38E6EA}"/>
+              </a:ext>
+            </a:extLst>
+          </p:cNvPr>
+          <p:cNvSpPr>
+            <a:spLocks noGrp="1"/>
+          </p:cNvSpPr>
+          <p:nvPr/>
+        </p:nvSpPr>
+        <p:spPr>
+          <a:xfrm>
+            <a:off x="6286500" y="2133600"/>
+            <a:ext cx="4286250" cy="819150"/>
           </a:xfrm>
           <a:prstGeom prst="roundRect">
             <a:avLst>
-              <a:gd name="adj" fmla="val 8000"/>
+              <a:gd name="adj" fmla="val 13953"/>
             </a:avLst>
           </a:prstGeom>
           <a:solidFill>
-            <a:srgbClr val="EAF7EF"/>
+            <a:srgbClr val="111827"/>
           </a:solidFill>
           <a:ln w="9525">
             <a:solidFill>
-              <a:srgbClr val="B7E4C7"/>
+              <a:srgbClr val="60A5FA"/>
             </a:solidFill>
             <a:prstDash val="solid"/>
           </a:ln>
         </p:spPr>
-        <p:txBody>
-          <a:bodyPr lIns="228600" tIns="228600" rIns="228600" bIns="228600" anchor="t">
-            <a:normAutofit/>
-          </a:bodyPr>
-          <a:lstStyle/>
-          <a:p>
-            <a:pPr algn="ctr">
-              <a:lnSpc>
-                <a:spcPct val="106000"/>
-              </a:lnSpc>
-              <a:buNone/>
-              <a:defRPr sz="2100" b="1">
-                <a:solidFill>
-                  <a:srgbClr val="087F5B"/>
-                </a:solidFill>
-                <a:latin typeface="Aptos Display"/>
-                <a:ea typeface="Aptos Display"/>
-                <a:cs typeface="Aptos Display"/>
-              </a:defRPr>
-            </a:pPr>
-            <a:r>
-              <a:rPr sz="2100" b="1">
-                <a:solidFill>
-                  <a:srgbClr val="087F5B"/>
-                </a:solidFill>
-                <a:latin typeface="Aptos Display"/>
-                <a:ea typeface="Aptos Display"/>
-                <a:cs typeface="Aptos Display"/>
-              </a:rPr>
-              <a:t>語言工具派</a:t>
-            </a:r>
-          </a:p>
-          <a:p>
-            <a:pPr algn="ctr">
-              <a:lnSpc>
-                <a:spcPct val="106000"/>
-              </a:lnSpc>
+        <p:style>
+          <a:lnRef idx="0">
+            <a:scrgbClr r="0" g="0" b="0"/>
+          </a:lnRef>
+          <a:fillRef idx="0">
+            <a:scrgbClr r="0" g="0" b="0"/>
+          </a:fillRef>
+          <a:effectRef idx="4">
+            <a:scrgbClr r="0" g="0" b="0"/>
+          </a:effectRef>
+          <a:fontRef idx="major"/>
+        </p:style>
+        <p:txBody>
+          <a:bodyPr/>
+          <a:lstStyle/>
+          <a:p>
+            <a:endParaRPr/>
+          </a:p>
+        </p:txBody>
+      </p:sp>
+      <p:sp>
+        <p:nvSpPr>
+          <p:cNvPr id="8" name="矩形 7">
+            <a:extLst>
+              <a:ext uri="{FF2B5EF4-FFF2-40B4-BE49-F238E27FC236}">
+                <a16:creationId xmlns:a16="http://schemas.microsoft.com/office/drawing/2014/main" id="{C599016E-7451-420C-9B6E-8316E1C7C41F}"/>
+              </a:ext>
+            </a:extLst>
+          </p:cNvPr>
+          <p:cNvSpPr>
+            <a:spLocks noGrp="1"/>
+          </p:cNvSpPr>
+          <p:nvPr/>
+        </p:nvSpPr>
+        <p:spPr>
+          <a:xfrm>
+            <a:off x="6610350" y="2324100"/>
+            <a:ext cx="3714750" cy="266700"/>
+          </a:xfrm>
+          <a:prstGeom prst="rect">
+            <a:avLst/>
+          </a:prstGeom>
+          <a:noFill/>
+          <a:ln w="0">
+            <a:noFill/>
+            <a:prstDash val="solid"/>
+          </a:ln>
+        </p:spPr>
+        <p:txBody>
+          <a:bodyPr/>
+          <a:lstStyle/>
+          <a:p>
+            <a:pPr>
+              <a:buNone/>
+              <a:defRPr sz="1500">
+                <a:solidFill>
+                  <a:srgbClr val="E5E7EB"/>
+                </a:solidFill>
+              </a:defRPr>
+            </a:pPr>
+            <a:r>
+              <a:rPr sz="1500">
+                <a:solidFill>
+                  <a:srgbClr val="E5E7EB"/>
+                </a:solidFill>
+              </a:rPr>
+              <a:t>$ docker run my-ping</a:t>
+            </a:r>
+          </a:p>
+        </p:txBody>
+      </p:sp>
+      <p:sp>
+        <p:nvSpPr>
+          <p:cNvPr id="9" name="矩形 8">
+            <a:extLst>
+              <a:ext uri="{FF2B5EF4-FFF2-40B4-BE49-F238E27FC236}">
+                <a16:creationId xmlns:a16="http://schemas.microsoft.com/office/drawing/2014/main" id="{9A1EE215-5779-404A-BA0C-A421D5112FB1}"/>
+              </a:ext>
+            </a:extLst>
+          </p:cNvPr>
+          <p:cNvSpPr>
+            <a:spLocks noGrp="1"/>
+          </p:cNvSpPr>
+          <p:nvPr/>
+        </p:nvSpPr>
+        <p:spPr>
+          <a:xfrm>
+            <a:off x="6610350" y="2647950"/>
+            <a:ext cx="3714750" cy="266700"/>
+          </a:xfrm>
+          <a:prstGeom prst="rect">
+            <a:avLst/>
+          </a:prstGeom>
+          <a:noFill/>
+          <a:ln w="0">
+            <a:noFill/>
+            <a:prstDash val="solid"/>
+          </a:ln>
+        </p:spPr>
+        <p:txBody>
+          <a:bodyPr/>
+          <a:lstStyle/>
+          <a:p>
+            <a:pPr>
               <a:buNone/>
               <a:defRPr sz="1500" b="1">
                 <a:solidFill>
-                  <a:srgbClr val="0B1220"/>
-                </a:solidFill>
-                <a:latin typeface="Aptos"/>
-                <a:ea typeface="Aptos"/>
-                <a:cs typeface="Aptos"/>
+                  <a:srgbClr val="93C5FD"/>
+                </a:solidFill>
               </a:defRPr>
             </a:pPr>
             <a:r>
               <a:rPr sz="1500" b="1">
                 <a:solidFill>
-                  <a:srgbClr val="0B1220"/>
-                </a:solidFill>
-                <a:latin typeface="Aptos"/>
-                <a:ea typeface="Aptos"/>
-                <a:cs typeface="Aptos"/>
-              </a:rPr>
-              <a:t>uv / Poetry / pip-tools</a:t>
-            </a:r>
-          </a:p>
-          <a:p>
-            <a:pPr>
-              <a:buNone/>
-              <a:defRPr sz="600"/>
-            </a:pPr>
-            <a:endParaRPr sz="1500" b="1">
-              <a:solidFill>
-                <a:srgbClr val="0B1220"/>
-              </a:solidFill>
-              <a:latin typeface="Aptos"/>
-              <a:ea typeface="Aptos"/>
-              <a:cs typeface="Aptos"/>
-            </a:endParaRPr>
-          </a:p>
-          <a:p>
-            <a:pPr algn="l">
-              <a:lnSpc>
-                <a:spcPct val="106000"/>
-              </a:lnSpc>
-              <a:buNone/>
-              <a:defRPr sz="1250" b="0">
-                <a:solidFill>
-                  <a:srgbClr val="334155"/>
-                </a:solidFill>
-                <a:latin typeface="Aptos"/>
-                <a:ea typeface="Aptos"/>
-                <a:cs typeface="Aptos"/>
-              </a:defRPr>
-            </a:pPr>
-            <a:r>
-              <a:rPr sz="1250" b="0">
-                <a:solidFill>
-                  <a:srgbClr val="334155"/>
-                </a:solidFill>
-                <a:latin typeface="Aptos"/>
-                <a:ea typeface="Aptos"/>
-                <a:cs typeface="Aptos"/>
-              </a:rPr>
-              <a:t>把「Python 版本、虛擬環境、套件版本」管理清楚。</a:t>
-            </a:r>
-          </a:p>
-          <a:p>
-            <a:pPr algn="l">
-              <a:lnSpc>
-                <a:spcPct val="106000"/>
-              </a:lnSpc>
-              <a:buNone/>
-              <a:defRPr sz="1250" b="0">
-                <a:solidFill>
-                  <a:srgbClr val="334155"/>
-                </a:solidFill>
-                <a:latin typeface="Aptos"/>
-                <a:ea typeface="Aptos"/>
-                <a:cs typeface="Aptos"/>
-              </a:defRPr>
-            </a:pPr>
-            <a:r>
-              <a:rPr sz="1250" b="0">
-                <a:solidFill>
-                  <a:srgbClr val="334155"/>
-                </a:solidFill>
-                <a:latin typeface="Aptos"/>
-                <a:ea typeface="Aptos"/>
-                <a:cs typeface="Aptos"/>
-              </a:rPr>
-              <a:t>Django / Flask 純 Python 專案很常用，啟動快、學習成本低。</a:t>
-            </a:r>
-          </a:p>
-          <a:p>
-            <a:pPr algn="l">
-              <a:lnSpc>
-                <a:spcPct val="106000"/>
-              </a:lnSpc>
-              <a:buNone/>
-              <a:defRPr sz="1250" b="1">
-                <a:solidFill>
-                  <a:srgbClr val="087F5B"/>
-                </a:solidFill>
-                <a:latin typeface="Aptos"/>
-                <a:ea typeface="Aptos"/>
-                <a:cs typeface="Aptos"/>
-              </a:defRPr>
-            </a:pPr>
-            <a:r>
-              <a:rPr sz="1250" b="1">
-                <a:solidFill>
-                  <a:srgbClr val="087F5B"/>
-                </a:solidFill>
-                <a:latin typeface="Aptos"/>
-                <a:ea typeface="Aptos"/>
-                <a:cs typeface="Aptos"/>
-              </a:rPr>
-              <a:t>重點：lock file 讓每個人裝到同一批套件。</a:t>
-            </a:r>
-          </a:p>
-        </p:txBody>
-      </p:sp>
-      <p:sp>
-        <p:nvSpPr>
-          <p:cNvPr id="6" name="矩形: 圓角 5">
-            <a:extLst>
-              <a:ext uri="{FF2B5EF4-FFF2-40B4-BE49-F238E27FC236}">
-                <a16:creationId xmlns:a16="http://schemas.microsoft.com/office/drawing/2014/main" id="{51131A42-A910-4CF1-9B8B-DC44CED3D57A}"/>
-              </a:ext>
-            </a:extLst>
-          </p:cNvPr>
-          <p:cNvSpPr>
-            <a:spLocks noGrp="1"/>
-          </p:cNvSpPr>
-          <p:nvPr/>
-        </p:nvSpPr>
-        <p:spPr>
-          <a:xfrm>
-            <a:off x="1143000" y="5029200"/>
-            <a:ext cx="9144000" cy="571500"/>
+                  <a:srgbClr val="93C5FD"/>
+                </a:solidFill>
+              </a:rPr>
+              <a:t>=&gt; ping google.com</a:t>
+            </a:r>
+          </a:p>
+        </p:txBody>
+      </p:sp>
+      <p:sp>
+        <p:nvSpPr>
+          <p:cNvPr id="10" name="矩形: 圓角 9">
+            <a:extLst>
+              <a:ext uri="{FF2B5EF4-FFF2-40B4-BE49-F238E27FC236}">
+                <a16:creationId xmlns:a16="http://schemas.microsoft.com/office/drawing/2014/main" id="{8BE5BA40-09A0-41D8-AF68-C76850D8C992}"/>
+              </a:ext>
+            </a:extLst>
+          </p:cNvPr>
+          <p:cNvSpPr>
+            <a:spLocks noGrp="1"/>
+          </p:cNvSpPr>
+          <p:nvPr/>
+        </p:nvSpPr>
+        <p:spPr>
+          <a:xfrm>
+            <a:off x="6286500" y="3390900"/>
+            <a:ext cx="4286250" cy="819150"/>
           </a:xfrm>
           <a:prstGeom prst="roundRect">
             <a:avLst>
-              <a:gd name="adj" fmla="val 8000"/>
+              <a:gd name="adj" fmla="val 13953"/>
             </a:avLst>
           </a:prstGeom>
           <a:solidFill>
             <a:srgbClr val="111827"/>
           </a:solidFill>
+          <a:ln w="9525">
+            <a:solidFill>
+              <a:srgbClr val="34D399"/>
+            </a:solidFill>
+            <a:prstDash val="solid"/>
+          </a:ln>
+        </p:spPr>
+        <p:style>
+          <a:lnRef idx="0">
+            <a:scrgbClr r="0" g="0" b="0"/>
+          </a:lnRef>
+          <a:fillRef idx="0">
+            <a:scrgbClr r="0" g="0" b="0"/>
+          </a:fillRef>
+          <a:effectRef idx="4">
+            <a:scrgbClr r="0" g="0" b="0"/>
+          </a:effectRef>
+          <a:fontRef idx="major"/>
+        </p:style>
+        <p:txBody>
+          <a:bodyPr/>
+          <a:lstStyle/>
+          <a:p>
+            <a:endParaRPr/>
+          </a:p>
+        </p:txBody>
+      </p:sp>
+      <p:sp>
+        <p:nvSpPr>
+          <p:cNvPr id="11" name="矩形 10">
+            <a:extLst>
+              <a:ext uri="{FF2B5EF4-FFF2-40B4-BE49-F238E27FC236}">
+                <a16:creationId xmlns:a16="http://schemas.microsoft.com/office/drawing/2014/main" id="{1FC56D24-2B6F-41DA-87DD-3284E6841CC4}"/>
+              </a:ext>
+            </a:extLst>
+          </p:cNvPr>
+          <p:cNvSpPr>
+            <a:spLocks noGrp="1"/>
+          </p:cNvSpPr>
+          <p:nvPr/>
+        </p:nvSpPr>
+        <p:spPr>
+          <a:xfrm>
+            <a:off x="6610350" y="3581400"/>
+            <a:ext cx="3714750" cy="266700"/>
+          </a:xfrm>
+          <a:prstGeom prst="rect">
+            <a:avLst/>
+          </a:prstGeom>
+          <a:noFill/>
           <a:ln w="0">
             <a:noFill/>
             <a:prstDash val="solid"/>
           </a:ln>
         </p:spPr>
         <p:txBody>
-          <a:bodyPr lIns="152400" tIns="152400" rIns="152400" bIns="152400" anchor="t">
-            <a:normAutofit/>
-          </a:bodyPr>
-          <a:lstStyle/>
-          <a:p>
-            <a:pPr algn="ctr">
-              <a:lnSpc>
-                <a:spcPct val="106000"/>
-              </a:lnSpc>
-              <a:buNone/>
-              <a:defRPr sz="1400" b="1">
-                <a:solidFill>
-                  <a:srgbClr val="FFFFFF"/>
-                </a:solidFill>
-                <a:latin typeface="Aptos"/>
-                <a:ea typeface="Aptos"/>
-                <a:cs typeface="Aptos"/>
-              </a:defRPr>
-            </a:pPr>
-            <a:r>
-              <a:rPr sz="1400" b="1">
-                <a:solidFill>
-                  <a:srgbClr val="FFFFFF"/>
-                </a:solidFill>
-                <a:latin typeface="Aptos"/>
-                <a:ea typeface="Aptos"/>
-                <a:cs typeface="Aptos"/>
-              </a:rPr>
-              <a:t>這不是部署方式的二選一，而是「日常開發環境」怎麼管理。最後上線仍然可以打包成 Docker image。</a:t>
-            </a:r>
-          </a:p>
-        </p:txBody>
-      </p:sp>
-      <p:sp>
-        <p:nvSpPr>
-          <p:cNvPr id="80" name="矩形 79">
-            <a:extLst>
-              <a:ext uri="{FF2B5EF4-FFF2-40B4-BE49-F238E27FC236}">
-                <a16:creationId xmlns:a16="http://schemas.microsoft.com/office/drawing/2014/main" id="{2298D40E-17FC-44AE-BC2B-230F73A9316F}"/>
-              </a:ext>
-            </a:extLst>
-          </p:cNvPr>
-          <p:cNvSpPr>
-            <a:spLocks noGrp="1"/>
-          </p:cNvSpPr>
-          <p:nvPr/>
-        </p:nvSpPr>
-        <p:spPr>
-          <a:xfrm>
-            <a:off x="609600" y="6305550"/>
-            <a:ext cx="9906000" cy="13335"/>
+          <a:bodyPr/>
+          <a:lstStyle/>
+          <a:p>
+            <a:pPr>
+              <a:buNone/>
+              <a:defRPr sz="1500">
+                <a:solidFill>
+                  <a:srgbClr val="E5E7EB"/>
+                </a:solidFill>
+              </a:defRPr>
+            </a:pPr>
+            <a:r>
+              <a:rPr sz="1500">
+                <a:solidFill>
+                  <a:srgbClr val="E5E7EB"/>
+                </a:solidFill>
+              </a:rPr>
+              <a:t>$ docker run my-ping yahoo.com</a:t>
+            </a:r>
+          </a:p>
+        </p:txBody>
+      </p:sp>
+      <p:sp>
+        <p:nvSpPr>
+          <p:cNvPr id="12" name="矩形 11">
+            <a:extLst>
+              <a:ext uri="{FF2B5EF4-FFF2-40B4-BE49-F238E27FC236}">
+                <a16:creationId xmlns:a16="http://schemas.microsoft.com/office/drawing/2014/main" id="{30103952-8727-4573-BF4D-915BF8A3CAE2}"/>
+              </a:ext>
+            </a:extLst>
+          </p:cNvPr>
+          <p:cNvSpPr>
+            <a:spLocks noGrp="1"/>
+          </p:cNvSpPr>
+          <p:nvPr/>
+        </p:nvSpPr>
+        <p:spPr>
+          <a:xfrm>
+            <a:off x="6610350" y="3905250"/>
+            <a:ext cx="3714750" cy="266700"/>
           </a:xfrm>
           <a:prstGeom prst="rect">
             <a:avLst/>
           </a:prstGeom>
+          <a:noFill/>
+          <a:ln w="0">
+            <a:noFill/>
+            <a:prstDash val="solid"/>
+          </a:ln>
+        </p:spPr>
+        <p:txBody>
+          <a:bodyPr/>
+          <a:lstStyle/>
+          <a:p>
+            <a:pPr>
+              <a:buNone/>
+              <a:defRPr sz="1500" b="1">
+                <a:solidFill>
+                  <a:srgbClr val="86EFAC"/>
+                </a:solidFill>
+              </a:defRPr>
+            </a:pPr>
+            <a:r>
+              <a:rPr sz="1500" b="1">
+                <a:solidFill>
+                  <a:srgbClr val="86EFAC"/>
+                </a:solidFill>
+              </a:rPr>
+              <a:t>=&gt; ping yahoo.com</a:t>
+            </a:r>
+          </a:p>
+        </p:txBody>
+      </p:sp>
+      <p:sp>
+        <p:nvSpPr>
+          <p:cNvPr id="13" name="矩形: 圓角 12">
+            <a:extLst>
+              <a:ext uri="{FF2B5EF4-FFF2-40B4-BE49-F238E27FC236}">
+                <a16:creationId xmlns:a16="http://schemas.microsoft.com/office/drawing/2014/main" id="{8DF076BE-085A-4B4D-8958-C295373310B0}"/>
+              </a:ext>
+            </a:extLst>
+          </p:cNvPr>
+          <p:cNvSpPr>
+            <a:spLocks noGrp="1"/>
+          </p:cNvSpPr>
+          <p:nvPr/>
+        </p:nvSpPr>
+        <p:spPr>
+          <a:xfrm>
+            <a:off x="1962150" y="4953000"/>
+            <a:ext cx="8267700" cy="781050"/>
+          </a:xfrm>
+          <a:prstGeom prst="roundRect">
+            <a:avLst>
+              <a:gd name="adj" fmla="val 14634"/>
+            </a:avLst>
+          </a:prstGeom>
           <a:solidFill>
-            <a:srgbClr val="D9E2EC"/>
+            <a:srgbClr val="0F172A"/>
+          </a:solidFill>
+          <a:ln w="9525">
+            <a:solidFill>
+              <a:srgbClr val="475569"/>
+            </a:solidFill>
+            <a:prstDash val="solid"/>
+          </a:ln>
+        </p:spPr>
+        <p:style>
+          <a:lnRef idx="0">
+            <a:scrgbClr r="0" g="0" b="0"/>
+          </a:lnRef>
+          <a:fillRef idx="0">
+            <a:scrgbClr r="0" g="0" b="0"/>
+          </a:fillRef>
+          <a:effectRef idx="4">
+            <a:scrgbClr r="0" g="0" b="0"/>
+          </a:effectRef>
+          <a:fontRef idx="major"/>
+        </p:style>
+        <p:txBody>
+          <a:bodyPr/>
+          <a:lstStyle/>
+          <a:p>
+            <a:endParaRPr/>
+          </a:p>
+        </p:txBody>
+      </p:sp>
+      <p:sp>
+        <p:nvSpPr>
+          <p:cNvPr id="14" name="矩形 13">
+            <a:extLst>
+              <a:ext uri="{FF2B5EF4-FFF2-40B4-BE49-F238E27FC236}">
+                <a16:creationId xmlns:a16="http://schemas.microsoft.com/office/drawing/2014/main" id="{EE9E3420-5F55-4A1D-8D12-C78A84C5DAE4}"/>
+              </a:ext>
+            </a:extLst>
+          </p:cNvPr>
+          <p:cNvSpPr>
+            <a:spLocks noGrp="1"/>
+          </p:cNvSpPr>
+          <p:nvPr/>
+        </p:nvSpPr>
+        <p:spPr>
+          <a:xfrm>
+            <a:off x="2324100" y="5219700"/>
+            <a:ext cx="7543800" cy="285750"/>
+          </a:xfrm>
+          <a:prstGeom prst="rect">
+            <a:avLst/>
+          </a:prstGeom>
+          <a:noFill/>
+          <a:ln w="0">
+            <a:noFill/>
+            <a:prstDash val="solid"/>
+          </a:ln>
+        </p:spPr>
+        <p:txBody>
+          <a:bodyPr/>
+          <a:lstStyle/>
+          <a:p>
+            <a:pPr>
+              <a:buNone/>
+              <a:defRPr sz="1650" b="1">
+                <a:solidFill>
+                  <a:srgbClr val="FFFFFF"/>
+                </a:solidFill>
+              </a:defRPr>
+            </a:pPr>
+            <a:r>
+              <a:rPr sz="1650" b="1">
+                <a:solidFill>
+                  <a:srgbClr val="FFFFFF"/>
+                </a:solidFill>
+              </a:rPr>
+              <a:t>一句話：ENTRYPOINT 決定容器像什麼工具，CMD 提供這個工具的預設參數。</a:t>
+            </a:r>
+          </a:p>
+        </p:txBody>
+      </p:sp>
+      <p:sp>
+        <p:nvSpPr>
+          <p:cNvPr id="15" name="矩形 14">
+            <a:extLst>
+              <a:ext uri="{FF2B5EF4-FFF2-40B4-BE49-F238E27FC236}">
+                <a16:creationId xmlns:a16="http://schemas.microsoft.com/office/drawing/2014/main" id="{C471035E-DB62-4B03-A501-2DF6C0BF42FC}"/>
+              </a:ext>
+            </a:extLst>
+          </p:cNvPr>
+          <p:cNvSpPr>
+            <a:spLocks noGrp="1"/>
+          </p:cNvSpPr>
+          <p:nvPr/>
+        </p:nvSpPr>
+        <p:spPr>
+          <a:xfrm>
+            <a:off x="609600" y="6305550"/>
+            <a:ext cx="9906000" cy="14288"/>
+          </a:xfrm>
+          <a:prstGeom prst="rect">
+            <a:avLst/>
+          </a:prstGeom>
+          <a:solidFill>
+            <a:srgbClr val="334155"/>
           </a:solidFill>
           <a:ln w="0">
             <a:noFill/>
@@ -19172,9 +19537,7 @@
           </a:ln>
         </p:spPr>
         <p:txBody>
-          <a:bodyPr lIns="0" tIns="0" rIns="0" bIns="0" anchor="t">
-            <a:normAutofit fontScale="25000" lnSpcReduction="20000"/>
-          </a:bodyPr>
+          <a:bodyPr/>
           <a:lstStyle/>
           <a:p>
             <a:endParaRPr/>
@@ -19183,22 +19546,22 @@
       </p:sp>
       <p:sp>
         <p:nvSpPr>
-          <p:cNvPr id="81" name="矩形 80">
-            <a:extLst>
-              <a:ext uri="{FF2B5EF4-FFF2-40B4-BE49-F238E27FC236}">
-                <a16:creationId xmlns:a16="http://schemas.microsoft.com/office/drawing/2014/main" id="{C66E6F29-69AF-472B-AF9F-BB8BE03A8B64}"/>
-              </a:ext>
-            </a:extLst>
-          </p:cNvPr>
-          <p:cNvSpPr>
-            <a:spLocks noGrp="1"/>
-          </p:cNvSpPr>
-          <p:nvPr/>
-        </p:nvSpPr>
-        <p:spPr>
-          <a:xfrm>
-            <a:off x="609600" y="6400800"/>
-            <a:ext cx="2762250" cy="171450"/>
+          <p:cNvPr id="16" name="矩形 15">
+            <a:extLst>
+              <a:ext uri="{FF2B5EF4-FFF2-40B4-BE49-F238E27FC236}">
+                <a16:creationId xmlns:a16="http://schemas.microsoft.com/office/drawing/2014/main" id="{D97AE55B-13E3-4E7D-B991-CFE036F4C787}"/>
+              </a:ext>
+            </a:extLst>
+          </p:cNvPr>
+          <p:cNvSpPr>
+            <a:spLocks noGrp="1"/>
+          </p:cNvSpPr>
+          <p:nvPr/>
+        </p:nvSpPr>
+        <p:spPr>
+          <a:xfrm>
+            <a:off x="609600" y="6419850"/>
+            <a:ext cx="2762250" cy="190500"/>
           </a:xfrm>
           <a:prstGeom prst="rect">
             <a:avLst/>
@@ -19210,33 +19573,22 @@
           </a:ln>
         </p:spPr>
         <p:txBody>
-          <a:bodyPr lIns="0" tIns="0" rIns="0" bIns="0" anchor="t">
-            <a:normAutofit/>
-          </a:bodyPr>
-          <a:lstStyle/>
-          <a:p>
-            <a:pPr algn="l">
-              <a:lnSpc>
-                <a:spcPct val="106000"/>
-              </a:lnSpc>
-              <a:buNone/>
-              <a:defRPr sz="825" b="0">
-                <a:solidFill>
-                  <a:srgbClr val="64748B"/>
-                </a:solidFill>
-                <a:latin typeface="Aptos"/>
-                <a:ea typeface="Aptos"/>
-                <a:cs typeface="Aptos"/>
-              </a:defRPr>
-            </a:pPr>
-            <a:r>
-              <a:rPr sz="825" b="0">
-                <a:solidFill>
-                  <a:srgbClr val="64748B"/>
-                </a:solidFill>
-                <a:latin typeface="Aptos"/>
-                <a:ea typeface="Aptos"/>
-                <a:cs typeface="Aptos"/>
+          <a:bodyPr/>
+          <a:lstStyle/>
+          <a:p>
+            <a:pPr>
+              <a:buNone/>
+              <a:defRPr sz="825">
+                <a:solidFill>
+                  <a:srgbClr val="CBD5E1"/>
+                </a:solidFill>
+              </a:defRPr>
+            </a:pPr>
+            <a:r>
+              <a:rPr sz="825">
+                <a:solidFill>
+                  <a:srgbClr val="CBD5E1"/>
+                </a:solidFill>
               </a:rPr>
               <a:t>Docker 基礎教學 | 第 4 堂</a:t>
             </a:r>
@@ -19245,22 +19597,22 @@
       </p:sp>
       <p:sp>
         <p:nvSpPr>
-          <p:cNvPr id="82" name="矩形 81">
-            <a:extLst>
-              <a:ext uri="{FF2B5EF4-FFF2-40B4-BE49-F238E27FC236}">
-                <a16:creationId xmlns:a16="http://schemas.microsoft.com/office/drawing/2014/main" id="{B4E83581-228B-4C73-8D5C-D06752AD2D63}"/>
-              </a:ext>
-            </a:extLst>
-          </p:cNvPr>
-          <p:cNvSpPr>
-            <a:spLocks noGrp="1"/>
-          </p:cNvSpPr>
-          <p:nvPr/>
-        </p:nvSpPr>
-        <p:spPr>
-          <a:xfrm>
-            <a:off x="10858500" y="6381750"/>
-            <a:ext cx="723900" cy="190500"/>
+          <p:cNvPr id="17" name="矩形 16">
+            <a:extLst>
+              <a:ext uri="{FF2B5EF4-FFF2-40B4-BE49-F238E27FC236}">
+                <a16:creationId xmlns:a16="http://schemas.microsoft.com/office/drawing/2014/main" id="{0FAF5892-94CB-4824-94E3-3D7B8D47CB1D}"/>
+              </a:ext>
+            </a:extLst>
+          </p:cNvPr>
+          <p:cNvSpPr>
+            <a:spLocks noGrp="1"/>
+          </p:cNvSpPr>
+          <p:nvPr/>
+        </p:nvSpPr>
+        <p:spPr>
+          <a:xfrm>
+            <a:off x="9810750" y="6400800"/>
+            <a:ext cx="1524000" cy="228600"/>
           </a:xfrm>
           <a:prstGeom prst="rect">
             <a:avLst/>
@@ -19272,35 +19624,24 @@
           </a:ln>
         </p:spPr>
         <p:txBody>
-          <a:bodyPr lIns="0" tIns="0" rIns="0" bIns="0" anchor="t">
-            <a:normAutofit/>
-          </a:bodyPr>
+          <a:bodyPr/>
           <a:lstStyle/>
           <a:p>
             <a:pPr algn="r">
-              <a:lnSpc>
-                <a:spcPct val="106000"/>
-              </a:lnSpc>
               <a:buNone/>
               <a:defRPr sz="900" b="1">
                 <a:solidFill>
-                  <a:srgbClr val="64748B"/>
-                </a:solidFill>
-                <a:latin typeface="Aptos"/>
-                <a:ea typeface="Aptos"/>
-                <a:cs typeface="Aptos"/>
+                  <a:srgbClr val="CBD5E1"/>
+                </a:solidFill>
               </a:defRPr>
             </a:pPr>
             <a:r>
               <a:rPr sz="900" b="1">
                 <a:solidFill>
-                  <a:srgbClr val="64748B"/>
-                </a:solidFill>
-                <a:latin typeface="Aptos"/>
-                <a:ea typeface="Aptos"/>
-                <a:cs typeface="Aptos"/>
-              </a:rPr>
-              <a:t>DEV</a:t>
+                  <a:srgbClr val="CBD5E1"/>
+                </a:solidFill>
+              </a:rPr>
+              <a:t>CMD / ENTRYPOINT 2</a:t>
             </a:r>
           </a:p>
         </p:txBody>
@@ -19308,7 +19649,7 @@
     </p:spTree>
     <p:extLst>
       <p:ext uri="{BB962C8B-B14F-4D97-AF65-F5344CB8AC3E}">
-        <p14:creationId xmlns:p14="http://schemas.microsoft.com/office/powerpoint/2010/main" val="754590461"/>
+        <p14:creationId xmlns:p14="http://schemas.microsoft.com/office/powerpoint/2010/main" val="1877316584"/>
       </p:ext>
     </p:extLst>
   </p:cSld>
@@ -19348,7 +19689,7 @@
           <p:cNvPr id="2" name="矩形 1">
             <a:extLst>
               <a:ext uri="{FF2B5EF4-FFF2-40B4-BE49-F238E27FC236}">
-                <a16:creationId xmlns:a16="http://schemas.microsoft.com/office/drawing/2014/main" id="{B4EE934A-4CBD-446C-9D62-C4645E509043}"/>
+                <a16:creationId xmlns:a16="http://schemas.microsoft.com/office/drawing/2014/main" id="{843093B7-3227-41B5-AFBC-201D13ACDAC6}"/>
               </a:ext>
             </a:extLst>
           </p:cNvPr>
@@ -19410,7 +19751,7 @@
           <p:cNvPr id="3" name="矩形 2">
             <a:extLst>
               <a:ext uri="{FF2B5EF4-FFF2-40B4-BE49-F238E27FC236}">
-                <a16:creationId xmlns:a16="http://schemas.microsoft.com/office/drawing/2014/main" id="{92CD948F-13CC-4011-9A23-C57038AF2846}"/>
+                <a16:creationId xmlns:a16="http://schemas.microsoft.com/office/drawing/2014/main" id="{AE9AFDD6-4A76-4FDD-B10B-5E2C4EEC064E}"/>
               </a:ext>
             </a:extLst>
           </p:cNvPr>
@@ -19462,7 +19803,7 @@
                 <a:ea typeface="Aptos Display"/>
                 <a:cs typeface="Aptos Display"/>
               </a:rPr>
-              <a:t>什麼時候用 Dev Containers，什麼時候用 uv / Poetry？</a:t>
+              <a:t>開發環境管理：常見有兩條路</a:t>
             </a:r>
           </a:p>
         </p:txBody>
@@ -19472,589 +19813,19 @@
           <p:cNvPr id="4" name="矩形: 圓角 3">
             <a:extLst>
               <a:ext uri="{FF2B5EF4-FFF2-40B4-BE49-F238E27FC236}">
-                <a16:creationId xmlns:a16="http://schemas.microsoft.com/office/drawing/2014/main" id="{83D0CBFB-66DF-453E-BFF1-73502C94D31B}"/>
-              </a:ext>
-            </a:extLst>
-          </p:cNvPr>
-          <p:cNvSpPr>
-            <a:spLocks noGrp="1"/>
-          </p:cNvSpPr>
-          <p:nvPr/>
-        </p:nvSpPr>
-        <p:spPr>
-          <a:xfrm>
-            <a:off x="609600" y="1447800"/>
-            <a:ext cx="3429000" cy="3048000"/>
-          </a:xfrm>
-          <a:prstGeom prst="roundRect">
-            <a:avLst>
-              <a:gd name="adj" fmla="val 8000"/>
-            </a:avLst>
-          </a:prstGeom>
-          <a:solidFill>
-            <a:srgbClr val="FFFFFF"/>
-          </a:solidFill>
-          <a:ln w="9525">
-            <a:solidFill>
-              <a:srgbClr val="B7DCFF"/>
-            </a:solidFill>
-            <a:prstDash val="solid"/>
-          </a:ln>
-        </p:spPr>
-        <p:txBody>
-          <a:bodyPr lIns="209550" tIns="209550" rIns="209550" bIns="209550" anchor="t">
-            <a:normAutofit/>
-          </a:bodyPr>
-          <a:lstStyle/>
-          <a:p>
-            <a:pPr algn="ctr">
-              <a:lnSpc>
-                <a:spcPct val="106000"/>
-              </a:lnSpc>
-              <a:buNone/>
-              <a:defRPr sz="1775" b="1">
-                <a:solidFill>
-                  <a:srgbClr val="0B5CAD"/>
-                </a:solidFill>
-                <a:latin typeface="Aptos Display"/>
-                <a:ea typeface="Aptos Display"/>
-                <a:cs typeface="Aptos Display"/>
-              </a:defRPr>
-            </a:pPr>
-            <a:r>
-              <a:rPr sz="1775" b="1">
-                <a:solidFill>
-                  <a:srgbClr val="0B5CAD"/>
-                </a:solidFill>
-                <a:latin typeface="Aptos Display"/>
-                <a:ea typeface="Aptos Display"/>
-                <a:cs typeface="Aptos Display"/>
-              </a:rPr>
-              <a:t>選 Dev Containers</a:t>
-            </a:r>
-          </a:p>
-          <a:p>
-            <a:pPr>
-              <a:buNone/>
-              <a:defRPr sz="600"/>
-            </a:pPr>
-            <a:endParaRPr sz="1775" b="1">
-              <a:solidFill>
-                <a:srgbClr val="0B5CAD"/>
-              </a:solidFill>
-              <a:latin typeface="Aptos Display"/>
-              <a:ea typeface="Aptos Display"/>
-              <a:cs typeface="Aptos Display"/>
-            </a:endParaRPr>
-          </a:p>
-          <a:p>
-            <a:pPr algn="l">
-              <a:lnSpc>
-                <a:spcPct val="106000"/>
-              </a:lnSpc>
-              <a:buNone/>
-              <a:defRPr sz="1275" b="1">
-                <a:solidFill>
-                  <a:srgbClr val="111827"/>
-                </a:solidFill>
-                <a:latin typeface="Aptos"/>
-                <a:ea typeface="Aptos"/>
-                <a:cs typeface="Aptos"/>
-              </a:defRPr>
-            </a:pPr>
-            <a:r>
-              <a:rPr sz="1275" b="1">
-                <a:solidFill>
-                  <a:srgbClr val="111827"/>
-                </a:solidFill>
-                <a:latin typeface="Aptos"/>
-                <a:ea typeface="Aptos"/>
-                <a:cs typeface="Aptos"/>
-              </a:rPr>
-              <a:t>團隊成員的 OS 不同</a:t>
-            </a:r>
-          </a:p>
-          <a:p>
-            <a:pPr algn="l">
-              <a:lnSpc>
-                <a:spcPct val="106000"/>
-              </a:lnSpc>
-              <a:buNone/>
-              <a:defRPr sz="1200" b="0">
-                <a:solidFill>
-                  <a:srgbClr val="334155"/>
-                </a:solidFill>
-                <a:latin typeface="Aptos"/>
-                <a:ea typeface="Aptos"/>
-                <a:cs typeface="Aptos"/>
-              </a:defRPr>
-            </a:pPr>
-            <a:r>
-              <a:rPr sz="1200" b="0">
-                <a:solidFill>
-                  <a:srgbClr val="334155"/>
-                </a:solidFill>
-                <a:latin typeface="Aptos"/>
-                <a:ea typeface="Aptos"/>
-                <a:cs typeface="Aptos"/>
-              </a:rPr>
-              <a:t>需要 apt、系統函式庫或 CLI 工具</a:t>
-            </a:r>
-          </a:p>
-          <a:p>
-            <a:pPr algn="l">
-              <a:lnSpc>
-                <a:spcPct val="106000"/>
-              </a:lnSpc>
-              <a:buNone/>
-              <a:defRPr sz="1200" b="0">
-                <a:solidFill>
-                  <a:srgbClr val="334155"/>
-                </a:solidFill>
-                <a:latin typeface="Aptos"/>
-                <a:ea typeface="Aptos"/>
-                <a:cs typeface="Aptos"/>
-              </a:defRPr>
-            </a:pPr>
-            <a:r>
-              <a:rPr sz="1200" b="0">
-                <a:solidFill>
-                  <a:srgbClr val="334155"/>
-                </a:solidFill>
-                <a:latin typeface="Aptos"/>
-                <a:ea typeface="Aptos"/>
-                <a:cs typeface="Aptos"/>
-              </a:rPr>
-              <a:t>想讓 terminal / debugger 都在容器裡</a:t>
-            </a:r>
-          </a:p>
-          <a:p>
-            <a:pPr algn="l">
-              <a:lnSpc>
-                <a:spcPct val="106000"/>
-              </a:lnSpc>
-              <a:buNone/>
-              <a:defRPr sz="1200" b="0">
-                <a:solidFill>
-                  <a:srgbClr val="334155"/>
-                </a:solidFill>
-                <a:latin typeface="Aptos"/>
-                <a:ea typeface="Aptos"/>
-                <a:cs typeface="Aptos"/>
-              </a:defRPr>
-            </a:pPr>
-            <a:r>
-              <a:rPr sz="1200" b="0">
-                <a:solidFill>
-                  <a:srgbClr val="334155"/>
-                </a:solidFill>
-                <a:latin typeface="Aptos"/>
-                <a:ea typeface="Aptos"/>
-                <a:cs typeface="Aptos"/>
-              </a:rPr>
-              <a:t>想靠近 production image 的環境</a:t>
-            </a:r>
-          </a:p>
-        </p:txBody>
-      </p:sp>
-      <p:sp>
-        <p:nvSpPr>
-          <p:cNvPr id="5" name="矩形: 圓角 4">
-            <a:extLst>
-              <a:ext uri="{FF2B5EF4-FFF2-40B4-BE49-F238E27FC236}">
-                <a16:creationId xmlns:a16="http://schemas.microsoft.com/office/drawing/2014/main" id="{F427EAD4-63AD-49C6-A054-847F82034280}"/>
-              </a:ext>
-            </a:extLst>
-          </p:cNvPr>
-          <p:cNvSpPr>
-            <a:spLocks noGrp="1"/>
-          </p:cNvSpPr>
-          <p:nvPr/>
-        </p:nvSpPr>
-        <p:spPr>
-          <a:xfrm>
-            <a:off x="4381500" y="1447800"/>
-            <a:ext cx="3429000" cy="3048000"/>
-          </a:xfrm>
-          <a:prstGeom prst="roundRect">
-            <a:avLst>
-              <a:gd name="adj" fmla="val 8000"/>
-            </a:avLst>
-          </a:prstGeom>
-          <a:solidFill>
-            <a:srgbClr val="FFFFFF"/>
-          </a:solidFill>
-          <a:ln w="9525">
-            <a:solidFill>
-              <a:srgbClr val="B7E4C7"/>
-            </a:solidFill>
-            <a:prstDash val="solid"/>
-          </a:ln>
-        </p:spPr>
-        <p:txBody>
-          <a:bodyPr lIns="209550" tIns="209550" rIns="209550" bIns="209550" anchor="t">
-            <a:normAutofit/>
-          </a:bodyPr>
-          <a:lstStyle/>
-          <a:p>
-            <a:pPr algn="ctr">
-              <a:lnSpc>
-                <a:spcPct val="106000"/>
-              </a:lnSpc>
-              <a:buNone/>
-              <a:defRPr sz="1775" b="1">
-                <a:solidFill>
-                  <a:srgbClr val="087F5B"/>
-                </a:solidFill>
-                <a:latin typeface="Aptos Display"/>
-                <a:ea typeface="Aptos Display"/>
-                <a:cs typeface="Aptos Display"/>
-              </a:defRPr>
-            </a:pPr>
-            <a:r>
-              <a:rPr sz="1775" b="1">
-                <a:solidFill>
-                  <a:srgbClr val="087F5B"/>
-                </a:solidFill>
-                <a:latin typeface="Aptos Display"/>
-                <a:ea typeface="Aptos Display"/>
-                <a:cs typeface="Aptos Display"/>
-              </a:rPr>
-              <a:t>選 uv / Poetry</a:t>
-            </a:r>
-          </a:p>
-          <a:p>
-            <a:pPr>
-              <a:buNone/>
-              <a:defRPr sz="600"/>
-            </a:pPr>
-            <a:endParaRPr sz="1775" b="1">
-              <a:solidFill>
-                <a:srgbClr val="087F5B"/>
-              </a:solidFill>
-              <a:latin typeface="Aptos Display"/>
-              <a:ea typeface="Aptos Display"/>
-              <a:cs typeface="Aptos Display"/>
-            </a:endParaRPr>
-          </a:p>
-          <a:p>
-            <a:pPr algn="l">
-              <a:lnSpc>
-                <a:spcPct val="106000"/>
-              </a:lnSpc>
-              <a:buNone/>
-              <a:defRPr sz="1275" b="1">
-                <a:solidFill>
-                  <a:srgbClr val="111827"/>
-                </a:solidFill>
-                <a:latin typeface="Aptos"/>
-                <a:ea typeface="Aptos"/>
-                <a:cs typeface="Aptos"/>
-              </a:defRPr>
-            </a:pPr>
-            <a:r>
-              <a:rPr sz="1275" b="1">
-                <a:solidFill>
-                  <a:srgbClr val="111827"/>
-                </a:solidFill>
-                <a:latin typeface="Aptos"/>
-                <a:ea typeface="Aptos"/>
-                <a:cs typeface="Aptos"/>
-              </a:rPr>
-              <a:t>主要問題是 Python 套件版本</a:t>
-            </a:r>
-          </a:p>
-          <a:p>
-            <a:pPr algn="l">
-              <a:lnSpc>
-                <a:spcPct val="106000"/>
-              </a:lnSpc>
-              <a:buNone/>
-              <a:defRPr sz="1200" b="0">
-                <a:solidFill>
-                  <a:srgbClr val="334155"/>
-                </a:solidFill>
-                <a:latin typeface="Aptos"/>
-                <a:ea typeface="Aptos"/>
-                <a:cs typeface="Aptos"/>
-              </a:defRPr>
-            </a:pPr>
-            <a:r>
-              <a:rPr sz="1200" b="0">
-                <a:solidFill>
-                  <a:srgbClr val="334155"/>
-                </a:solidFill>
-                <a:latin typeface="Aptos"/>
-                <a:ea typeface="Aptos"/>
-                <a:cs typeface="Aptos"/>
-              </a:rPr>
-              <a:t>本機開發就很順，不想整個 IDE 進容器</a:t>
-            </a:r>
-          </a:p>
-          <a:p>
-            <a:pPr algn="l">
-              <a:lnSpc>
-                <a:spcPct val="106000"/>
-              </a:lnSpc>
-              <a:buNone/>
-              <a:defRPr sz="1200" b="0">
-                <a:solidFill>
-                  <a:srgbClr val="334155"/>
-                </a:solidFill>
-                <a:latin typeface="Aptos"/>
-                <a:ea typeface="Aptos"/>
-                <a:cs typeface="Aptos"/>
-              </a:defRPr>
-            </a:pPr>
-            <a:r>
-              <a:rPr sz="1200" b="0">
-                <a:solidFill>
-                  <a:srgbClr val="334155"/>
-                </a:solidFill>
-                <a:latin typeface="Aptos"/>
-                <a:ea typeface="Aptos"/>
-                <a:cs typeface="Aptos"/>
-              </a:rPr>
-              <a:t>Django / Flask 專案要快速建立 venv</a:t>
-            </a:r>
-          </a:p>
-          <a:p>
-            <a:pPr algn="l">
-              <a:lnSpc>
-                <a:spcPct val="106000"/>
-              </a:lnSpc>
-              <a:buNone/>
-              <a:defRPr sz="1200" b="0">
-                <a:solidFill>
-                  <a:srgbClr val="334155"/>
-                </a:solidFill>
-                <a:latin typeface="Aptos"/>
-                <a:ea typeface="Aptos"/>
-                <a:cs typeface="Aptos"/>
-              </a:defRPr>
-            </a:pPr>
-            <a:r>
-              <a:rPr sz="1200" b="0">
-                <a:solidFill>
-                  <a:srgbClr val="334155"/>
-                </a:solidFill>
-                <a:latin typeface="Aptos"/>
-                <a:ea typeface="Aptos"/>
-                <a:cs typeface="Aptos"/>
-              </a:rPr>
-              <a:t>用 lock file 固定依賴版本</a:t>
-            </a:r>
-          </a:p>
-        </p:txBody>
-      </p:sp>
-      <p:sp>
-        <p:nvSpPr>
-          <p:cNvPr id="6" name="矩形: 圓角 5">
-            <a:extLst>
-              <a:ext uri="{FF2B5EF4-FFF2-40B4-BE49-F238E27FC236}">
-                <a16:creationId xmlns:a16="http://schemas.microsoft.com/office/drawing/2014/main" id="{06D4AB3B-CB7C-43E8-8FBF-44CC2B680F6D}"/>
-              </a:ext>
-            </a:extLst>
-          </p:cNvPr>
-          <p:cNvSpPr>
-            <a:spLocks noGrp="1"/>
-          </p:cNvSpPr>
-          <p:nvPr/>
-        </p:nvSpPr>
-        <p:spPr>
-          <a:xfrm>
-            <a:off x="8153400" y="1447800"/>
-            <a:ext cx="3429000" cy="3048000"/>
-          </a:xfrm>
-          <a:prstGeom prst="roundRect">
-            <a:avLst>
-              <a:gd name="adj" fmla="val 8000"/>
-            </a:avLst>
-          </a:prstGeom>
-          <a:solidFill>
-            <a:srgbClr val="FFF7E6"/>
-          </a:solidFill>
-          <a:ln w="9525">
-            <a:solidFill>
-              <a:srgbClr val="FFD999"/>
-            </a:solidFill>
-            <a:prstDash val="solid"/>
-          </a:ln>
-        </p:spPr>
-        <p:txBody>
-          <a:bodyPr lIns="209550" tIns="209550" rIns="209550" bIns="209550" anchor="t">
-            <a:normAutofit/>
-          </a:bodyPr>
-          <a:lstStyle/>
-          <a:p>
-            <a:pPr algn="ctr">
-              <a:lnSpc>
-                <a:spcPct val="106000"/>
-              </a:lnSpc>
-              <a:buNone/>
-              <a:defRPr sz="1775" b="1">
-                <a:solidFill>
-                  <a:srgbClr val="A16207"/>
-                </a:solidFill>
-                <a:latin typeface="Aptos Display"/>
-                <a:ea typeface="Aptos Display"/>
-                <a:cs typeface="Aptos Display"/>
-              </a:defRPr>
-            </a:pPr>
-            <a:r>
-              <a:rPr sz="1775" b="1">
-                <a:solidFill>
-                  <a:srgbClr val="A16207"/>
-                </a:solidFill>
-                <a:latin typeface="Aptos Display"/>
-                <a:ea typeface="Aptos Display"/>
-                <a:cs typeface="Aptos Display"/>
-              </a:rPr>
-              <a:t>實務上可混用</a:t>
-            </a:r>
-          </a:p>
-          <a:p>
-            <a:pPr>
-              <a:buNone/>
-              <a:defRPr sz="600"/>
-            </a:pPr>
-            <a:endParaRPr sz="1775" b="1">
-              <a:solidFill>
-                <a:srgbClr val="A16207"/>
-              </a:solidFill>
-              <a:latin typeface="Aptos Display"/>
-              <a:ea typeface="Aptos Display"/>
-              <a:cs typeface="Aptos Display"/>
-            </a:endParaRPr>
-          </a:p>
-          <a:p>
-            <a:pPr algn="l">
-              <a:lnSpc>
-                <a:spcPct val="106000"/>
-              </a:lnSpc>
-              <a:buNone/>
-              <a:defRPr sz="1275" b="1">
-                <a:solidFill>
-                  <a:srgbClr val="111827"/>
-                </a:solidFill>
-                <a:latin typeface="Aptos"/>
-                <a:ea typeface="Aptos"/>
-                <a:cs typeface="Aptos"/>
-              </a:defRPr>
-            </a:pPr>
-            <a:r>
-              <a:rPr sz="1275" b="1">
-                <a:solidFill>
-                  <a:srgbClr val="111827"/>
-                </a:solidFill>
-                <a:latin typeface="Aptos"/>
-                <a:ea typeface="Aptos"/>
-                <a:cs typeface="Aptos"/>
-              </a:rPr>
-              <a:t>容器管 OS 與工具</a:t>
-            </a:r>
-          </a:p>
-          <a:p>
-            <a:pPr algn="l">
-              <a:lnSpc>
-                <a:spcPct val="106000"/>
-              </a:lnSpc>
-              <a:buNone/>
-              <a:defRPr sz="1200" b="0">
-                <a:solidFill>
-                  <a:srgbClr val="334155"/>
-                </a:solidFill>
-                <a:latin typeface="Aptos"/>
-                <a:ea typeface="Aptos"/>
-                <a:cs typeface="Aptos"/>
-              </a:defRPr>
-            </a:pPr>
-            <a:r>
-              <a:rPr sz="1200" b="0">
-                <a:solidFill>
-                  <a:srgbClr val="334155"/>
-                </a:solidFill>
-                <a:latin typeface="Aptos"/>
-                <a:ea typeface="Aptos"/>
-                <a:cs typeface="Aptos"/>
-              </a:rPr>
-              <a:t>uv / Poetry 管 Python packages</a:t>
-            </a:r>
-          </a:p>
-          <a:p>
-            <a:pPr algn="l">
-              <a:lnSpc>
-                <a:spcPct val="106000"/>
-              </a:lnSpc>
-              <a:buNone/>
-              <a:defRPr sz="1200" b="0">
-                <a:solidFill>
-                  <a:srgbClr val="334155"/>
-                </a:solidFill>
-                <a:latin typeface="Aptos"/>
-                <a:ea typeface="Aptos"/>
-                <a:cs typeface="Aptos"/>
-              </a:defRPr>
-            </a:pPr>
-            <a:r>
-              <a:rPr sz="1200" b="0">
-                <a:solidFill>
-                  <a:srgbClr val="334155"/>
-                </a:solidFill>
-                <a:latin typeface="Aptos"/>
-                <a:ea typeface="Aptos"/>
-                <a:cs typeface="Aptos"/>
-              </a:rPr>
-              <a:t>Dockerfile 管部署 image</a:t>
-            </a:r>
-          </a:p>
-          <a:p>
-            <a:pPr algn="l">
-              <a:lnSpc>
-                <a:spcPct val="106000"/>
-              </a:lnSpc>
-              <a:buNone/>
-              <a:defRPr sz="1200" b="0">
-                <a:solidFill>
-                  <a:srgbClr val="334155"/>
-                </a:solidFill>
-                <a:latin typeface="Aptos"/>
-                <a:ea typeface="Aptos"/>
-                <a:cs typeface="Aptos"/>
-              </a:defRPr>
-            </a:pPr>
-            <a:r>
-              <a:rPr sz="1200" b="0">
-                <a:solidFill>
-                  <a:srgbClr val="334155"/>
-                </a:solidFill>
-                <a:latin typeface="Aptos"/>
-                <a:ea typeface="Aptos"/>
-                <a:cs typeface="Aptos"/>
-              </a:rPr>
-              <a:t>先選最能降低混亂的那一層</a:t>
-            </a:r>
-          </a:p>
-        </p:txBody>
-      </p:sp>
-      <p:sp>
-        <p:nvSpPr>
-          <p:cNvPr id="7" name="矩形: 圓角 6">
-            <a:extLst>
-              <a:ext uri="{FF2B5EF4-FFF2-40B4-BE49-F238E27FC236}">
-                <a16:creationId xmlns:a16="http://schemas.microsoft.com/office/drawing/2014/main" id="{5E02D16F-F184-428A-8CE9-B6C5342B00B3}"/>
-              </a:ext>
-            </a:extLst>
-          </p:cNvPr>
-          <p:cNvSpPr>
-            <a:spLocks noGrp="1"/>
-          </p:cNvSpPr>
-          <p:nvPr/>
-        </p:nvSpPr>
-        <p:spPr>
-          <a:xfrm>
-            <a:off x="1143000" y="4933950"/>
-            <a:ext cx="9144000" cy="628650"/>
+                <a16:creationId xmlns:a16="http://schemas.microsoft.com/office/drawing/2014/main" id="{FB3B2462-E948-4379-A9DE-3D0833F385AC}"/>
+              </a:ext>
+            </a:extLst>
+          </p:cNvPr>
+          <p:cNvSpPr>
+            <a:spLocks noGrp="1"/>
+          </p:cNvSpPr>
+          <p:nvPr/>
+        </p:nvSpPr>
+        <p:spPr>
+          <a:xfrm>
+            <a:off x="609600" y="1495425"/>
+            <a:ext cx="4953000" cy="3152775"/>
           </a:xfrm>
           <a:prstGeom prst="roundRect">
             <a:avLst>
@@ -20072,7 +19843,7 @@
           </a:ln>
         </p:spPr>
         <p:txBody>
-          <a:bodyPr lIns="152400" tIns="152400" rIns="152400" bIns="152400" anchor="t">
+          <a:bodyPr lIns="228600" tIns="228600" rIns="228600" bIns="228600" anchor="t">
             <a:normAutofit/>
           </a:bodyPr>
           <a:lstStyle/>
@@ -20082,9 +19853,387 @@
                 <a:spcPct val="106000"/>
               </a:lnSpc>
               <a:buNone/>
+              <a:defRPr sz="2100" b="1">
+                <a:solidFill>
+                  <a:srgbClr val="0B5CAD"/>
+                </a:solidFill>
+                <a:latin typeface="Aptos Display"/>
+                <a:ea typeface="Aptos Display"/>
+                <a:cs typeface="Aptos Display"/>
+              </a:defRPr>
+            </a:pPr>
+            <a:r>
+              <a:rPr sz="2100" b="1">
+                <a:solidFill>
+                  <a:srgbClr val="0B5CAD"/>
+                </a:solidFill>
+                <a:latin typeface="Aptos Display"/>
+                <a:ea typeface="Aptos Display"/>
+                <a:cs typeface="Aptos Display"/>
+              </a:rPr>
+              <a:t>Docker 派</a:t>
+            </a:r>
+          </a:p>
+          <a:p>
+            <a:pPr algn="ctr">
+              <a:lnSpc>
+                <a:spcPct val="106000"/>
+              </a:lnSpc>
+              <a:buNone/>
+              <a:defRPr sz="1500" b="1">
+                <a:solidFill>
+                  <a:srgbClr val="0B1220"/>
+                </a:solidFill>
+                <a:latin typeface="Aptos"/>
+                <a:ea typeface="Aptos"/>
+                <a:cs typeface="Aptos"/>
+              </a:defRPr>
+            </a:pPr>
+            <a:r>
+              <a:rPr sz="1500" b="1">
+                <a:solidFill>
+                  <a:srgbClr val="0B1220"/>
+                </a:solidFill>
+                <a:latin typeface="Aptos"/>
+                <a:ea typeface="Aptos"/>
+                <a:cs typeface="Aptos"/>
+              </a:rPr>
+              <a:t>VS Code Dev Containers</a:t>
+            </a:r>
+          </a:p>
+          <a:p>
+            <a:pPr>
+              <a:buNone/>
+              <a:defRPr sz="600"/>
+            </a:pPr>
+            <a:endParaRPr sz="1500" b="1">
+              <a:solidFill>
+                <a:srgbClr val="0B1220"/>
+              </a:solidFill>
+              <a:latin typeface="Aptos"/>
+              <a:ea typeface="Aptos"/>
+              <a:cs typeface="Aptos"/>
+            </a:endParaRPr>
+          </a:p>
+          <a:p>
+            <a:pPr algn="l">
+              <a:lnSpc>
+                <a:spcPct val="106000"/>
+              </a:lnSpc>
+              <a:buNone/>
+              <a:defRPr sz="1250" b="0">
+                <a:solidFill>
+                  <a:srgbClr val="334155"/>
+                </a:solidFill>
+                <a:latin typeface="Aptos"/>
+                <a:ea typeface="Aptos"/>
+                <a:cs typeface="Aptos"/>
+              </a:defRPr>
+            </a:pPr>
+            <a:r>
+              <a:rPr sz="1250" b="0">
+                <a:solidFill>
+                  <a:srgbClr val="334155"/>
+                </a:solidFill>
+                <a:latin typeface="Aptos"/>
+                <a:ea typeface="Aptos"/>
+                <a:cs typeface="Aptos"/>
+              </a:rPr>
+              <a:t>把「開發用的作業系統、工具、套件」都放進容器。</a:t>
+            </a:r>
+          </a:p>
+          <a:p>
+            <a:pPr algn="l">
+              <a:lnSpc>
+                <a:spcPct val="106000"/>
+              </a:lnSpc>
+              <a:buNone/>
+              <a:defRPr sz="1250" b="0">
+                <a:solidFill>
+                  <a:srgbClr val="334155"/>
+                </a:solidFill>
+                <a:latin typeface="Aptos"/>
+                <a:ea typeface="Aptos"/>
+                <a:cs typeface="Aptos"/>
+              </a:defRPr>
+            </a:pPr>
+            <a:r>
+              <a:rPr sz="1250" b="0">
+                <a:solidFill>
+                  <a:srgbClr val="334155"/>
+                </a:solidFill>
+                <a:latin typeface="Aptos"/>
+                <a:ea typeface="Aptos"/>
+                <a:cs typeface="Aptos"/>
+              </a:rPr>
+              <a:t>適合團隊電腦不同、需要系統套件、想讓 VS Code 也進容器。</a:t>
+            </a:r>
+          </a:p>
+          <a:p>
+            <a:pPr algn="l">
+              <a:lnSpc>
+                <a:spcPct val="106000"/>
+              </a:lnSpc>
+              <a:buNone/>
+              <a:defRPr sz="1250" b="1">
+                <a:solidFill>
+                  <a:srgbClr val="0B5CAD"/>
+                </a:solidFill>
+                <a:latin typeface="Aptos"/>
+                <a:ea typeface="Aptos"/>
+                <a:cs typeface="Aptos"/>
+              </a:defRPr>
+            </a:pPr>
+            <a:r>
+              <a:rPr sz="1250" b="1">
+                <a:solidFill>
+                  <a:srgbClr val="0B5CAD"/>
+                </a:solidFill>
+                <a:latin typeface="Aptos"/>
+                <a:ea typeface="Aptos"/>
+                <a:cs typeface="Aptos"/>
+              </a:rPr>
+              <a:t>外掛名稱：Dev Containers（Microsoft）</a:t>
+            </a:r>
+          </a:p>
+        </p:txBody>
+      </p:sp>
+      <p:sp>
+        <p:nvSpPr>
+          <p:cNvPr id="5" name="矩形: 圓角 4">
+            <a:extLst>
+              <a:ext uri="{FF2B5EF4-FFF2-40B4-BE49-F238E27FC236}">
+                <a16:creationId xmlns:a16="http://schemas.microsoft.com/office/drawing/2014/main" id="{67209F59-79E5-46ED-B710-7027BE031DCA}"/>
+              </a:ext>
+            </a:extLst>
+          </p:cNvPr>
+          <p:cNvSpPr>
+            <a:spLocks noGrp="1"/>
+          </p:cNvSpPr>
+          <p:nvPr/>
+        </p:nvSpPr>
+        <p:spPr>
+          <a:xfrm>
+            <a:off x="5791200" y="1495425"/>
+            <a:ext cx="4953000" cy="3152775"/>
+          </a:xfrm>
+          <a:prstGeom prst="roundRect">
+            <a:avLst>
+              <a:gd name="adj" fmla="val 8000"/>
+            </a:avLst>
+          </a:prstGeom>
+          <a:solidFill>
+            <a:srgbClr val="EAF7EF"/>
+          </a:solidFill>
+          <a:ln w="9525">
+            <a:solidFill>
+              <a:srgbClr val="B7E4C7"/>
+            </a:solidFill>
+            <a:prstDash val="solid"/>
+          </a:ln>
+        </p:spPr>
+        <p:txBody>
+          <a:bodyPr lIns="228600" tIns="228600" rIns="228600" bIns="228600" anchor="t">
+            <a:normAutofit/>
+          </a:bodyPr>
+          <a:lstStyle/>
+          <a:p>
+            <a:pPr algn="ctr">
+              <a:lnSpc>
+                <a:spcPct val="106000"/>
+              </a:lnSpc>
+              <a:buNone/>
+              <a:defRPr sz="2100" b="1">
+                <a:solidFill>
+                  <a:srgbClr val="087F5B"/>
+                </a:solidFill>
+                <a:latin typeface="Aptos Display"/>
+                <a:ea typeface="Aptos Display"/>
+                <a:cs typeface="Aptos Display"/>
+              </a:defRPr>
+            </a:pPr>
+            <a:r>
+              <a:rPr sz="2100" b="1">
+                <a:solidFill>
+                  <a:srgbClr val="087F5B"/>
+                </a:solidFill>
+                <a:latin typeface="Aptos Display"/>
+                <a:ea typeface="Aptos Display"/>
+                <a:cs typeface="Aptos Display"/>
+              </a:rPr>
+              <a:t>語言工具派</a:t>
+            </a:r>
+          </a:p>
+          <a:p>
+            <a:pPr algn="ctr">
+              <a:lnSpc>
+                <a:spcPct val="106000"/>
+              </a:lnSpc>
+              <a:buNone/>
+              <a:defRPr sz="1500" b="1">
+                <a:solidFill>
+                  <a:srgbClr val="0B1220"/>
+                </a:solidFill>
+                <a:latin typeface="Aptos"/>
+                <a:ea typeface="Aptos"/>
+                <a:cs typeface="Aptos"/>
+              </a:defRPr>
+            </a:pPr>
+            <a:r>
+              <a:rPr sz="1500" b="1">
+                <a:solidFill>
+                  <a:srgbClr val="0B1220"/>
+                </a:solidFill>
+                <a:latin typeface="Aptos"/>
+                <a:ea typeface="Aptos"/>
+                <a:cs typeface="Aptos"/>
+              </a:rPr>
+              <a:t>uv / Poetry / pip-tools</a:t>
+            </a:r>
+          </a:p>
+          <a:p>
+            <a:pPr>
+              <a:buNone/>
+              <a:defRPr sz="600"/>
+            </a:pPr>
+            <a:endParaRPr sz="1500" b="1">
+              <a:solidFill>
+                <a:srgbClr val="0B1220"/>
+              </a:solidFill>
+              <a:latin typeface="Aptos"/>
+              <a:ea typeface="Aptos"/>
+              <a:cs typeface="Aptos"/>
+            </a:endParaRPr>
+          </a:p>
+          <a:p>
+            <a:pPr algn="l">
+              <a:lnSpc>
+                <a:spcPct val="106000"/>
+              </a:lnSpc>
+              <a:buNone/>
+              <a:defRPr sz="1250" b="0">
+                <a:solidFill>
+                  <a:srgbClr val="334155"/>
+                </a:solidFill>
+                <a:latin typeface="Aptos"/>
+                <a:ea typeface="Aptos"/>
+                <a:cs typeface="Aptos"/>
+              </a:defRPr>
+            </a:pPr>
+            <a:r>
+              <a:rPr sz="1250" b="0">
+                <a:solidFill>
+                  <a:srgbClr val="334155"/>
+                </a:solidFill>
+                <a:latin typeface="Aptos"/>
+                <a:ea typeface="Aptos"/>
+                <a:cs typeface="Aptos"/>
+              </a:rPr>
+              <a:t>把「Python 版本、虛擬環境、套件版本」管理清楚。</a:t>
+            </a:r>
+          </a:p>
+          <a:p>
+            <a:pPr algn="l">
+              <a:lnSpc>
+                <a:spcPct val="106000"/>
+              </a:lnSpc>
+              <a:buNone/>
+              <a:defRPr sz="1250" b="0">
+                <a:solidFill>
+                  <a:srgbClr val="334155"/>
+                </a:solidFill>
+                <a:latin typeface="Aptos"/>
+                <a:ea typeface="Aptos"/>
+                <a:cs typeface="Aptos"/>
+              </a:defRPr>
+            </a:pPr>
+            <a:r>
+              <a:rPr sz="1250" b="0">
+                <a:solidFill>
+                  <a:srgbClr val="334155"/>
+                </a:solidFill>
+                <a:latin typeface="Aptos"/>
+                <a:ea typeface="Aptos"/>
+                <a:cs typeface="Aptos"/>
+              </a:rPr>
+              <a:t>Django / Flask 純 Python 專案很常用，啟動快、學習成本低。</a:t>
+            </a:r>
+          </a:p>
+          <a:p>
+            <a:pPr algn="l">
+              <a:lnSpc>
+                <a:spcPct val="106000"/>
+              </a:lnSpc>
+              <a:buNone/>
+              <a:defRPr sz="1250" b="1">
+                <a:solidFill>
+                  <a:srgbClr val="087F5B"/>
+                </a:solidFill>
+                <a:latin typeface="Aptos"/>
+                <a:ea typeface="Aptos"/>
+                <a:cs typeface="Aptos"/>
+              </a:defRPr>
+            </a:pPr>
+            <a:r>
+              <a:rPr sz="1250" b="1">
+                <a:solidFill>
+                  <a:srgbClr val="087F5B"/>
+                </a:solidFill>
+                <a:latin typeface="Aptos"/>
+                <a:ea typeface="Aptos"/>
+                <a:cs typeface="Aptos"/>
+              </a:rPr>
+              <a:t>重點：lock file 讓每個人裝到同一批套件。</a:t>
+            </a:r>
+          </a:p>
+        </p:txBody>
+      </p:sp>
+      <p:sp>
+        <p:nvSpPr>
+          <p:cNvPr id="6" name="矩形: 圓角 5">
+            <a:extLst>
+              <a:ext uri="{FF2B5EF4-FFF2-40B4-BE49-F238E27FC236}">
+                <a16:creationId xmlns:a16="http://schemas.microsoft.com/office/drawing/2014/main" id="{51131A42-A910-4CF1-9B8B-DC44CED3D57A}"/>
+              </a:ext>
+            </a:extLst>
+          </p:cNvPr>
+          <p:cNvSpPr>
+            <a:spLocks noGrp="1"/>
+          </p:cNvSpPr>
+          <p:nvPr/>
+        </p:nvSpPr>
+        <p:spPr>
+          <a:xfrm>
+            <a:off x="1143000" y="5029200"/>
+            <a:ext cx="9144000" cy="571500"/>
+          </a:xfrm>
+          <a:prstGeom prst="roundRect">
+            <a:avLst>
+              <a:gd name="adj" fmla="val 8000"/>
+            </a:avLst>
+          </a:prstGeom>
+          <a:solidFill>
+            <a:srgbClr val="111827"/>
+          </a:solidFill>
+          <a:ln w="0">
+            <a:noFill/>
+            <a:prstDash val="solid"/>
+          </a:ln>
+        </p:spPr>
+        <p:txBody>
+          <a:bodyPr lIns="152400" tIns="152400" rIns="152400" bIns="152400" anchor="t">
+            <a:normAutofit/>
+          </a:bodyPr>
+          <a:lstStyle/>
+          <a:p>
+            <a:pPr algn="ctr">
+              <a:lnSpc>
+                <a:spcPct val="106000"/>
+              </a:lnSpc>
+              <a:buNone/>
               <a:defRPr sz="1400" b="1">
                 <a:solidFill>
-                  <a:srgbClr val="0B1220"/>
+                  <a:srgbClr val="FFFFFF"/>
                 </a:solidFill>
                 <a:latin typeface="Aptos"/>
                 <a:ea typeface="Aptos"/>
@@ -20094,13 +20243,13 @@
             <a:r>
               <a:rPr sz="1400" b="1">
                 <a:solidFill>
-                  <a:srgbClr val="0B1220"/>
-                </a:solidFill>
-                <a:latin typeface="Aptos"/>
-                <a:ea typeface="Aptos"/>
-                <a:cs typeface="Aptos"/>
-              </a:rPr>
-              <a:t>本課程只先認識 VS Code 外掛：Dev Containers。設定檔細節等真的要把專案開進容器時再學。</a:t>
+                  <a:srgbClr val="FFFFFF"/>
+                </a:solidFill>
+                <a:latin typeface="Aptos"/>
+                <a:ea typeface="Aptos"/>
+                <a:cs typeface="Aptos"/>
+              </a:rPr>
+              <a:t>這不是部署方式的二選一，而是「日常開發環境」怎麼管理。最後上線仍然可以打包成 Docker image。</a:t>
             </a:r>
           </a:p>
         </p:txBody>
@@ -20110,7 +20259,7 @@
           <p:cNvPr id="80" name="矩形 79">
             <a:extLst>
               <a:ext uri="{FF2B5EF4-FFF2-40B4-BE49-F238E27FC236}">
-                <a16:creationId xmlns:a16="http://schemas.microsoft.com/office/drawing/2014/main" id="{7A6E95FD-54DC-4BD8-835C-BF1810678258}"/>
+                <a16:creationId xmlns:a16="http://schemas.microsoft.com/office/drawing/2014/main" id="{2298D40E-17FC-44AE-BC2B-230F73A9316F}"/>
               </a:ext>
             </a:extLst>
           </p:cNvPr>
@@ -20150,7 +20299,7 @@
           <p:cNvPr id="81" name="矩形 80">
             <a:extLst>
               <a:ext uri="{FF2B5EF4-FFF2-40B4-BE49-F238E27FC236}">
-                <a16:creationId xmlns:a16="http://schemas.microsoft.com/office/drawing/2014/main" id="{7BA9B145-D86E-4B3D-B54D-24BD2F20F7BA}"/>
+                <a16:creationId xmlns:a16="http://schemas.microsoft.com/office/drawing/2014/main" id="{C66E6F29-69AF-472B-AF9F-BB8BE03A8B64}"/>
               </a:ext>
             </a:extLst>
           </p:cNvPr>
@@ -20212,7 +20361,7 @@
           <p:cNvPr id="82" name="矩形 81">
             <a:extLst>
               <a:ext uri="{FF2B5EF4-FFF2-40B4-BE49-F238E27FC236}">
-                <a16:creationId xmlns:a16="http://schemas.microsoft.com/office/drawing/2014/main" id="{A8328211-942F-4420-91F7-45676D11892D}"/>
+                <a16:creationId xmlns:a16="http://schemas.microsoft.com/office/drawing/2014/main" id="{B4E83581-228B-4C73-8D5C-D06752AD2D63}"/>
               </a:ext>
             </a:extLst>
           </p:cNvPr>
@@ -20272,7 +20421,7 @@
     </p:spTree>
     <p:extLst>
       <p:ext uri="{BB962C8B-B14F-4D97-AF65-F5344CB8AC3E}">
-        <p14:creationId xmlns:p14="http://schemas.microsoft.com/office/powerpoint/2010/main" val="892956378"/>
+        <p14:creationId xmlns:p14="http://schemas.microsoft.com/office/powerpoint/2010/main" val="754590461"/>
       </p:ext>
     </p:extLst>
   </p:cSld>
@@ -20309,6 +20458,970 @@
       </p:grpSpPr>
       <p:sp>
         <p:nvSpPr>
+          <p:cNvPr id="2" name="矩形 1">
+            <a:extLst>
+              <a:ext uri="{FF2B5EF4-FFF2-40B4-BE49-F238E27FC236}">
+                <a16:creationId xmlns:a16="http://schemas.microsoft.com/office/drawing/2014/main" id="{B4EE934A-4CBD-446C-9D62-C4645E509043}"/>
+              </a:ext>
+            </a:extLst>
+          </p:cNvPr>
+          <p:cNvSpPr>
+            <a:spLocks noGrp="1"/>
+          </p:cNvSpPr>
+          <p:nvPr/>
+        </p:nvSpPr>
+        <p:spPr>
+          <a:xfrm>
+            <a:off x="609600" y="400050"/>
+            <a:ext cx="6191250" cy="228600"/>
+          </a:xfrm>
+          <a:prstGeom prst="rect">
+            <a:avLst/>
+          </a:prstGeom>
+          <a:noFill/>
+          <a:ln w="0">
+            <a:noFill/>
+            <a:prstDash val="solid"/>
+          </a:ln>
+        </p:spPr>
+        <p:txBody>
+          <a:bodyPr lIns="0" tIns="0" rIns="0" bIns="0" anchor="t">
+            <a:normAutofit/>
+          </a:bodyPr>
+          <a:lstStyle/>
+          <a:p>
+            <a:pPr algn="l">
+              <a:lnSpc>
+                <a:spcPct val="106000"/>
+              </a:lnSpc>
+              <a:buNone/>
+              <a:defRPr sz="900" b="1">
+                <a:solidFill>
+                  <a:srgbClr val="0B5CAD"/>
+                </a:solidFill>
+                <a:latin typeface="Aptos"/>
+                <a:ea typeface="Aptos"/>
+                <a:cs typeface="Aptos"/>
+              </a:defRPr>
+            </a:pPr>
+            <a:r>
+              <a:rPr sz="900" b="1">
+                <a:solidFill>
+                  <a:srgbClr val="0B5CAD"/>
+                </a:solidFill>
+                <a:latin typeface="Aptos"/>
+                <a:ea typeface="Aptos"/>
+                <a:cs typeface="Aptos"/>
+              </a:rPr>
+              <a:t>DEVELOPMENT WORKFLOW</a:t>
+            </a:r>
+          </a:p>
+        </p:txBody>
+      </p:sp>
+      <p:sp>
+        <p:nvSpPr>
+          <p:cNvPr id="3" name="矩形 2">
+            <a:extLst>
+              <a:ext uri="{FF2B5EF4-FFF2-40B4-BE49-F238E27FC236}">
+                <a16:creationId xmlns:a16="http://schemas.microsoft.com/office/drawing/2014/main" id="{92CD948F-13CC-4011-9A23-C57038AF2846}"/>
+              </a:ext>
+            </a:extLst>
+          </p:cNvPr>
+          <p:cNvSpPr>
+            <a:spLocks noGrp="1"/>
+          </p:cNvSpPr>
+          <p:nvPr/>
+        </p:nvSpPr>
+        <p:spPr>
+          <a:xfrm>
+            <a:off x="609600" y="742950"/>
+            <a:ext cx="9906000" cy="571500"/>
+          </a:xfrm>
+          <a:prstGeom prst="rect">
+            <a:avLst/>
+          </a:prstGeom>
+          <a:noFill/>
+          <a:ln w="0">
+            <a:noFill/>
+            <a:prstDash val="solid"/>
+          </a:ln>
+        </p:spPr>
+        <p:txBody>
+          <a:bodyPr lIns="0" tIns="0" rIns="0" bIns="0" anchor="t">
+            <a:normAutofit/>
+          </a:bodyPr>
+          <a:lstStyle/>
+          <a:p>
+            <a:pPr algn="l">
+              <a:lnSpc>
+                <a:spcPct val="106000"/>
+              </a:lnSpc>
+              <a:buNone/>
+              <a:defRPr sz="2800" b="1">
+                <a:solidFill>
+                  <a:srgbClr val="0B1220"/>
+                </a:solidFill>
+                <a:latin typeface="Aptos Display"/>
+                <a:ea typeface="Aptos Display"/>
+                <a:cs typeface="Aptos Display"/>
+              </a:defRPr>
+            </a:pPr>
+            <a:r>
+              <a:rPr sz="2800" b="1">
+                <a:solidFill>
+                  <a:srgbClr val="0B1220"/>
+                </a:solidFill>
+                <a:latin typeface="Aptos Display"/>
+                <a:ea typeface="Aptos Display"/>
+                <a:cs typeface="Aptos Display"/>
+              </a:rPr>
+              <a:t>什麼時候用 Dev Containers，什麼時候用 uv / Poetry？</a:t>
+            </a:r>
+          </a:p>
+        </p:txBody>
+      </p:sp>
+      <p:sp>
+        <p:nvSpPr>
+          <p:cNvPr id="4" name="矩形: 圓角 3">
+            <a:extLst>
+              <a:ext uri="{FF2B5EF4-FFF2-40B4-BE49-F238E27FC236}">
+                <a16:creationId xmlns:a16="http://schemas.microsoft.com/office/drawing/2014/main" id="{83D0CBFB-66DF-453E-BFF1-73502C94D31B}"/>
+              </a:ext>
+            </a:extLst>
+          </p:cNvPr>
+          <p:cNvSpPr>
+            <a:spLocks noGrp="1"/>
+          </p:cNvSpPr>
+          <p:nvPr/>
+        </p:nvSpPr>
+        <p:spPr>
+          <a:xfrm>
+            <a:off x="609600" y="1447800"/>
+            <a:ext cx="3429000" cy="3048000"/>
+          </a:xfrm>
+          <a:prstGeom prst="roundRect">
+            <a:avLst>
+              <a:gd name="adj" fmla="val 8000"/>
+            </a:avLst>
+          </a:prstGeom>
+          <a:solidFill>
+            <a:srgbClr val="FFFFFF"/>
+          </a:solidFill>
+          <a:ln w="9525">
+            <a:solidFill>
+              <a:srgbClr val="B7DCFF"/>
+            </a:solidFill>
+            <a:prstDash val="solid"/>
+          </a:ln>
+        </p:spPr>
+        <p:txBody>
+          <a:bodyPr lIns="209550" tIns="209550" rIns="209550" bIns="209550" anchor="t">
+            <a:normAutofit/>
+          </a:bodyPr>
+          <a:lstStyle/>
+          <a:p>
+            <a:pPr algn="ctr">
+              <a:lnSpc>
+                <a:spcPct val="106000"/>
+              </a:lnSpc>
+              <a:buNone/>
+              <a:defRPr sz="1775" b="1">
+                <a:solidFill>
+                  <a:srgbClr val="0B5CAD"/>
+                </a:solidFill>
+                <a:latin typeface="Aptos Display"/>
+                <a:ea typeface="Aptos Display"/>
+                <a:cs typeface="Aptos Display"/>
+              </a:defRPr>
+            </a:pPr>
+            <a:r>
+              <a:rPr sz="1775" b="1">
+                <a:solidFill>
+                  <a:srgbClr val="0B5CAD"/>
+                </a:solidFill>
+                <a:latin typeface="Aptos Display"/>
+                <a:ea typeface="Aptos Display"/>
+                <a:cs typeface="Aptos Display"/>
+              </a:rPr>
+              <a:t>選 Dev Containers</a:t>
+            </a:r>
+          </a:p>
+          <a:p>
+            <a:pPr>
+              <a:buNone/>
+              <a:defRPr sz="600"/>
+            </a:pPr>
+            <a:endParaRPr sz="1775" b="1">
+              <a:solidFill>
+                <a:srgbClr val="0B5CAD"/>
+              </a:solidFill>
+              <a:latin typeface="Aptos Display"/>
+              <a:ea typeface="Aptos Display"/>
+              <a:cs typeface="Aptos Display"/>
+            </a:endParaRPr>
+          </a:p>
+          <a:p>
+            <a:pPr algn="l">
+              <a:lnSpc>
+                <a:spcPct val="106000"/>
+              </a:lnSpc>
+              <a:buNone/>
+              <a:defRPr sz="1275" b="1">
+                <a:solidFill>
+                  <a:srgbClr val="111827"/>
+                </a:solidFill>
+                <a:latin typeface="Aptos"/>
+                <a:ea typeface="Aptos"/>
+                <a:cs typeface="Aptos"/>
+              </a:defRPr>
+            </a:pPr>
+            <a:r>
+              <a:rPr sz="1275" b="1">
+                <a:solidFill>
+                  <a:srgbClr val="111827"/>
+                </a:solidFill>
+                <a:latin typeface="Aptos"/>
+                <a:ea typeface="Aptos"/>
+                <a:cs typeface="Aptos"/>
+              </a:rPr>
+              <a:t>團隊成員的 OS 不同</a:t>
+            </a:r>
+          </a:p>
+          <a:p>
+            <a:pPr algn="l">
+              <a:lnSpc>
+                <a:spcPct val="106000"/>
+              </a:lnSpc>
+              <a:buNone/>
+              <a:defRPr sz="1200" b="0">
+                <a:solidFill>
+                  <a:srgbClr val="334155"/>
+                </a:solidFill>
+                <a:latin typeface="Aptos"/>
+                <a:ea typeface="Aptos"/>
+                <a:cs typeface="Aptos"/>
+              </a:defRPr>
+            </a:pPr>
+            <a:r>
+              <a:rPr sz="1200" b="0">
+                <a:solidFill>
+                  <a:srgbClr val="334155"/>
+                </a:solidFill>
+                <a:latin typeface="Aptos"/>
+                <a:ea typeface="Aptos"/>
+                <a:cs typeface="Aptos"/>
+              </a:rPr>
+              <a:t>需要 apt、系統函式庫或 CLI 工具</a:t>
+            </a:r>
+          </a:p>
+          <a:p>
+            <a:pPr algn="l">
+              <a:lnSpc>
+                <a:spcPct val="106000"/>
+              </a:lnSpc>
+              <a:buNone/>
+              <a:defRPr sz="1200" b="0">
+                <a:solidFill>
+                  <a:srgbClr val="334155"/>
+                </a:solidFill>
+                <a:latin typeface="Aptos"/>
+                <a:ea typeface="Aptos"/>
+                <a:cs typeface="Aptos"/>
+              </a:defRPr>
+            </a:pPr>
+            <a:r>
+              <a:rPr sz="1200" b="0">
+                <a:solidFill>
+                  <a:srgbClr val="334155"/>
+                </a:solidFill>
+                <a:latin typeface="Aptos"/>
+                <a:ea typeface="Aptos"/>
+                <a:cs typeface="Aptos"/>
+              </a:rPr>
+              <a:t>想讓 terminal / debugger 都在容器裡</a:t>
+            </a:r>
+          </a:p>
+          <a:p>
+            <a:pPr algn="l">
+              <a:lnSpc>
+                <a:spcPct val="106000"/>
+              </a:lnSpc>
+              <a:buNone/>
+              <a:defRPr sz="1200" b="0">
+                <a:solidFill>
+                  <a:srgbClr val="334155"/>
+                </a:solidFill>
+                <a:latin typeface="Aptos"/>
+                <a:ea typeface="Aptos"/>
+                <a:cs typeface="Aptos"/>
+              </a:defRPr>
+            </a:pPr>
+            <a:r>
+              <a:rPr sz="1200" b="0">
+                <a:solidFill>
+                  <a:srgbClr val="334155"/>
+                </a:solidFill>
+                <a:latin typeface="Aptos"/>
+                <a:ea typeface="Aptos"/>
+                <a:cs typeface="Aptos"/>
+              </a:rPr>
+              <a:t>想靠近 production image 的環境</a:t>
+            </a:r>
+          </a:p>
+        </p:txBody>
+      </p:sp>
+      <p:sp>
+        <p:nvSpPr>
+          <p:cNvPr id="5" name="矩形: 圓角 4">
+            <a:extLst>
+              <a:ext uri="{FF2B5EF4-FFF2-40B4-BE49-F238E27FC236}">
+                <a16:creationId xmlns:a16="http://schemas.microsoft.com/office/drawing/2014/main" id="{F427EAD4-63AD-49C6-A054-847F82034280}"/>
+              </a:ext>
+            </a:extLst>
+          </p:cNvPr>
+          <p:cNvSpPr>
+            <a:spLocks noGrp="1"/>
+          </p:cNvSpPr>
+          <p:nvPr/>
+        </p:nvSpPr>
+        <p:spPr>
+          <a:xfrm>
+            <a:off x="4381500" y="1447800"/>
+            <a:ext cx="3429000" cy="3048000"/>
+          </a:xfrm>
+          <a:prstGeom prst="roundRect">
+            <a:avLst>
+              <a:gd name="adj" fmla="val 8000"/>
+            </a:avLst>
+          </a:prstGeom>
+          <a:solidFill>
+            <a:srgbClr val="FFFFFF"/>
+          </a:solidFill>
+          <a:ln w="9525">
+            <a:solidFill>
+              <a:srgbClr val="B7E4C7"/>
+            </a:solidFill>
+            <a:prstDash val="solid"/>
+          </a:ln>
+        </p:spPr>
+        <p:txBody>
+          <a:bodyPr lIns="209550" tIns="209550" rIns="209550" bIns="209550" anchor="t">
+            <a:normAutofit/>
+          </a:bodyPr>
+          <a:lstStyle/>
+          <a:p>
+            <a:pPr algn="ctr">
+              <a:lnSpc>
+                <a:spcPct val="106000"/>
+              </a:lnSpc>
+              <a:buNone/>
+              <a:defRPr sz="1775" b="1">
+                <a:solidFill>
+                  <a:srgbClr val="087F5B"/>
+                </a:solidFill>
+                <a:latin typeface="Aptos Display"/>
+                <a:ea typeface="Aptos Display"/>
+                <a:cs typeface="Aptos Display"/>
+              </a:defRPr>
+            </a:pPr>
+            <a:r>
+              <a:rPr sz="1775" b="1">
+                <a:solidFill>
+                  <a:srgbClr val="087F5B"/>
+                </a:solidFill>
+                <a:latin typeface="Aptos Display"/>
+                <a:ea typeface="Aptos Display"/>
+                <a:cs typeface="Aptos Display"/>
+              </a:rPr>
+              <a:t>選 uv / Poetry</a:t>
+            </a:r>
+          </a:p>
+          <a:p>
+            <a:pPr>
+              <a:buNone/>
+              <a:defRPr sz="600"/>
+            </a:pPr>
+            <a:endParaRPr sz="1775" b="1">
+              <a:solidFill>
+                <a:srgbClr val="087F5B"/>
+              </a:solidFill>
+              <a:latin typeface="Aptos Display"/>
+              <a:ea typeface="Aptos Display"/>
+              <a:cs typeface="Aptos Display"/>
+            </a:endParaRPr>
+          </a:p>
+          <a:p>
+            <a:pPr algn="l">
+              <a:lnSpc>
+                <a:spcPct val="106000"/>
+              </a:lnSpc>
+              <a:buNone/>
+              <a:defRPr sz="1275" b="1">
+                <a:solidFill>
+                  <a:srgbClr val="111827"/>
+                </a:solidFill>
+                <a:latin typeface="Aptos"/>
+                <a:ea typeface="Aptos"/>
+                <a:cs typeface="Aptos"/>
+              </a:defRPr>
+            </a:pPr>
+            <a:r>
+              <a:rPr sz="1275" b="1">
+                <a:solidFill>
+                  <a:srgbClr val="111827"/>
+                </a:solidFill>
+                <a:latin typeface="Aptos"/>
+                <a:ea typeface="Aptos"/>
+                <a:cs typeface="Aptos"/>
+              </a:rPr>
+              <a:t>主要問題是 Python 套件版本</a:t>
+            </a:r>
+          </a:p>
+          <a:p>
+            <a:pPr algn="l">
+              <a:lnSpc>
+                <a:spcPct val="106000"/>
+              </a:lnSpc>
+              <a:buNone/>
+              <a:defRPr sz="1200" b="0">
+                <a:solidFill>
+                  <a:srgbClr val="334155"/>
+                </a:solidFill>
+                <a:latin typeface="Aptos"/>
+                <a:ea typeface="Aptos"/>
+                <a:cs typeface="Aptos"/>
+              </a:defRPr>
+            </a:pPr>
+            <a:r>
+              <a:rPr sz="1200" b="0">
+                <a:solidFill>
+                  <a:srgbClr val="334155"/>
+                </a:solidFill>
+                <a:latin typeface="Aptos"/>
+                <a:ea typeface="Aptos"/>
+                <a:cs typeface="Aptos"/>
+              </a:rPr>
+              <a:t>本機開發就很順，不想整個 IDE 進容器</a:t>
+            </a:r>
+          </a:p>
+          <a:p>
+            <a:pPr algn="l">
+              <a:lnSpc>
+                <a:spcPct val="106000"/>
+              </a:lnSpc>
+              <a:buNone/>
+              <a:defRPr sz="1200" b="0">
+                <a:solidFill>
+                  <a:srgbClr val="334155"/>
+                </a:solidFill>
+                <a:latin typeface="Aptos"/>
+                <a:ea typeface="Aptos"/>
+                <a:cs typeface="Aptos"/>
+              </a:defRPr>
+            </a:pPr>
+            <a:r>
+              <a:rPr sz="1200" b="0">
+                <a:solidFill>
+                  <a:srgbClr val="334155"/>
+                </a:solidFill>
+                <a:latin typeface="Aptos"/>
+                <a:ea typeface="Aptos"/>
+                <a:cs typeface="Aptos"/>
+              </a:rPr>
+              <a:t>Django / Flask 專案要快速建立 venv</a:t>
+            </a:r>
+          </a:p>
+          <a:p>
+            <a:pPr algn="l">
+              <a:lnSpc>
+                <a:spcPct val="106000"/>
+              </a:lnSpc>
+              <a:buNone/>
+              <a:defRPr sz="1200" b="0">
+                <a:solidFill>
+                  <a:srgbClr val="334155"/>
+                </a:solidFill>
+                <a:latin typeface="Aptos"/>
+                <a:ea typeface="Aptos"/>
+                <a:cs typeface="Aptos"/>
+              </a:defRPr>
+            </a:pPr>
+            <a:r>
+              <a:rPr sz="1200" b="0">
+                <a:solidFill>
+                  <a:srgbClr val="334155"/>
+                </a:solidFill>
+                <a:latin typeface="Aptos"/>
+                <a:ea typeface="Aptos"/>
+                <a:cs typeface="Aptos"/>
+              </a:rPr>
+              <a:t>用 lock file 固定依賴版本</a:t>
+            </a:r>
+          </a:p>
+        </p:txBody>
+      </p:sp>
+      <p:sp>
+        <p:nvSpPr>
+          <p:cNvPr id="6" name="矩形: 圓角 5">
+            <a:extLst>
+              <a:ext uri="{FF2B5EF4-FFF2-40B4-BE49-F238E27FC236}">
+                <a16:creationId xmlns:a16="http://schemas.microsoft.com/office/drawing/2014/main" id="{06D4AB3B-CB7C-43E8-8FBF-44CC2B680F6D}"/>
+              </a:ext>
+            </a:extLst>
+          </p:cNvPr>
+          <p:cNvSpPr>
+            <a:spLocks noGrp="1"/>
+          </p:cNvSpPr>
+          <p:nvPr/>
+        </p:nvSpPr>
+        <p:spPr>
+          <a:xfrm>
+            <a:off x="8153400" y="1447800"/>
+            <a:ext cx="3429000" cy="3048000"/>
+          </a:xfrm>
+          <a:prstGeom prst="roundRect">
+            <a:avLst>
+              <a:gd name="adj" fmla="val 8000"/>
+            </a:avLst>
+          </a:prstGeom>
+          <a:solidFill>
+            <a:srgbClr val="FFF7E6"/>
+          </a:solidFill>
+          <a:ln w="9525">
+            <a:solidFill>
+              <a:srgbClr val="FFD999"/>
+            </a:solidFill>
+            <a:prstDash val="solid"/>
+          </a:ln>
+        </p:spPr>
+        <p:txBody>
+          <a:bodyPr lIns="209550" tIns="209550" rIns="209550" bIns="209550" anchor="t">
+            <a:normAutofit/>
+          </a:bodyPr>
+          <a:lstStyle/>
+          <a:p>
+            <a:pPr algn="ctr">
+              <a:lnSpc>
+                <a:spcPct val="106000"/>
+              </a:lnSpc>
+              <a:buNone/>
+              <a:defRPr sz="1775" b="1">
+                <a:solidFill>
+                  <a:srgbClr val="A16207"/>
+                </a:solidFill>
+                <a:latin typeface="Aptos Display"/>
+                <a:ea typeface="Aptos Display"/>
+                <a:cs typeface="Aptos Display"/>
+              </a:defRPr>
+            </a:pPr>
+            <a:r>
+              <a:rPr sz="1775" b="1">
+                <a:solidFill>
+                  <a:srgbClr val="A16207"/>
+                </a:solidFill>
+                <a:latin typeface="Aptos Display"/>
+                <a:ea typeface="Aptos Display"/>
+                <a:cs typeface="Aptos Display"/>
+              </a:rPr>
+              <a:t>實務上可混用</a:t>
+            </a:r>
+          </a:p>
+          <a:p>
+            <a:pPr>
+              <a:buNone/>
+              <a:defRPr sz="600"/>
+            </a:pPr>
+            <a:endParaRPr sz="1775" b="1">
+              <a:solidFill>
+                <a:srgbClr val="A16207"/>
+              </a:solidFill>
+              <a:latin typeface="Aptos Display"/>
+              <a:ea typeface="Aptos Display"/>
+              <a:cs typeface="Aptos Display"/>
+            </a:endParaRPr>
+          </a:p>
+          <a:p>
+            <a:pPr algn="l">
+              <a:lnSpc>
+                <a:spcPct val="106000"/>
+              </a:lnSpc>
+              <a:buNone/>
+              <a:defRPr sz="1275" b="1">
+                <a:solidFill>
+                  <a:srgbClr val="111827"/>
+                </a:solidFill>
+                <a:latin typeface="Aptos"/>
+                <a:ea typeface="Aptos"/>
+                <a:cs typeface="Aptos"/>
+              </a:defRPr>
+            </a:pPr>
+            <a:r>
+              <a:rPr sz="1275" b="1">
+                <a:solidFill>
+                  <a:srgbClr val="111827"/>
+                </a:solidFill>
+                <a:latin typeface="Aptos"/>
+                <a:ea typeface="Aptos"/>
+                <a:cs typeface="Aptos"/>
+              </a:rPr>
+              <a:t>容器管 OS 與工具</a:t>
+            </a:r>
+          </a:p>
+          <a:p>
+            <a:pPr algn="l">
+              <a:lnSpc>
+                <a:spcPct val="106000"/>
+              </a:lnSpc>
+              <a:buNone/>
+              <a:defRPr sz="1200" b="0">
+                <a:solidFill>
+                  <a:srgbClr val="334155"/>
+                </a:solidFill>
+                <a:latin typeface="Aptos"/>
+                <a:ea typeface="Aptos"/>
+                <a:cs typeface="Aptos"/>
+              </a:defRPr>
+            </a:pPr>
+            <a:r>
+              <a:rPr sz="1200" b="0">
+                <a:solidFill>
+                  <a:srgbClr val="334155"/>
+                </a:solidFill>
+                <a:latin typeface="Aptos"/>
+                <a:ea typeface="Aptos"/>
+                <a:cs typeface="Aptos"/>
+              </a:rPr>
+              <a:t>uv / Poetry 管 Python packages</a:t>
+            </a:r>
+          </a:p>
+          <a:p>
+            <a:pPr algn="l">
+              <a:lnSpc>
+                <a:spcPct val="106000"/>
+              </a:lnSpc>
+              <a:buNone/>
+              <a:defRPr sz="1200" b="0">
+                <a:solidFill>
+                  <a:srgbClr val="334155"/>
+                </a:solidFill>
+                <a:latin typeface="Aptos"/>
+                <a:ea typeface="Aptos"/>
+                <a:cs typeface="Aptos"/>
+              </a:defRPr>
+            </a:pPr>
+            <a:r>
+              <a:rPr sz="1200" b="0">
+                <a:solidFill>
+                  <a:srgbClr val="334155"/>
+                </a:solidFill>
+                <a:latin typeface="Aptos"/>
+                <a:ea typeface="Aptos"/>
+                <a:cs typeface="Aptos"/>
+              </a:rPr>
+              <a:t>Dockerfile 管部署 image</a:t>
+            </a:r>
+          </a:p>
+          <a:p>
+            <a:pPr algn="l">
+              <a:lnSpc>
+                <a:spcPct val="106000"/>
+              </a:lnSpc>
+              <a:buNone/>
+              <a:defRPr sz="1200" b="0">
+                <a:solidFill>
+                  <a:srgbClr val="334155"/>
+                </a:solidFill>
+                <a:latin typeface="Aptos"/>
+                <a:ea typeface="Aptos"/>
+                <a:cs typeface="Aptos"/>
+              </a:defRPr>
+            </a:pPr>
+            <a:r>
+              <a:rPr sz="1200" b="0">
+                <a:solidFill>
+                  <a:srgbClr val="334155"/>
+                </a:solidFill>
+                <a:latin typeface="Aptos"/>
+                <a:ea typeface="Aptos"/>
+                <a:cs typeface="Aptos"/>
+              </a:rPr>
+              <a:t>先選最能降低混亂的那一層</a:t>
+            </a:r>
+          </a:p>
+        </p:txBody>
+      </p:sp>
+      <p:sp>
+        <p:nvSpPr>
+          <p:cNvPr id="7" name="矩形: 圓角 6">
+            <a:extLst>
+              <a:ext uri="{FF2B5EF4-FFF2-40B4-BE49-F238E27FC236}">
+                <a16:creationId xmlns:a16="http://schemas.microsoft.com/office/drawing/2014/main" id="{5E02D16F-F184-428A-8CE9-B6C5342B00B3}"/>
+              </a:ext>
+            </a:extLst>
+          </p:cNvPr>
+          <p:cNvSpPr>
+            <a:spLocks noGrp="1"/>
+          </p:cNvSpPr>
+          <p:nvPr/>
+        </p:nvSpPr>
+        <p:spPr>
+          <a:xfrm>
+            <a:off x="1143000" y="4933950"/>
+            <a:ext cx="9144000" cy="628650"/>
+          </a:xfrm>
+          <a:prstGeom prst="roundRect">
+            <a:avLst>
+              <a:gd name="adj" fmla="val 8000"/>
+            </a:avLst>
+          </a:prstGeom>
+          <a:solidFill>
+            <a:srgbClr val="E8F3FF"/>
+          </a:solidFill>
+          <a:ln w="9525">
+            <a:solidFill>
+              <a:srgbClr val="B7DCFF"/>
+            </a:solidFill>
+            <a:prstDash val="solid"/>
+          </a:ln>
+        </p:spPr>
+        <p:txBody>
+          <a:bodyPr lIns="152400" tIns="152400" rIns="152400" bIns="152400" anchor="t">
+            <a:normAutofit/>
+          </a:bodyPr>
+          <a:lstStyle/>
+          <a:p>
+            <a:pPr algn="ctr">
+              <a:lnSpc>
+                <a:spcPct val="106000"/>
+              </a:lnSpc>
+              <a:buNone/>
+              <a:defRPr sz="1400" b="1">
+                <a:solidFill>
+                  <a:srgbClr val="0B1220"/>
+                </a:solidFill>
+                <a:latin typeface="Aptos"/>
+                <a:ea typeface="Aptos"/>
+                <a:cs typeface="Aptos"/>
+              </a:defRPr>
+            </a:pPr>
+            <a:r>
+              <a:rPr sz="1400" b="1">
+                <a:solidFill>
+                  <a:srgbClr val="0B1220"/>
+                </a:solidFill>
+                <a:latin typeface="Aptos"/>
+                <a:ea typeface="Aptos"/>
+                <a:cs typeface="Aptos"/>
+              </a:rPr>
+              <a:t>本課程只先認識 VS Code 外掛：Dev Containers。設定檔細節等真的要把專案開進容器時再學。</a:t>
+            </a:r>
+          </a:p>
+        </p:txBody>
+      </p:sp>
+      <p:sp>
+        <p:nvSpPr>
+          <p:cNvPr id="80" name="矩形 79">
+            <a:extLst>
+              <a:ext uri="{FF2B5EF4-FFF2-40B4-BE49-F238E27FC236}">
+                <a16:creationId xmlns:a16="http://schemas.microsoft.com/office/drawing/2014/main" id="{7A6E95FD-54DC-4BD8-835C-BF1810678258}"/>
+              </a:ext>
+            </a:extLst>
+          </p:cNvPr>
+          <p:cNvSpPr>
+            <a:spLocks noGrp="1"/>
+          </p:cNvSpPr>
+          <p:nvPr/>
+        </p:nvSpPr>
+        <p:spPr>
+          <a:xfrm>
+            <a:off x="609600" y="6305550"/>
+            <a:ext cx="9906000" cy="13335"/>
+          </a:xfrm>
+          <a:prstGeom prst="rect">
+            <a:avLst/>
+          </a:prstGeom>
+          <a:solidFill>
+            <a:srgbClr val="D9E2EC"/>
+          </a:solidFill>
+          <a:ln w="0">
+            <a:noFill/>
+            <a:prstDash val="solid"/>
+          </a:ln>
+        </p:spPr>
+        <p:txBody>
+          <a:bodyPr lIns="0" tIns="0" rIns="0" bIns="0" anchor="t">
+            <a:normAutofit fontScale="25000" lnSpcReduction="20000"/>
+          </a:bodyPr>
+          <a:lstStyle/>
+          <a:p>
+            <a:endParaRPr/>
+          </a:p>
+        </p:txBody>
+      </p:sp>
+      <p:sp>
+        <p:nvSpPr>
+          <p:cNvPr id="81" name="矩形 80">
+            <a:extLst>
+              <a:ext uri="{FF2B5EF4-FFF2-40B4-BE49-F238E27FC236}">
+                <a16:creationId xmlns:a16="http://schemas.microsoft.com/office/drawing/2014/main" id="{7BA9B145-D86E-4B3D-B54D-24BD2F20F7BA}"/>
+              </a:ext>
+            </a:extLst>
+          </p:cNvPr>
+          <p:cNvSpPr>
+            <a:spLocks noGrp="1"/>
+          </p:cNvSpPr>
+          <p:nvPr/>
+        </p:nvSpPr>
+        <p:spPr>
+          <a:xfrm>
+            <a:off x="609600" y="6400800"/>
+            <a:ext cx="2762250" cy="171450"/>
+          </a:xfrm>
+          <a:prstGeom prst="rect">
+            <a:avLst/>
+          </a:prstGeom>
+          <a:noFill/>
+          <a:ln w="0">
+            <a:noFill/>
+            <a:prstDash val="solid"/>
+          </a:ln>
+        </p:spPr>
+        <p:txBody>
+          <a:bodyPr lIns="0" tIns="0" rIns="0" bIns="0" anchor="t">
+            <a:normAutofit/>
+          </a:bodyPr>
+          <a:lstStyle/>
+          <a:p>
+            <a:pPr algn="l">
+              <a:lnSpc>
+                <a:spcPct val="106000"/>
+              </a:lnSpc>
+              <a:buNone/>
+              <a:defRPr sz="825" b="0">
+                <a:solidFill>
+                  <a:srgbClr val="64748B"/>
+                </a:solidFill>
+                <a:latin typeface="Aptos"/>
+                <a:ea typeface="Aptos"/>
+                <a:cs typeface="Aptos"/>
+              </a:defRPr>
+            </a:pPr>
+            <a:r>
+              <a:rPr sz="825" b="0">
+                <a:solidFill>
+                  <a:srgbClr val="64748B"/>
+                </a:solidFill>
+                <a:latin typeface="Aptos"/>
+                <a:ea typeface="Aptos"/>
+                <a:cs typeface="Aptos"/>
+              </a:rPr>
+              <a:t>Docker 基礎教學 | 第 4 堂</a:t>
+            </a:r>
+          </a:p>
+        </p:txBody>
+      </p:sp>
+      <p:sp>
+        <p:nvSpPr>
+          <p:cNvPr id="82" name="矩形 81">
+            <a:extLst>
+              <a:ext uri="{FF2B5EF4-FFF2-40B4-BE49-F238E27FC236}">
+                <a16:creationId xmlns:a16="http://schemas.microsoft.com/office/drawing/2014/main" id="{A8328211-942F-4420-91F7-45676D11892D}"/>
+              </a:ext>
+            </a:extLst>
+          </p:cNvPr>
+          <p:cNvSpPr>
+            <a:spLocks noGrp="1"/>
+          </p:cNvSpPr>
+          <p:nvPr/>
+        </p:nvSpPr>
+        <p:spPr>
+          <a:xfrm>
+            <a:off x="10858500" y="6381750"/>
+            <a:ext cx="723900" cy="190500"/>
+          </a:xfrm>
+          <a:prstGeom prst="rect">
+            <a:avLst/>
+          </a:prstGeom>
+          <a:noFill/>
+          <a:ln w="0">
+            <a:noFill/>
+            <a:prstDash val="solid"/>
+          </a:ln>
+        </p:spPr>
+        <p:txBody>
+          <a:bodyPr lIns="0" tIns="0" rIns="0" bIns="0" anchor="t">
+            <a:normAutofit/>
+          </a:bodyPr>
+          <a:lstStyle/>
+          <a:p>
+            <a:pPr algn="r">
+              <a:lnSpc>
+                <a:spcPct val="106000"/>
+              </a:lnSpc>
+              <a:buNone/>
+              <a:defRPr sz="900" b="1">
+                <a:solidFill>
+                  <a:srgbClr val="64748B"/>
+                </a:solidFill>
+                <a:latin typeface="Aptos"/>
+                <a:ea typeface="Aptos"/>
+                <a:cs typeface="Aptos"/>
+              </a:defRPr>
+            </a:pPr>
+            <a:r>
+              <a:rPr sz="900" b="1">
+                <a:solidFill>
+                  <a:srgbClr val="64748B"/>
+                </a:solidFill>
+                <a:latin typeface="Aptos"/>
+                <a:ea typeface="Aptos"/>
+                <a:cs typeface="Aptos"/>
+              </a:rPr>
+              <a:t>DEV</a:t>
+            </a:r>
+          </a:p>
+        </p:txBody>
+      </p:sp>
+    </p:spTree>
+    <p:extLst>
+      <p:ext uri="{BB962C8B-B14F-4D97-AF65-F5344CB8AC3E}">
+        <p14:creationId xmlns:p14="http://schemas.microsoft.com/office/powerpoint/2010/main" val="892956378"/>
+      </p:ext>
+    </p:extLst>
+  </p:cSld>
+  <p:clrMapOvr>
+    <a:masterClrMapping/>
+  </p:clrMapOvr>
+</p:sld>
+</file>
+
+<file path=ppt/slides/slide27.xml><?xml version="1.0" encoding="utf-8"?>
+<p:sld xmlns:a="http://schemas.openxmlformats.org/drawingml/2006/main" xmlns:r="http://schemas.openxmlformats.org/officeDocument/2006/relationships" xmlns:p="http://schemas.openxmlformats.org/presentationml/2006/main">
+  <p:cSld>
+    <p:bg>
+      <p:bgPr>
+        <a:solidFill>
+          <a:srgbClr val="F6F8FB"/>
+        </a:solidFill>
+        <a:effectLst/>
+      </p:bgPr>
+    </p:bg>
+    <p:spTree>
+      <p:nvGrpSpPr>
+        <p:cNvPr id="1" name=""/>
+        <p:cNvGrpSpPr/>
+        <p:nvPr/>
+      </p:nvGrpSpPr>
+      <p:grpSpPr>
+        <a:xfrm>
+          <a:off x="0" y="0"/>
+          <a:ext cx="0" cy="0"/>
+          <a:chOff x="0" y="0"/>
+          <a:chExt cx="0" cy="0"/>
+        </a:xfrm>
+      </p:grpSpPr>
+      <p:sp>
+        <p:nvSpPr>
           <p:cNvPr id="17" name="矩形 16">
             <a:extLst>
               <a:ext uri="{FF2B5EF4-FFF2-40B4-BE49-F238E27FC236}">
@@ -20951,8 +22064,8 @@
         </p:nvSpPr>
         <p:spPr>
           <a:xfrm>
-            <a:off x="2381250" y="4914900"/>
-            <a:ext cx="7429500" cy="895350"/>
+            <a:off x="2381250" y="4914899"/>
+            <a:ext cx="7429500" cy="1390651"/>
           </a:xfrm>
           <a:prstGeom prst="roundRect">
             <a:avLst>
@@ -21120,7 +22233,7 @@
         <p:spPr>
           <a:xfrm>
             <a:off x="2590800" y="5334000"/>
-            <a:ext cx="7010400" cy="342900"/>
+            <a:ext cx="7010400" cy="781050"/>
           </a:xfrm>
           <a:prstGeom prst="rect">
             <a:avLst/>
@@ -21133,7 +22246,7 @@
         </p:spPr>
         <p:txBody>
           <a:bodyPr lIns="0" tIns="0" rIns="0" bIns="0" anchor="t">
-            <a:normAutofit fontScale="80559" lnSpcReduction="20000"/>
+            <a:normAutofit fontScale="88059" lnSpcReduction="20000"/>
           </a:bodyPr>
           <a:lstStyle/>
           <a:p>
@@ -21152,7 +22265,7 @@
               </a:defRPr>
             </a:pPr>
             <a:r>
-              <a:rPr sz="1650" b="0">
+              <a:rPr sz="1650" b="0" dirty="0">
                 <a:solidFill>
                   <a:srgbClr val="E5E7EB"/>
                 </a:solidFill>
@@ -21179,7 +22292,7 @@
               </a:defRPr>
             </a:pPr>
             <a:r>
-              <a:rPr sz="1650" b="0">
+              <a:rPr sz="1650" b="0" dirty="0">
                 <a:solidFill>
                   <a:srgbClr val="E5E7EB"/>
                 </a:solidFill>
@@ -21187,8 +22300,148 @@
                 <a:ea typeface="Consolas"/>
                 <a:cs typeface="Consolas"/>
               </a:rPr>
-              <a:t>docker load -i my-flask-app.tar</a:t>
-            </a:r>
+              <a:t>docker load -</a:t>
+            </a:r>
+            <a:r>
+              <a:rPr sz="1650" b="0" dirty="0" err="1">
+                <a:solidFill>
+                  <a:srgbClr val="E5E7EB"/>
+                </a:solidFill>
+                <a:latin typeface="Consolas"/>
+                <a:ea typeface="Consolas"/>
+                <a:cs typeface="Consolas"/>
+              </a:rPr>
+              <a:t>i</a:t>
+            </a:r>
+            <a:r>
+              <a:rPr sz="1650" b="0" dirty="0">
+                <a:solidFill>
+                  <a:srgbClr val="E5E7EB"/>
+                </a:solidFill>
+                <a:latin typeface="Consolas"/>
+                <a:ea typeface="Consolas"/>
+                <a:cs typeface="Consolas"/>
+              </a:rPr>
+              <a:t> my-flask-app.tar</a:t>
+            </a:r>
+            <a:endParaRPr lang="en-US" sz="1650" b="0" dirty="0">
+              <a:solidFill>
+                <a:srgbClr val="E5E7EB"/>
+              </a:solidFill>
+              <a:latin typeface="Consolas"/>
+              <a:ea typeface="Consolas"/>
+              <a:cs typeface="Consolas"/>
+            </a:endParaRPr>
+          </a:p>
+          <a:p>
+            <a:pPr algn="l">
+              <a:lnSpc>
+                <a:spcPct val="104000"/>
+              </a:lnSpc>
+              <a:buNone/>
+              <a:defRPr sz="1650" b="0">
+                <a:solidFill>
+                  <a:srgbClr val="E5E7EB"/>
+                </a:solidFill>
+                <a:latin typeface="Consolas"/>
+                <a:ea typeface="Consolas"/>
+                <a:cs typeface="Consolas"/>
+              </a:defRPr>
+            </a:pPr>
+            <a:r>
+              <a:rPr lang="en-US" sz="1650" dirty="0">
+                <a:solidFill>
+                  <a:srgbClr val="E5E7EB"/>
+                </a:solidFill>
+                <a:latin typeface="Consolas"/>
+                <a:ea typeface="Consolas"/>
+                <a:cs typeface="Consolas"/>
+              </a:rPr>
+              <a:t>docker export my-container -o snapshot.tar</a:t>
+            </a:r>
+          </a:p>
+          <a:p>
+            <a:pPr algn="l">
+              <a:lnSpc>
+                <a:spcPct val="104000"/>
+              </a:lnSpc>
+              <a:buNone/>
+              <a:defRPr sz="1650" b="0">
+                <a:solidFill>
+                  <a:srgbClr val="E5E7EB"/>
+                </a:solidFill>
+                <a:latin typeface="Consolas"/>
+                <a:ea typeface="Consolas"/>
+                <a:cs typeface="Consolas"/>
+              </a:defRPr>
+            </a:pPr>
+            <a:r>
+              <a:rPr lang="sv-SE" sz="1650" dirty="0">
+                <a:solidFill>
+                  <a:srgbClr val="E5E7EB"/>
+                </a:solidFill>
+                <a:latin typeface="Consolas"/>
+                <a:ea typeface="Consolas"/>
+                <a:cs typeface="Consolas"/>
+              </a:rPr>
+              <a:t>docker import snapshot.tar my-image:snapshot</a:t>
+            </a:r>
+            <a:endParaRPr lang="en-US" sz="1650" dirty="0">
+              <a:solidFill>
+                <a:srgbClr val="E5E7EB"/>
+              </a:solidFill>
+              <a:latin typeface="Consolas"/>
+              <a:ea typeface="Consolas"/>
+              <a:cs typeface="Consolas"/>
+            </a:endParaRPr>
+          </a:p>
+          <a:p>
+            <a:pPr algn="l">
+              <a:lnSpc>
+                <a:spcPct val="104000"/>
+              </a:lnSpc>
+              <a:buNone/>
+              <a:defRPr sz="1650" b="0">
+                <a:solidFill>
+                  <a:srgbClr val="E5E7EB"/>
+                </a:solidFill>
+                <a:latin typeface="Consolas"/>
+                <a:ea typeface="Consolas"/>
+                <a:cs typeface="Consolas"/>
+              </a:defRPr>
+            </a:pPr>
+            <a:endParaRPr lang="en-US" sz="1650" dirty="0">
+              <a:solidFill>
+                <a:srgbClr val="E5E7EB"/>
+              </a:solidFill>
+              <a:latin typeface="Consolas"/>
+              <a:ea typeface="Consolas"/>
+              <a:cs typeface="Consolas"/>
+            </a:endParaRPr>
+          </a:p>
+          <a:p>
+            <a:pPr algn="l">
+              <a:lnSpc>
+                <a:spcPct val="104000"/>
+              </a:lnSpc>
+              <a:buNone/>
+              <a:defRPr sz="1650" b="0">
+                <a:solidFill>
+                  <a:srgbClr val="E5E7EB"/>
+                </a:solidFill>
+                <a:latin typeface="Consolas"/>
+                <a:ea typeface="Consolas"/>
+                <a:cs typeface="Consolas"/>
+              </a:defRPr>
+            </a:pPr>
+            <a:endParaRPr sz="1650" b="0" dirty="0">
+              <a:solidFill>
+                <a:srgbClr val="E5E7EB"/>
+              </a:solidFill>
+              <a:latin typeface="Consolas"/>
+              <a:ea typeface="Consolas"/>
+              <a:cs typeface="Consolas"/>
+            </a:endParaRPr>
           </a:p>
         </p:txBody>
       </p:sp>
@@ -21367,7 +22620,7 @@
 </p:sld>
 </file>
 
-<file path=ppt/slides/slide27.xml><?xml version="1.0" encoding="utf-8"?>
+<file path=ppt/slides/slide28.xml><?xml version="1.0" encoding="utf-8"?>
 <p:sld xmlns:a="http://schemas.openxmlformats.org/drawingml/2006/main" xmlns:r="http://schemas.openxmlformats.org/officeDocument/2006/relationships" xmlns:p="http://schemas.openxmlformats.org/presentationml/2006/main">
   <p:cSld>
     <p:bg>
@@ -23502,7 +24755,7 @@
               <a:buNone/>
             </a:pPr>
             <a:r>
-              <a:rPr sz="1800" b="0" i="0" u="none" cap="none" spc="0">
+              <a:rPr sz="1800" b="0" i="0" u="none" cap="none" spc="0" dirty="0">
                 <a:ln>
                   <a:noFill/>
                 </a:ln>
@@ -23530,7 +24783,7 @@
               <a:buNone/>
             </a:pPr>
             <a:r>
-              <a:rPr sz="1800" b="0" i="0" u="none" cap="none" spc="0">
+              <a:rPr sz="1800" b="0" i="0" u="none" cap="none" spc="0" dirty="0">
                 <a:ln>
                   <a:noFill/>
                 </a:ln>
@@ -23558,7 +24811,7 @@
               <a:buNone/>
             </a:pPr>
             <a:r>
-              <a:rPr sz="1800" b="0" i="0" u="none" cap="none" spc="0">
+              <a:rPr sz="1800" b="0" i="0" u="none" cap="none" spc="0" dirty="0">
                 <a:ln>
                   <a:noFill/>
                 </a:ln>
@@ -23585,7 +24838,7 @@
               </a:spcAft>
               <a:buNone/>
             </a:pPr>
-            <a:endParaRPr sz="1800" b="0" i="0" u="none" cap="none" spc="0">
+            <a:endParaRPr sz="1800" b="0" i="0" u="none" cap="none" spc="0" dirty="0">
               <a:ln>
                 <a:noFill/>
               </a:ln>
@@ -23611,7 +24864,7 @@
               <a:buNone/>
             </a:pPr>
             <a:r>
-              <a:rPr sz="1800" b="0" i="0" u="none" cap="none" spc="0">
+              <a:rPr sz="1800" b="0" i="0" u="none" cap="none" spc="0" dirty="0">
                 <a:ln>
                   <a:noFill/>
                 </a:ln>
@@ -23639,7 +24892,7 @@
               <a:buNone/>
             </a:pPr>
             <a:r>
-              <a:rPr sz="1800" b="0" i="0" u="none" cap="none" spc="0">
+              <a:rPr sz="1800" b="0" i="0" u="none" cap="none" spc="0" dirty="0">
                 <a:ln>
                   <a:noFill/>
                 </a:ln>
@@ -23667,7 +24920,7 @@
               <a:buNone/>
             </a:pPr>
             <a:r>
-              <a:rPr sz="1800" b="0" i="0" u="none" cap="none" spc="0">
+              <a:rPr sz="1800" b="0" i="0" u="none" cap="none" spc="0" dirty="0">
                 <a:ln>
                   <a:noFill/>
                 </a:ln>
@@ -23678,7 +24931,35 @@
                 <a:ea typeface="Consolas"/>
                 <a:cs typeface="Consolas"/>
               </a:rPr>
-              <a:t>    return "&lt;h1&gt;Hello Flask Dockerfile!&lt;/h1&gt;"</a:t>
+              <a:t>    return "&lt;h1&gt;Hello Flask </a:t>
+            </a:r>
+            <a:r>
+              <a:rPr sz="1800" b="0" i="0" u="none" cap="none" spc="0" dirty="0" err="1">
+                <a:ln>
+                  <a:noFill/>
+                </a:ln>
+                <a:solidFill>
+                  <a:srgbClr val="E5E7EB"/>
+                </a:solidFill>
+                <a:latin typeface="Consolas"/>
+                <a:ea typeface="Consolas"/>
+                <a:cs typeface="Consolas"/>
+              </a:rPr>
+              <a:t>Dockerfile</a:t>
+            </a:r>
+            <a:r>
+              <a:rPr sz="1800" b="0" i="0" u="none" cap="none" spc="0" dirty="0">
+                <a:ln>
+                  <a:noFill/>
+                </a:ln>
+                <a:solidFill>
+                  <a:srgbClr val="E5E7EB"/>
+                </a:solidFill>
+                <a:latin typeface="Consolas"/>
+                <a:ea typeface="Consolas"/>
+                <a:cs typeface="Consolas"/>
+              </a:rPr>
+              <a:t>!&lt;/h1&gt;"</a:t>
             </a:r>
           </a:p>
           <a:p>
@@ -23694,7 +24975,7 @@
               </a:spcAft>
               <a:buNone/>
             </a:pPr>
-            <a:endParaRPr sz="1800" b="0" i="0" u="none" cap="none" spc="0">
+            <a:endParaRPr sz="1800" b="0" i="0" u="none" cap="none" spc="0" dirty="0">
               <a:ln>
                 <a:noFill/>
               </a:ln>
@@ -23720,7 +25001,7 @@
               <a:buNone/>
             </a:pPr>
             <a:r>
-              <a:rPr sz="1800" b="0" i="0" u="none" cap="none" spc="0">
+              <a:rPr sz="1800" b="0" i="0" u="none" cap="none" spc="0" dirty="0">
                 <a:ln>
                   <a:noFill/>
                 </a:ln>
@@ -23748,7 +25029,7 @@
               <a:buNone/>
             </a:pPr>
             <a:r>
-              <a:rPr sz="1800" b="0" i="0" u="none" cap="none" spc="0">
+              <a:rPr sz="1800" b="0" i="0" u="none" cap="none" spc="0" dirty="0">
                 <a:ln>
                   <a:noFill/>
                 </a:ln>
@@ -23759,7 +25040,35 @@
                 <a:ea typeface="Consolas"/>
                 <a:cs typeface="Consolas"/>
               </a:rPr>
-              <a:t>    app.run(host="0.0.0.0", port=5000)</a:t>
+              <a:t>    </a:t>
+            </a:r>
+            <a:r>
+              <a:rPr sz="1800" b="0" i="0" u="none" cap="none" spc="0" dirty="0" err="1">
+                <a:ln>
+                  <a:noFill/>
+                </a:ln>
+                <a:solidFill>
+                  <a:srgbClr val="E5E7EB"/>
+                </a:solidFill>
+                <a:latin typeface="Consolas"/>
+                <a:ea typeface="Consolas"/>
+                <a:cs typeface="Consolas"/>
+              </a:rPr>
+              <a:t>app.run</a:t>
+            </a:r>
+            <a:r>
+              <a:rPr sz="1800" b="0" i="0" u="none" cap="none" spc="0" dirty="0">
+                <a:ln>
+                  <a:noFill/>
+                </a:ln>
+                <a:solidFill>
+                  <a:srgbClr val="E5E7EB"/>
+                </a:solidFill>
+                <a:latin typeface="Consolas"/>
+                <a:ea typeface="Consolas"/>
+                <a:cs typeface="Consolas"/>
+              </a:rPr>
+              <a:t>(host="0.0.0.0", port=5000)</a:t>
             </a:r>
           </a:p>
         </p:txBody>
@@ -29266,7 +30575,40 @@
                 <a:ea typeface="Consolas"/>
                 <a:cs typeface="Consolas"/>
               </a:rPr>
-              <a:t>docker run my-first-image -p</a:t>
+              <a:t>docker run</a:t>
+            </a:r>
+            <a:r>
+              <a:rPr lang="zh-TW" altLang="en-US" sz="1800" b="0" dirty="0">
+                <a:solidFill>
+                  <a:srgbClr val="E5E7EB"/>
+                </a:solidFill>
+                <a:latin typeface="Consolas"/>
+                <a:ea typeface="Consolas"/>
+                <a:cs typeface="Consolas"/>
+              </a:rPr>
+              <a:t> </a:t>
+            </a:r>
+            <a:r>
+              <a:rPr lang="en-US" altLang="zh-TW" sz="1800" b="0" dirty="0">
+                <a:solidFill>
+                  <a:srgbClr val="E5E7EB"/>
+                </a:solidFill>
+                <a:latin typeface="Consolas"/>
+                <a:ea typeface="Consolas"/>
+                <a:cs typeface="Consolas"/>
+              </a:rPr>
+              <a:t>–p 5000:5000</a:t>
+            </a:r>
+            <a:r>
+              <a:rPr sz="1800" b="0" dirty="0">
+                <a:solidFill>
+                  <a:srgbClr val="E5E7EB"/>
+                </a:solidFill>
+                <a:latin typeface="Consolas"/>
+                <a:ea typeface="Consolas"/>
+                <a:cs typeface="Consolas"/>
+              </a:rPr>
+              <a:t> my-first-image</a:t>
             </a:r>
           </a:p>
           <a:p>

--- a/slides/docker-session4-custom-image-dockerhub.pptx
+++ b/slides/docker-session4-custom-image-dockerhub.pptx
@@ -6017,6 +6017,107 @@
               </a:rPr>
               <a:t> </a:t>
             </a:r>
+            <a:endParaRPr lang="en-US" sz="1400" dirty="0">
+              <a:solidFill>
+                <a:srgbClr val="E5E7EB"/>
+              </a:solidFill>
+              <a:latin typeface="Consolas"/>
+              <a:ea typeface="Consolas"/>
+              <a:cs typeface="Consolas"/>
+            </a:endParaRPr>
+          </a:p>
+          <a:p>
+            <a:pPr algn="l">
+              <a:buNone/>
+              <a:defRPr sz="1050">
+                <a:solidFill>
+                  <a:srgbClr val="E5E7EB"/>
+                </a:solidFill>
+                <a:latin typeface="Consolas"/>
+                <a:ea typeface="Consolas"/>
+                <a:cs typeface="Consolas"/>
+              </a:defRPr>
+            </a:pPr>
+            <a:r>
+              <a:rPr lang="en-US" sz="1400" dirty="0">
+                <a:solidFill>
+                  <a:srgbClr val="E5E7EB"/>
+                </a:solidFill>
+                <a:latin typeface="Consolas"/>
+                <a:ea typeface="Consolas"/>
+                <a:cs typeface="Consolas"/>
+              </a:rPr>
+              <a:t>LABEL maintainer="your-email@example.com"</a:t>
+            </a:r>
+          </a:p>
+          <a:p>
+            <a:pPr algn="l">
+              <a:buNone/>
+              <a:defRPr sz="1050">
+                <a:solidFill>
+                  <a:srgbClr val="E5E7EB"/>
+                </a:solidFill>
+                <a:latin typeface="Consolas"/>
+                <a:ea typeface="Consolas"/>
+                <a:cs typeface="Consolas"/>
+              </a:defRPr>
+            </a:pPr>
+            <a:r>
+              <a:rPr lang="en-US" sz="1400" dirty="0">
+                <a:solidFill>
+                  <a:srgbClr val="E5E7EB"/>
+                </a:solidFill>
+                <a:latin typeface="Consolas"/>
+                <a:ea typeface="Consolas"/>
+                <a:cs typeface="Consolas"/>
+              </a:rPr>
+              <a:t>LABEL version="1.0"</a:t>
+            </a:r>
+          </a:p>
+          <a:p>
+            <a:pPr algn="l">
+              <a:buNone/>
+              <a:defRPr sz="1050">
+                <a:solidFill>
+                  <a:srgbClr val="E5E7EB"/>
+                </a:solidFill>
+                <a:latin typeface="Consolas"/>
+                <a:ea typeface="Consolas"/>
+                <a:cs typeface="Consolas"/>
+              </a:defRPr>
+            </a:pPr>
+            <a:r>
+              <a:rPr lang="en-US" sz="1400" dirty="0">
+                <a:solidFill>
+                  <a:srgbClr val="E5E7EB"/>
+                </a:solidFill>
+                <a:latin typeface="Consolas"/>
+                <a:ea typeface="Consolas"/>
+                <a:cs typeface="Consolas"/>
+              </a:rPr>
+              <a:t>LABEL description="My Flask web application"</a:t>
+            </a:r>
+          </a:p>
+          <a:p>
+            <a:pPr algn="l">
+              <a:buNone/>
+              <a:defRPr sz="1050">
+                <a:solidFill>
+                  <a:srgbClr val="E5E7EB"/>
+                </a:solidFill>
+                <a:latin typeface="Consolas"/>
+                <a:ea typeface="Consolas"/>
+                <a:cs typeface="Consolas"/>
+              </a:defRPr>
+            </a:pPr>
+            <a:endParaRPr sz="1400" dirty="0">
+              <a:solidFill>
+                <a:srgbClr val="E5E7EB"/>
+              </a:solidFill>
+              <a:latin typeface="Consolas"/>
+              <a:ea typeface="Consolas"/>
+              <a:cs typeface="Consolas"/>
+            </a:endParaRPr>
           </a:p>
           <a:p>
             <a:pPr algn="l">
@@ -25677,7 +25778,23 @@
                   <a:schemeClr val="bg1"/>
                 </a:solidFill>
               </a:rPr>
-              <a:t>COPY . .</a:t>
+              <a:t>COPY </a:t>
+            </a:r>
+            <a:r>
+              <a:rPr lang="en-US" altLang="zh-TW" sz="1600" dirty="0">
+                <a:solidFill>
+                  <a:schemeClr val="bg1"/>
+                </a:solidFill>
+              </a:rPr>
+              <a:t>app/</a:t>
+            </a:r>
+            <a:r>
+              <a:rPr lang="zh-TW" altLang="zh-TW" sz="1600" dirty="0">
+                <a:solidFill>
+                  <a:schemeClr val="bg1"/>
+                </a:solidFill>
+              </a:rPr>
+              <a:t> .</a:t>
             </a:r>
           </a:p>
           <a:p>
@@ -25741,48 +25858,6 @@
               </a:rPr>
               <a:t>CMD ["python", "app.py"]</a:t>
             </a:r>
-          </a:p>
-          <a:p>
-            <a:br>
-              <a:rPr lang="zh-TW" altLang="zh-TW" sz="1600" dirty="0">
-                <a:solidFill>
-                  <a:schemeClr val="bg1"/>
-                </a:solidFill>
-              </a:rPr>
-            </a:br>
-            <a:br>
-              <a:rPr lang="zh-TW" altLang="zh-TW" sz="1600" dirty="0">
-                <a:solidFill>
-                  <a:schemeClr val="bg1"/>
-                </a:solidFill>
-              </a:rPr>
-            </a:br>
-            <a:br>
-              <a:rPr lang="zh-TW" altLang="zh-TW" sz="1600" dirty="0">
-                <a:solidFill>
-                  <a:schemeClr val="bg1"/>
-                </a:solidFill>
-              </a:rPr>
-            </a:br>
-            <a:br>
-              <a:rPr lang="zh-TW" altLang="zh-TW" sz="1600" dirty="0">
-                <a:solidFill>
-                  <a:schemeClr val="bg1"/>
-                </a:solidFill>
-              </a:rPr>
-            </a:br>
-            <a:br>
-              <a:rPr lang="zh-TW" altLang="zh-TW" sz="1600" dirty="0">
-                <a:solidFill>
-                  <a:schemeClr val="bg1"/>
-                </a:solidFill>
-              </a:rPr>
-            </a:br>
-            <a:endParaRPr lang="zh-TW" altLang="zh-TW" sz="1600" dirty="0">
-              <a:solidFill>
-                <a:schemeClr val="bg1"/>
-              </a:solidFill>
-            </a:endParaRPr>
           </a:p>
         </p:txBody>
       </p:sp>

--- a/slides/docker-session4-custom-image-dockerhub.pptx
+++ b/slides/docker-session4-custom-image-dockerhub.pptx
@@ -5094,7 +5094,29 @@
                 <a:ea typeface="Consolas"/>
                 <a:cs typeface="Consolas"/>
               </a:rPr>
-              <a:t>COPY . .</a:t>
+              <a:t>COPY </a:t>
+            </a:r>
+            <a:r>
+              <a:rPr lang="en-US" sz="1400" dirty="0">
+                <a:solidFill>
+                  <a:srgbClr val="E5E7EB"/>
+                </a:solidFill>
+                <a:latin typeface="Consolas"/>
+                <a:ea typeface="Consolas"/>
+                <a:cs typeface="Consolas"/>
+              </a:rPr>
+              <a:t>app/</a:t>
+            </a:r>
+            <a:r>
+              <a:rPr sz="1400" dirty="0">
+                <a:solidFill>
+                  <a:srgbClr val="E5E7EB"/>
+                </a:solidFill>
+                <a:latin typeface="Consolas"/>
+                <a:ea typeface="Consolas"/>
+                <a:cs typeface="Consolas"/>
+              </a:rPr>
+              <a:t> .</a:t>
             </a:r>
           </a:p>
           <a:p>
@@ -5905,7 +5927,7 @@
               <a:t>COPY </a:t>
             </a:r>
             <a:r>
-              <a:rPr sz="1400" dirty="0" err="1">
+              <a:rPr lang="en-US" altLang="zh-TW" sz="1400" dirty="0">
                 <a:solidFill>
                   <a:srgbClr val="E5E7EB"/>
                 </a:solidFill>
@@ -5913,7 +5935,7 @@
                 <a:ea typeface="Consolas"/>
                 <a:cs typeface="Consolas"/>
               </a:rPr>
-              <a:t>requirements.txt</a:t>
+              <a:t>app/</a:t>
             </a:r>
             <a:r>
               <a:rPr sz="1400" dirty="0">
@@ -5924,7 +5946,7 @@
                 <a:ea typeface="Consolas"/>
                 <a:cs typeface="Consolas"/>
               </a:rPr>
-              <a:t> .</a:t>
+              <a:t>requirements.txt .</a:t>
             </a:r>
           </a:p>
           <a:p>
@@ -5991,7 +6013,29 @@
                 <a:ea typeface="Consolas"/>
                 <a:cs typeface="Consolas"/>
               </a:rPr>
-              <a:t>COPY . .</a:t>
+              <a:t>COPY </a:t>
+            </a:r>
+            <a:r>
+              <a:rPr lang="en-US" sz="1400" dirty="0">
+                <a:solidFill>
+                  <a:srgbClr val="E5E7EB"/>
+                </a:solidFill>
+                <a:latin typeface="Consolas"/>
+                <a:ea typeface="Consolas"/>
+                <a:cs typeface="Consolas"/>
+              </a:rPr>
+              <a:t>app/</a:t>
+            </a:r>
+            <a:r>
+              <a:rPr sz="1400" dirty="0">
+                <a:solidFill>
+                  <a:srgbClr val="E5E7EB"/>
+                </a:solidFill>
+                <a:latin typeface="Consolas"/>
+                <a:ea typeface="Consolas"/>
+                <a:cs typeface="Consolas"/>
+              </a:rPr>
+              <a:t> .</a:t>
             </a:r>
           </a:p>
           <a:p>
@@ -12820,62 +12864,13 @@
               </a:rPr>
               <a:t>build:</a:t>
             </a:r>
-          </a:p>
-          <a:p>
-            <a:r>
-              <a:rPr lang="zh-TW" altLang="en-US" dirty="0">
+            <a:r>
+              <a:rPr lang="en-US" altLang="zh-TW">
                 <a:solidFill>
                   <a:schemeClr val="bg1"/>
                 </a:solidFill>
               </a:rPr>
-              <a:t>    </a:t>
-            </a:r>
-            <a:r>
-              <a:rPr lang="zh-TW" altLang="zh-TW" dirty="0">
-                <a:solidFill>
-                  <a:schemeClr val="bg1"/>
-                </a:solidFill>
-              </a:rPr>
-              <a:t>context: .</a:t>
-            </a:r>
-            <a:r>
-              <a:rPr lang="en-US" altLang="zh-TW" dirty="0">
-                <a:solidFill>
-                  <a:schemeClr val="bg1"/>
-                </a:solidFill>
-              </a:rPr>
-              <a:t>/app</a:t>
-            </a:r>
-            <a:r>
-              <a:rPr lang="zh-TW" altLang="en-US" dirty="0">
-                <a:solidFill>
-                  <a:schemeClr val="bg1"/>
-                </a:solidFill>
-              </a:rPr>
-              <a:t>  </a:t>
-            </a:r>
-            <a:endParaRPr lang="zh-TW" altLang="zh-TW" dirty="0">
-              <a:solidFill>
-                <a:schemeClr val="bg1"/>
-              </a:solidFill>
-            </a:endParaRPr>
-          </a:p>
-          <a:p>
-            <a:r>
-              <a:rPr lang="zh-TW" altLang="en-US" dirty="0">
-                <a:solidFill>
-                  <a:schemeClr val="bg1"/>
-                </a:solidFill>
-              </a:rPr>
-              <a:t>    </a:t>
-            </a:r>
-            <a:r>
-              <a:rPr lang="zh-TW" altLang="zh-TW" dirty="0">
-                <a:solidFill>
-                  <a:schemeClr val="bg1"/>
-                </a:solidFill>
-              </a:rPr>
-              <a:t>dockerfile: Dockerfile</a:t>
+              <a:t> .</a:t>
             </a:r>
           </a:p>
           <a:p>
